--- a/presentation-build/2026-03-21-stock-pattern-decision-tool/stock-pattern-decision-tool.pptx
+++ b/presentation-build/2026-03-21-stock-pattern-decision-tool/stock-pattern-decision-tool.pptx
@@ -4,6 +4,9 @@
   <p:sldMasterIdLst>
     <p:sldMasterId id="2147483648" r:id="rId1"/>
   </p:sldMasterIdLst>
+  <p:notesMasterIdLst>
+    <p:notesMasterId r:id="rId57"/>
+  </p:notesMasterIdLst>
   <p:sldIdLst>
     <p:sldId id="256" r:id="rId2"/>
     <p:sldId id="257" r:id="rId3"/>
@@ -61,9 +64,6 @@
     <p:sldId id="309" r:id="rId55"/>
     <p:sldId id="310" r:id="rId56"/>
   </p:sldIdLst>
-  <p:notesMasterIdLst>
-    <p:notesMasterId r:id="rId57"/>
-  </p:notesMasterIdLst>
   <p:sldSz cx="12192000" cy="6858000"/>
   <p:notesSz cx="6858000" cy="12192000"/>
   <p:defaultTextStyle>
@@ -158,6 +158,11 @@
       </a:defRPr>
     </a:lvl9pPr>
   </p:defaultTextStyle>
+  <p:extLst>
+    <p:ext uri="{EFAFB233-063F-42B5-8137-9DF3F51BA10A}">
+      <p15:sldGuideLst xmlns:p15="http://schemas.microsoft.com/office/powerpoint/2012/main"/>
+    </p:ext>
+  </p:extLst>
 </p:presentation>
 </file>
 
@@ -183,240 +188,16 @@
           <a:chExt cx="0" cy="0"/>
         </a:xfrm>
       </p:grpSpPr>
-      <p:sp>
-        <p:nvSpPr>
-          <p:cNvPr id="2" name="Header Placeholder 1"/>
-          <p:cNvSpPr>
-            <a:spLocks noGrp="1"/>
-          </p:cNvSpPr>
-          <p:nvPr>
-            <p:ph type="hdr" sz="quarter"/>
-          </p:nvPr>
-        </p:nvSpPr>
-        <p:spPr>
-          <a:xfrm>
-            <a:off x="0" y="0"/>
-            <a:ext cx="2971800" cy="458788"/>
-          </a:xfrm>
-          <a:prstGeom prst="rect">
-            <a:avLst/>
-          </a:prstGeom>
-        </p:spPr>
-        <p:txBody>
-          <a:bodyPr vert="horz" lIns="91440" tIns="45720" rIns="91440" bIns="45720" rtlCol="0"/>
-          <a:lstStyle>
-            <a:lvl1pPr algn="l">
-              <a:defRPr sz="1200"/>
-            </a:lvl1pPr>
-          </a:lstStyle>
-          <a:p>
-            <a:endParaRPr lang="en-US"/>
-          </a:p>
-        </p:txBody>
-      </p:sp>
-      <p:sp>
-        <p:nvSpPr>
-          <p:cNvPr id="3" name="Date Placeholder 2"/>
-          <p:cNvSpPr>
-            <a:spLocks noGrp="1"/>
-          </p:cNvSpPr>
-          <p:nvPr>
-            <p:ph type="dt" idx="1"/>
-          </p:nvPr>
-        </p:nvSpPr>
-        <p:spPr>
-          <a:xfrm>
-            <a:off x="3884613" y="0"/>
-            <a:ext cx="2971800" cy="458788"/>
-          </a:xfrm>
-          <a:prstGeom prst="rect">
-            <a:avLst/>
-          </a:prstGeom>
-        </p:spPr>
-        <p:txBody>
-          <a:bodyPr vert="horz" lIns="91440" tIns="45720" rIns="91440" bIns="45720" rtlCol="0"/>
-          <a:lstStyle>
-            <a:lvl1pPr algn="r">
-              <a:defRPr sz="1200"/>
-            </a:lvl1pPr>
-          </a:lstStyle>
-          <a:p>
-            <a:fld id="{5282F153-3F37-0F45-9E97-73ACFA13230C}" type="datetimeFigureOut">
-              <a:rPr lang="en-US"/>
-              <a:t>7/23/19</a:t>
-            </a:fld>
-            <a:endParaRPr lang="en-US"/>
-          </a:p>
-        </p:txBody>
-      </p:sp>
-      <p:sp>
-        <p:nvSpPr>
-          <p:cNvPr id="4" name="Slide Image Placeholder 3"/>
-          <p:cNvSpPr>
-            <a:spLocks noGrp="1" noRot="1" noChangeAspect="1"/>
-          </p:cNvSpPr>
-          <p:nvPr>
-            <p:ph type="sldImg" idx="2"/>
-          </p:nvPr>
-        </p:nvSpPr>
-        <p:spPr>
-          <a:xfrm>
-            <a:off x="685800" y="1143000"/>
-            <a:ext cx="5486400" cy="3086100"/>
-          </a:xfrm>
-          <a:prstGeom prst="rect">
-            <a:avLst/>
-          </a:prstGeom>
-          <a:noFill/>
-          <a:ln w="12700">
-            <a:solidFill>
-              <a:prstClr val="black"/>
-            </a:solidFill>
-          </a:ln>
-        </p:spPr>
-        <p:txBody>
-          <a:bodyPr vert="horz" lIns="91440" tIns="45720" rIns="91440" bIns="45720" rtlCol="0" anchor="ctr"/>
-          <a:lstStyle/>
-          <a:p>
-            <a:endParaRPr lang="en-US"/>
-          </a:p>
-        </p:txBody>
-      </p:sp>
-      <p:sp>
-        <p:nvSpPr>
-          <p:cNvPr id="5" name="Notes Placeholder 4"/>
-          <p:cNvSpPr>
-            <a:spLocks noGrp="1"/>
-          </p:cNvSpPr>
-          <p:nvPr>
-            <p:ph type="body" sz="quarter" idx="3"/>
-          </p:nvPr>
-        </p:nvSpPr>
-        <p:spPr>
-          <a:xfrm>
-            <a:off x="685800" y="4400550"/>
-            <a:ext cx="5486400" cy="3600450"/>
-          </a:xfrm>
-          <a:prstGeom prst="rect">
-            <a:avLst/>
-          </a:prstGeom>
-        </p:spPr>
-        <p:txBody>
-          <a:bodyPr vert="horz" lIns="91440" tIns="45720" rIns="91440" bIns="45720" rtlCol="0"/>
-          <a:lstStyle/>
-          <a:p>
-            <a:pPr lvl="0"/>
-            <a:r>
-              <a:rPr lang="en-US"/>
-              <a:t>Click to edit Master text styles</a:t>
-            </a:r>
-          </a:p>
-          <a:p>
-            <a:pPr lvl="1"/>
-            <a:r>
-              <a:rPr lang="en-US"/>
-              <a:t>Second level</a:t>
-            </a:r>
-          </a:p>
-          <a:p>
-            <a:pPr lvl="2"/>
-            <a:r>
-              <a:rPr lang="en-US"/>
-              <a:t>Third level</a:t>
-            </a:r>
-          </a:p>
-          <a:p>
-            <a:pPr lvl="3"/>
-            <a:r>
-              <a:rPr lang="en-US"/>
-              <a:t>Fourth level</a:t>
-            </a:r>
-          </a:p>
-          <a:p>
-            <a:pPr lvl="4"/>
-            <a:r>
-              <a:rPr lang="en-US"/>
-              <a:t>Fifth level</a:t>
-            </a:r>
-          </a:p>
-        </p:txBody>
-      </p:sp>
-      <p:sp>
-        <p:nvSpPr>
-          <p:cNvPr id="6" name="Footer Placeholder 5"/>
-          <p:cNvSpPr>
-            <a:spLocks noGrp="1"/>
-          </p:cNvSpPr>
-          <p:nvPr>
-            <p:ph type="ftr" sz="quarter" idx="4"/>
-          </p:nvPr>
-        </p:nvSpPr>
-        <p:spPr>
-          <a:xfrm>
-            <a:off x="0" y="8685213"/>
-            <a:ext cx="2971800" cy="458787"/>
-          </a:xfrm>
-          <a:prstGeom prst="rect">
-            <a:avLst/>
-          </a:prstGeom>
-        </p:spPr>
-        <p:txBody>
-          <a:bodyPr vert="horz" lIns="91440" tIns="45720" rIns="91440" bIns="45720" rtlCol="0" anchor="b"/>
-          <a:lstStyle>
-            <a:lvl1pPr algn="l">
-              <a:defRPr sz="1200"/>
-            </a:lvl1pPr>
-          </a:lstStyle>
-          <a:p>
-            <a:endParaRPr lang="en-US"/>
-          </a:p>
-        </p:txBody>
-      </p:sp>
-      <p:sp>
-        <p:nvSpPr>
-          <p:cNvPr id="7" name="Slide Number Placeholder 6"/>
-          <p:cNvSpPr>
-            <a:spLocks noGrp="1"/>
-          </p:cNvSpPr>
-          <p:nvPr>
-            <p:ph type="sldNum" sz="quarter" idx="5"/>
-          </p:nvPr>
-        </p:nvSpPr>
-        <p:spPr>
-          <a:xfrm>
-            <a:off x="3884613" y="8685213"/>
-            <a:ext cx="2971800" cy="458787"/>
-          </a:xfrm>
-          <a:prstGeom prst="rect">
-            <a:avLst/>
-          </a:prstGeom>
-        </p:spPr>
-        <p:txBody>
-          <a:bodyPr vert="horz" lIns="91440" tIns="45720" rIns="91440" bIns="45720" rtlCol="0" anchor="b"/>
-          <a:lstStyle>
-            <a:lvl1pPr algn="r">
-              <a:defRPr sz="1200"/>
-            </a:lvl1pPr>
-          </a:lstStyle>
-          <a:p>
-            <a:fld id="{CE5E9CC1-C706-0F49-92D6-E571CC5EEA8F}" type="slidenum">
-              <a:rPr lang="en-US"/>
-              <a:t>‹#›</a:t>
-            </a:fld>
-            <a:endParaRPr lang="en-US"/>
-          </a:p>
-        </p:txBody>
-      </p:sp>
     </p:spTree>
     <p:extLst>
       <p:ext uri="{BB962C8B-B14F-4D97-AF65-F5344CB8AC3E}">
-        <p14:creationId xmlns:p14="http://schemas.microsoft.com/office/powerpoint/2010/main" val="1024086991"/>
+        <p14:creationId xmlns:p14="http://schemas.microsoft.com/office/powerpoint/2010/main" val="3760260524"/>
       </p:ext>
     </p:extLst>
   </p:cSld>
   <p:clrMap bg1="lt1" tx1="dk1" bg2="lt2" tx2="dk2" accent1="accent1" accent2="accent2" accent3="accent3" accent4="accent4" accent5="accent5" accent6="accent6" hlink="hlink" folHlink="folHlink"/>
   <p:notesStyle>
-    <a:lvl1pPr marL="0" algn="l" defTabSz="914400" rtl="0" eaLnBrk="1" latinLnBrk="0" hangingPunct="1">
+    <a:lvl1pPr marL="0" algn="l" defTabSz="914400" rtl="0" eaLnBrk="1" latinLnBrk="1" hangingPunct="1">
       <a:defRPr sz="1200" kern="1200">
         <a:solidFill>
           <a:schemeClr val="tx1"/>
@@ -426,7 +207,7 @@
         <a:cs typeface="+mn-cs"/>
       </a:defRPr>
     </a:lvl1pPr>
-    <a:lvl2pPr marL="457200" algn="l" defTabSz="914400" rtl="0" eaLnBrk="1" latinLnBrk="0" hangingPunct="1">
+    <a:lvl2pPr marL="457200" algn="l" defTabSz="914400" rtl="0" eaLnBrk="1" latinLnBrk="1" hangingPunct="1">
       <a:defRPr sz="1200" kern="1200">
         <a:solidFill>
           <a:schemeClr val="tx1"/>
@@ -436,7 +217,7 @@
         <a:cs typeface="+mn-cs"/>
       </a:defRPr>
     </a:lvl2pPr>
-    <a:lvl3pPr marL="914400" algn="l" defTabSz="914400" rtl="0" eaLnBrk="1" latinLnBrk="0" hangingPunct="1">
+    <a:lvl3pPr marL="914400" algn="l" defTabSz="914400" rtl="0" eaLnBrk="1" latinLnBrk="1" hangingPunct="1">
       <a:defRPr sz="1200" kern="1200">
         <a:solidFill>
           <a:schemeClr val="tx1"/>
@@ -446,7 +227,7 @@
         <a:cs typeface="+mn-cs"/>
       </a:defRPr>
     </a:lvl3pPr>
-    <a:lvl4pPr marL="1371600" algn="l" defTabSz="914400" rtl="0" eaLnBrk="1" latinLnBrk="0" hangingPunct="1">
+    <a:lvl4pPr marL="1371600" algn="l" defTabSz="914400" rtl="0" eaLnBrk="1" latinLnBrk="1" hangingPunct="1">
       <a:defRPr sz="1200" kern="1200">
         <a:solidFill>
           <a:schemeClr val="tx1"/>
@@ -456,7 +237,7 @@
         <a:cs typeface="+mn-cs"/>
       </a:defRPr>
     </a:lvl4pPr>
-    <a:lvl5pPr marL="1828800" algn="l" defTabSz="914400" rtl="0" eaLnBrk="1" latinLnBrk="0" hangingPunct="1">
+    <a:lvl5pPr marL="1828800" algn="l" defTabSz="914400" rtl="0" eaLnBrk="1" latinLnBrk="1" hangingPunct="1">
       <a:defRPr sz="1200" kern="1200">
         <a:solidFill>
           <a:schemeClr val="tx1"/>
@@ -466,7 +247,7 @@
         <a:cs typeface="+mn-cs"/>
       </a:defRPr>
     </a:lvl5pPr>
-    <a:lvl6pPr marL="2286000" algn="l" defTabSz="914400" rtl="0" eaLnBrk="1" latinLnBrk="0" hangingPunct="1">
+    <a:lvl6pPr marL="2286000" algn="l" defTabSz="914400" rtl="0" eaLnBrk="1" latinLnBrk="1" hangingPunct="1">
       <a:defRPr sz="1200" kern="1200">
         <a:solidFill>
           <a:schemeClr val="tx1"/>
@@ -476,7 +257,7 @@
         <a:cs typeface="+mn-cs"/>
       </a:defRPr>
     </a:lvl6pPr>
-    <a:lvl7pPr marL="2743200" algn="l" defTabSz="914400" rtl="0" eaLnBrk="1" latinLnBrk="0" hangingPunct="1">
+    <a:lvl7pPr marL="2743200" algn="l" defTabSz="914400" rtl="0" eaLnBrk="1" latinLnBrk="1" hangingPunct="1">
       <a:defRPr sz="1200" kern="1200">
         <a:solidFill>
           <a:schemeClr val="tx1"/>
@@ -486,7 +267,7 @@
         <a:cs typeface="+mn-cs"/>
       </a:defRPr>
     </a:lvl7pPr>
-    <a:lvl8pPr marL="3200400" algn="l" defTabSz="914400" rtl="0" eaLnBrk="1" latinLnBrk="0" hangingPunct="1">
+    <a:lvl8pPr marL="3200400" algn="l" defTabSz="914400" rtl="0" eaLnBrk="1" latinLnBrk="1" hangingPunct="1">
       <a:defRPr sz="1200" kern="1200">
         <a:solidFill>
           <a:schemeClr val="tx1"/>
@@ -496,7 +277,7 @@
         <a:cs typeface="+mn-cs"/>
       </a:defRPr>
     </a:lvl8pPr>
-    <a:lvl9pPr marL="3657600" algn="l" defTabSz="914400" rtl="0" eaLnBrk="1" latinLnBrk="0" hangingPunct="1">
+    <a:lvl9pPr marL="3657600" algn="l" defTabSz="914400" rtl="0" eaLnBrk="1" latinLnBrk="1" hangingPunct="1">
       <a:defRPr sz="1200" kern="1200">
         <a:solidFill>
           <a:schemeClr val="tx1"/>
@@ -554,10 +335,6 @@
           <a:bodyPr/>
           <a:lstStyle/>
           <a:p>
-            <a:r>
-              <a:rPr lang="en-US" dirty="0"/>
-              <a:t/>
-            </a:r>
             <a:endParaRPr lang="en-US" dirty="0"/>
           </a:p>
         </p:txBody>
@@ -642,10 +419,6 @@
           <a:bodyPr/>
           <a:lstStyle/>
           <a:p>
-            <a:r>
-              <a:rPr lang="en-US" dirty="0"/>
-              <a:t/>
-            </a:r>
             <a:endParaRPr lang="en-US" dirty="0"/>
           </a:p>
         </p:txBody>
@@ -730,10 +503,6 @@
           <a:bodyPr/>
           <a:lstStyle/>
           <a:p>
-            <a:r>
-              <a:rPr lang="en-US" dirty="0"/>
-              <a:t/>
-            </a:r>
             <a:endParaRPr lang="en-US" dirty="0"/>
           </a:p>
         </p:txBody>
@@ -818,10 +587,6 @@
           <a:bodyPr/>
           <a:lstStyle/>
           <a:p>
-            <a:r>
-              <a:rPr lang="en-US" dirty="0"/>
-              <a:t/>
-            </a:r>
             <a:endParaRPr lang="en-US" dirty="0"/>
           </a:p>
         </p:txBody>
@@ -906,10 +671,6 @@
           <a:bodyPr/>
           <a:lstStyle/>
           <a:p>
-            <a:r>
-              <a:rPr lang="en-US" dirty="0"/>
-              <a:t/>
-            </a:r>
             <a:endParaRPr lang="en-US" dirty="0"/>
           </a:p>
         </p:txBody>
@@ -994,10 +755,6 @@
           <a:bodyPr/>
           <a:lstStyle/>
           <a:p>
-            <a:r>
-              <a:rPr lang="en-US" dirty="0"/>
-              <a:t/>
-            </a:r>
             <a:endParaRPr lang="en-US" dirty="0"/>
           </a:p>
         </p:txBody>
@@ -1082,10 +839,6 @@
           <a:bodyPr/>
           <a:lstStyle/>
           <a:p>
-            <a:r>
-              <a:rPr lang="en-US" dirty="0"/>
-              <a:t/>
-            </a:r>
             <a:endParaRPr lang="en-US" dirty="0"/>
           </a:p>
         </p:txBody>
@@ -1170,10 +923,6 @@
           <a:bodyPr/>
           <a:lstStyle/>
           <a:p>
-            <a:r>
-              <a:rPr lang="en-US" dirty="0"/>
-              <a:t/>
-            </a:r>
             <a:endParaRPr lang="en-US" dirty="0"/>
           </a:p>
         </p:txBody>
@@ -1258,10 +1007,6 @@
           <a:bodyPr/>
           <a:lstStyle/>
           <a:p>
-            <a:r>
-              <a:rPr lang="en-US" dirty="0"/>
-              <a:t/>
-            </a:r>
             <a:endParaRPr lang="en-US" dirty="0"/>
           </a:p>
         </p:txBody>
@@ -1346,10 +1091,6 @@
           <a:bodyPr/>
           <a:lstStyle/>
           <a:p>
-            <a:r>
-              <a:rPr lang="en-US" dirty="0"/>
-              <a:t/>
-            </a:r>
             <a:endParaRPr lang="en-US" dirty="0"/>
           </a:p>
         </p:txBody>
@@ -1434,10 +1175,6 @@
           <a:bodyPr/>
           <a:lstStyle/>
           <a:p>
-            <a:r>
-              <a:rPr lang="en-US" dirty="0"/>
-              <a:t/>
-            </a:r>
             <a:endParaRPr lang="en-US" dirty="0"/>
           </a:p>
         </p:txBody>
@@ -1522,10 +1259,6 @@
           <a:bodyPr/>
           <a:lstStyle/>
           <a:p>
-            <a:r>
-              <a:rPr lang="en-US" dirty="0"/>
-              <a:t/>
-            </a:r>
             <a:endParaRPr lang="en-US" dirty="0"/>
           </a:p>
         </p:txBody>
@@ -1610,10 +1343,6 @@
           <a:bodyPr/>
           <a:lstStyle/>
           <a:p>
-            <a:r>
-              <a:rPr lang="en-US" dirty="0"/>
-              <a:t/>
-            </a:r>
             <a:endParaRPr lang="en-US" dirty="0"/>
           </a:p>
         </p:txBody>
@@ -1698,10 +1427,6 @@
           <a:bodyPr/>
           <a:lstStyle/>
           <a:p>
-            <a:r>
-              <a:rPr lang="en-US" dirty="0"/>
-              <a:t/>
-            </a:r>
             <a:endParaRPr lang="en-US" dirty="0"/>
           </a:p>
         </p:txBody>
@@ -1786,10 +1511,6 @@
           <a:bodyPr/>
           <a:lstStyle/>
           <a:p>
-            <a:r>
-              <a:rPr lang="en-US" dirty="0"/>
-              <a:t/>
-            </a:r>
             <a:endParaRPr lang="en-US" dirty="0"/>
           </a:p>
         </p:txBody>
@@ -1874,10 +1595,6 @@
           <a:bodyPr/>
           <a:lstStyle/>
           <a:p>
-            <a:r>
-              <a:rPr lang="en-US" dirty="0"/>
-              <a:t/>
-            </a:r>
             <a:endParaRPr lang="en-US" dirty="0"/>
           </a:p>
         </p:txBody>
@@ -1962,10 +1679,6 @@
           <a:bodyPr/>
           <a:lstStyle/>
           <a:p>
-            <a:r>
-              <a:rPr lang="en-US" dirty="0"/>
-              <a:t/>
-            </a:r>
             <a:endParaRPr lang="en-US" dirty="0"/>
           </a:p>
         </p:txBody>
@@ -2050,10 +1763,6 @@
           <a:bodyPr/>
           <a:lstStyle/>
           <a:p>
-            <a:r>
-              <a:rPr lang="en-US" dirty="0"/>
-              <a:t/>
-            </a:r>
             <a:endParaRPr lang="en-US" dirty="0"/>
           </a:p>
         </p:txBody>
@@ -2138,10 +1847,6 @@
           <a:bodyPr/>
           <a:lstStyle/>
           <a:p>
-            <a:r>
-              <a:rPr lang="en-US" dirty="0"/>
-              <a:t/>
-            </a:r>
             <a:endParaRPr lang="en-US" dirty="0"/>
           </a:p>
         </p:txBody>
@@ -2226,10 +1931,6 @@
           <a:bodyPr/>
           <a:lstStyle/>
           <a:p>
-            <a:r>
-              <a:rPr lang="en-US" dirty="0"/>
-              <a:t/>
-            </a:r>
             <a:endParaRPr lang="en-US" dirty="0"/>
           </a:p>
         </p:txBody>
@@ -2314,10 +2015,6 @@
           <a:bodyPr/>
           <a:lstStyle/>
           <a:p>
-            <a:r>
-              <a:rPr lang="en-US" dirty="0"/>
-              <a:t/>
-            </a:r>
             <a:endParaRPr lang="en-US" dirty="0"/>
           </a:p>
         </p:txBody>
@@ -2402,10 +2099,6 @@
           <a:bodyPr/>
           <a:lstStyle/>
           <a:p>
-            <a:r>
-              <a:rPr lang="en-US" dirty="0"/>
-              <a:t/>
-            </a:r>
             <a:endParaRPr lang="en-US" dirty="0"/>
           </a:p>
         </p:txBody>
@@ -2490,10 +2183,6 @@
           <a:bodyPr/>
           <a:lstStyle/>
           <a:p>
-            <a:r>
-              <a:rPr lang="en-US" dirty="0"/>
-              <a:t/>
-            </a:r>
             <a:endParaRPr lang="en-US" dirty="0"/>
           </a:p>
         </p:txBody>
@@ -2578,10 +2267,6 @@
           <a:bodyPr/>
           <a:lstStyle/>
           <a:p>
-            <a:r>
-              <a:rPr lang="en-US" dirty="0"/>
-              <a:t/>
-            </a:r>
             <a:endParaRPr lang="en-US" dirty="0"/>
           </a:p>
         </p:txBody>
@@ -2666,10 +2351,6 @@
           <a:bodyPr/>
           <a:lstStyle/>
           <a:p>
-            <a:r>
-              <a:rPr lang="en-US" dirty="0"/>
-              <a:t/>
-            </a:r>
             <a:endParaRPr lang="en-US" dirty="0"/>
           </a:p>
         </p:txBody>
@@ -2754,10 +2435,6 @@
           <a:bodyPr/>
           <a:lstStyle/>
           <a:p>
-            <a:r>
-              <a:rPr lang="en-US" dirty="0"/>
-              <a:t/>
-            </a:r>
             <a:endParaRPr lang="en-US" dirty="0"/>
           </a:p>
         </p:txBody>
@@ -2842,10 +2519,6 @@
           <a:bodyPr/>
           <a:lstStyle/>
           <a:p>
-            <a:r>
-              <a:rPr lang="en-US" dirty="0"/>
-              <a:t/>
-            </a:r>
             <a:endParaRPr lang="en-US" dirty="0"/>
           </a:p>
         </p:txBody>
@@ -2930,10 +2603,6 @@
           <a:bodyPr/>
           <a:lstStyle/>
           <a:p>
-            <a:r>
-              <a:rPr lang="en-US" dirty="0"/>
-              <a:t/>
-            </a:r>
             <a:endParaRPr lang="en-US" dirty="0"/>
           </a:p>
         </p:txBody>
@@ -3018,10 +2687,6 @@
           <a:bodyPr/>
           <a:lstStyle/>
           <a:p>
-            <a:r>
-              <a:rPr lang="en-US" dirty="0"/>
-              <a:t/>
-            </a:r>
             <a:endParaRPr lang="en-US" dirty="0"/>
           </a:p>
         </p:txBody>
@@ -3106,10 +2771,6 @@
           <a:bodyPr/>
           <a:lstStyle/>
           <a:p>
-            <a:r>
-              <a:rPr lang="en-US" dirty="0"/>
-              <a:t/>
-            </a:r>
             <a:endParaRPr lang="en-US" dirty="0"/>
           </a:p>
         </p:txBody>
@@ -3194,10 +2855,6 @@
           <a:bodyPr/>
           <a:lstStyle/>
           <a:p>
-            <a:r>
-              <a:rPr lang="en-US" dirty="0"/>
-              <a:t/>
-            </a:r>
             <a:endParaRPr lang="en-US" dirty="0"/>
           </a:p>
         </p:txBody>
@@ -3282,10 +2939,6 @@
           <a:bodyPr/>
           <a:lstStyle/>
           <a:p>
-            <a:r>
-              <a:rPr lang="en-US" dirty="0"/>
-              <a:t/>
-            </a:r>
             <a:endParaRPr lang="en-US" dirty="0"/>
           </a:p>
         </p:txBody>
@@ -3370,10 +3023,6 @@
           <a:bodyPr/>
           <a:lstStyle/>
           <a:p>
-            <a:r>
-              <a:rPr lang="en-US" dirty="0"/>
-              <a:t/>
-            </a:r>
             <a:endParaRPr lang="en-US" dirty="0"/>
           </a:p>
         </p:txBody>
@@ -3458,10 +3107,6 @@
           <a:bodyPr/>
           <a:lstStyle/>
           <a:p>
-            <a:r>
-              <a:rPr lang="en-US" dirty="0"/>
-              <a:t/>
-            </a:r>
             <a:endParaRPr lang="en-US" dirty="0"/>
           </a:p>
         </p:txBody>
@@ -3546,10 +3191,6 @@
           <a:bodyPr/>
           <a:lstStyle/>
           <a:p>
-            <a:r>
-              <a:rPr lang="en-US" dirty="0"/>
-              <a:t/>
-            </a:r>
             <a:endParaRPr lang="en-US" dirty="0"/>
           </a:p>
         </p:txBody>
@@ -3634,10 +3275,6 @@
           <a:bodyPr/>
           <a:lstStyle/>
           <a:p>
-            <a:r>
-              <a:rPr lang="en-US" dirty="0"/>
-              <a:t/>
-            </a:r>
             <a:endParaRPr lang="en-US" dirty="0"/>
           </a:p>
         </p:txBody>
@@ -3722,10 +3359,6 @@
           <a:bodyPr/>
           <a:lstStyle/>
           <a:p>
-            <a:r>
-              <a:rPr lang="en-US" dirty="0"/>
-              <a:t/>
-            </a:r>
             <a:endParaRPr lang="en-US" dirty="0"/>
           </a:p>
         </p:txBody>
@@ -3810,10 +3443,6 @@
           <a:bodyPr/>
           <a:lstStyle/>
           <a:p>
-            <a:r>
-              <a:rPr lang="en-US" dirty="0"/>
-              <a:t/>
-            </a:r>
             <a:endParaRPr lang="en-US" dirty="0"/>
           </a:p>
         </p:txBody>
@@ -3898,10 +3527,6 @@
           <a:bodyPr/>
           <a:lstStyle/>
           <a:p>
-            <a:r>
-              <a:rPr lang="en-US" dirty="0"/>
-              <a:t/>
-            </a:r>
             <a:endParaRPr lang="en-US" dirty="0"/>
           </a:p>
         </p:txBody>
@@ -3986,10 +3611,6 @@
           <a:bodyPr/>
           <a:lstStyle/>
           <a:p>
-            <a:r>
-              <a:rPr lang="en-US" dirty="0"/>
-              <a:t/>
-            </a:r>
             <a:endParaRPr lang="en-US" dirty="0"/>
           </a:p>
         </p:txBody>
@@ -4074,10 +3695,6 @@
           <a:bodyPr/>
           <a:lstStyle/>
           <a:p>
-            <a:r>
-              <a:rPr lang="en-US" dirty="0"/>
-              <a:t/>
-            </a:r>
             <a:endParaRPr lang="en-US" dirty="0"/>
           </a:p>
         </p:txBody>
@@ -4162,10 +3779,6 @@
           <a:bodyPr/>
           <a:lstStyle/>
           <a:p>
-            <a:r>
-              <a:rPr lang="en-US" dirty="0"/>
-              <a:t/>
-            </a:r>
             <a:endParaRPr lang="en-US" dirty="0"/>
           </a:p>
         </p:txBody>
@@ -4250,10 +3863,6 @@
           <a:bodyPr/>
           <a:lstStyle/>
           <a:p>
-            <a:r>
-              <a:rPr lang="en-US" dirty="0"/>
-              <a:t/>
-            </a:r>
             <a:endParaRPr lang="en-US" dirty="0"/>
           </a:p>
         </p:txBody>
@@ -4338,10 +3947,6 @@
           <a:bodyPr/>
           <a:lstStyle/>
           <a:p>
-            <a:r>
-              <a:rPr lang="en-US" dirty="0"/>
-              <a:t/>
-            </a:r>
             <a:endParaRPr lang="en-US" dirty="0"/>
           </a:p>
         </p:txBody>
@@ -4426,10 +4031,6 @@
           <a:bodyPr/>
           <a:lstStyle/>
           <a:p>
-            <a:r>
-              <a:rPr lang="en-US" dirty="0"/>
-              <a:t/>
-            </a:r>
             <a:endParaRPr lang="en-US" dirty="0"/>
           </a:p>
         </p:txBody>
@@ -4514,10 +4115,6 @@
           <a:bodyPr/>
           <a:lstStyle/>
           <a:p>
-            <a:r>
-              <a:rPr lang="en-US" dirty="0"/>
-              <a:t/>
-            </a:r>
             <a:endParaRPr lang="en-US" dirty="0"/>
           </a:p>
         </p:txBody>
@@ -4602,10 +4199,6 @@
           <a:bodyPr/>
           <a:lstStyle/>
           <a:p>
-            <a:r>
-              <a:rPr lang="en-US" dirty="0"/>
-              <a:t/>
-            </a:r>
             <a:endParaRPr lang="en-US" dirty="0"/>
           </a:p>
         </p:txBody>
@@ -4690,10 +4283,6 @@
           <a:bodyPr/>
           <a:lstStyle/>
           <a:p>
-            <a:r>
-              <a:rPr lang="en-US" dirty="0"/>
-              <a:t/>
-            </a:r>
             <a:endParaRPr lang="en-US" dirty="0"/>
           </a:p>
         </p:txBody>
@@ -4778,10 +4367,6 @@
           <a:bodyPr/>
           <a:lstStyle/>
           <a:p>
-            <a:r>
-              <a:rPr lang="en-US" dirty="0"/>
-              <a:t/>
-            </a:r>
             <a:endParaRPr lang="en-US" dirty="0"/>
           </a:p>
         </p:txBody>
@@ -4866,10 +4451,6 @@
           <a:bodyPr/>
           <a:lstStyle/>
           <a:p>
-            <a:r>
-              <a:rPr lang="en-US" dirty="0"/>
-              <a:t/>
-            </a:r>
             <a:endParaRPr lang="en-US" dirty="0"/>
           </a:p>
         </p:txBody>
@@ -4954,10 +4535,6 @@
           <a:bodyPr/>
           <a:lstStyle/>
           <a:p>
-            <a:r>
-              <a:rPr lang="en-US" dirty="0"/>
-              <a:t/>
-            </a:r>
             <a:endParaRPr lang="en-US" dirty="0"/>
           </a:p>
         </p:txBody>
@@ -5042,10 +4619,6 @@
           <a:bodyPr/>
           <a:lstStyle/>
           <a:p>
-            <a:r>
-              <a:rPr lang="en-US" dirty="0"/>
-              <a:t/>
-            </a:r>
             <a:endParaRPr lang="en-US" dirty="0"/>
           </a:p>
         </p:txBody>
@@ -5130,10 +4703,6 @@
           <a:bodyPr/>
           <a:lstStyle/>
           <a:p>
-            <a:r>
-              <a:rPr lang="en-US" dirty="0"/>
-              <a:t/>
-            </a:r>
             <a:endParaRPr lang="en-US" dirty="0"/>
           </a:p>
         </p:txBody>
@@ -5218,10 +4787,6 @@
           <a:bodyPr/>
           <a:lstStyle/>
           <a:p>
-            <a:r>
-              <a:rPr lang="en-US" dirty="0"/>
-              <a:t/>
-            </a:r>
             <a:endParaRPr lang="en-US" dirty="0"/>
           </a:p>
         </p:txBody>
@@ -5306,10 +4871,6 @@
           <a:bodyPr/>
           <a:lstStyle/>
           <a:p>
-            <a:r>
-              <a:rPr lang="en-US" dirty="0"/>
-              <a:t/>
-            </a:r>
             <a:endParaRPr lang="en-US" dirty="0"/>
           </a:p>
         </p:txBody>
@@ -5383,6 +4944,11 @@
 <file path=ppt/slideMasters/slideMaster1.xml><?xml version="1.0" encoding="utf-8"?>
 <p:sldMaster xmlns:a="http://schemas.openxmlformats.org/drawingml/2006/main" xmlns:r="http://schemas.openxmlformats.org/officeDocument/2006/relationships" xmlns:p="http://schemas.openxmlformats.org/presentationml/2006/main">
   <p:cSld>
+    <p:bg>
+      <p:bgRef idx="1001">
+        <a:schemeClr val="bg1"/>
+      </p:bgRef>
+    </p:bg>
     <p:spTree>
       <p:nvGrpSpPr>
         <p:cNvPr id="1" name=""/>
@@ -5693,6 +5259,13 @@
           </a:solidFill>
           <a:ln/>
         </p:spPr>
+        <p:txBody>
+          <a:bodyPr/>
+          <a:lstStyle/>
+          <a:p>
+            <a:endParaRPr lang="ko-KR" altLang="en-US"/>
+          </a:p>
+        </p:txBody>
       </p:sp>
       <p:sp>
         <p:nvSpPr>
@@ -5713,6 +5286,13 @@
           </a:solidFill>
           <a:ln/>
         </p:spPr>
+        <p:txBody>
+          <a:bodyPr/>
+          <a:lstStyle/>
+          <a:p>
+            <a:endParaRPr lang="ko-KR" altLang="en-US"/>
+          </a:p>
+        </p:txBody>
       </p:sp>
       <p:sp>
         <p:nvSpPr>
@@ -5735,14 +5315,14 @@
           <a:bodyPr wrap="square" rtlCol="0" anchor="ctr"/>
           <a:lstStyle/>
           <a:p>
-            <a:pPr algn="ctr" indent="0" marL="0">
+            <a:pPr marL="0" indent="0" algn="ctr">
               <a:lnSpc>
                 <a:spcPct val="115000"/>
               </a:lnSpc>
               <a:buNone/>
             </a:pPr>
             <a:r>
-              <a:rPr lang="en-US" sz="4400" b="1" spc="-50" kern="0" dirty="0">
+              <a:rPr lang="en-US" sz="4400" b="1" kern="0" spc="-50" dirty="0">
                 <a:solidFill>
                   <a:srgbClr val="FFFFFF"/>
                 </a:solidFill>
@@ -5755,14 +5335,14 @@
             <a:endParaRPr lang="en-US" sz="4400" dirty="0"/>
           </a:p>
           <a:p>
-            <a:pPr algn="ctr" indent="0" marL="0">
+            <a:pPr marL="0" indent="0" algn="ctr">
               <a:lnSpc>
                 <a:spcPct val="115000"/>
               </a:lnSpc>
               <a:buNone/>
             </a:pPr>
             <a:r>
-              <a:rPr lang="en-US" sz="4400" b="1" spc="-50" kern="0" dirty="0">
+              <a:rPr lang="en-US" sz="4400" b="1" kern="0" spc="-50" dirty="0">
                 <a:solidFill>
                   <a:srgbClr val="FFFFFF"/>
                 </a:solidFill>
@@ -5797,7 +5377,7 @@
           <a:bodyPr wrap="square" rtlCol="0" anchor="ctr"/>
           <a:lstStyle/>
           <a:p>
-            <a:pPr algn="ctr" indent="0" marL="0">
+            <a:pPr marL="0" indent="0" algn="ctr">
               <a:buNone/>
             </a:pPr>
             <a:r>
@@ -5838,7 +5418,7 @@
           <a:bodyPr wrap="square" rtlCol="0" anchor="ctr"/>
           <a:lstStyle/>
           <a:p>
-            <a:pPr algn="ctr" indent="0" marL="0">
+            <a:pPr marL="0" indent="0" algn="ctr">
               <a:buNone/>
             </a:pPr>
             <a:r>
@@ -5902,6 +5482,13 @@
           </a:solidFill>
           <a:ln/>
         </p:spPr>
+        <p:txBody>
+          <a:bodyPr/>
+          <a:lstStyle/>
+          <a:p>
+            <a:endParaRPr lang="ko-KR" altLang="en-US"/>
+          </a:p>
+        </p:txBody>
       </p:sp>
       <p:sp>
         <p:nvSpPr>
@@ -5926,11 +5513,11 @@
           </a:bodyPr>
           <a:lstStyle/>
           <a:p>
-            <a:pPr indent="0" marL="0">
+            <a:pPr marL="0" indent="0">
               <a:buNone/>
             </a:pPr>
             <a:r>
-              <a:rPr lang="en-US" sz="2800" b="1" spc="-30" kern="0" dirty="0">
+              <a:rPr lang="en-US" sz="2800" b="1" kern="0" spc="-30" dirty="0">
                 <a:solidFill>
                   <a:srgbClr val="1A1F36"/>
                 </a:solidFill>
@@ -5965,7 +5552,7 @@
           <a:bodyPr wrap="square" rtlCol="0" anchor="ctr"/>
           <a:lstStyle/>
           <a:p>
-            <a:pPr algn="r" indent="0" marL="0">
+            <a:pPr marL="0" indent="0" algn="r">
               <a:buNone/>
             </a:pPr>
             <a:r>
@@ -6170,6 +5757,13 @@
           </a:solidFill>
           <a:ln/>
         </p:spPr>
+        <p:txBody>
+          <a:bodyPr/>
+          <a:lstStyle/>
+          <a:p>
+            <a:endParaRPr lang="ko-KR" altLang="en-US"/>
+          </a:p>
+        </p:txBody>
       </p:sp>
       <p:sp>
         <p:nvSpPr>
@@ -6192,7 +5786,7 @@
           <a:bodyPr wrap="square" rtlCol="0" anchor="ctr"/>
           <a:lstStyle/>
           <a:p>
-            <a:pPr indent="0" marL="0">
+            <a:pPr marL="0" indent="0">
               <a:buNone/>
             </a:pPr>
             <a:r>
@@ -6254,6 +5848,13 @@
           </a:solidFill>
           <a:ln/>
         </p:spPr>
+        <p:txBody>
+          <a:bodyPr/>
+          <a:lstStyle/>
+          <a:p>
+            <a:endParaRPr lang="ko-KR" altLang="en-US"/>
+          </a:p>
+        </p:txBody>
       </p:sp>
       <p:sp>
         <p:nvSpPr>
@@ -6278,11 +5879,11 @@
           </a:bodyPr>
           <a:lstStyle/>
           <a:p>
-            <a:pPr indent="0" marL="0">
+            <a:pPr marL="0" indent="0">
               <a:buNone/>
             </a:pPr>
             <a:r>
-              <a:rPr lang="en-US" sz="2800" b="1" spc="-30" kern="0" dirty="0">
+              <a:rPr lang="en-US" sz="2800" b="1" kern="0" spc="-30" dirty="0">
                 <a:solidFill>
                   <a:srgbClr val="1A1F36"/>
                 </a:solidFill>
@@ -6317,7 +5918,7 @@
           <a:bodyPr wrap="square" rtlCol="0" anchor="ctr"/>
           <a:lstStyle/>
           <a:p>
-            <a:pPr algn="r" indent="0" marL="0">
+            <a:pPr marL="0" indent="0" algn="r">
               <a:buNone/>
             </a:pPr>
             <a:r>
@@ -6351,16 +5952,34 @@
         </p:nvGraphicFramePr>
         <p:xfrm>
           <a:off x="548640" y="1645920"/>
-          <a:ext cx="11091672" cy="914400"/>
+          <a:ext cx="11091672" cy="2651760"/>
         </p:xfrm>
         <a:graphic>
           <a:graphicData uri="http://schemas.openxmlformats.org/drawingml/2006/table">
             <a:tbl>
               <a:tblPr/>
               <a:tblGrid>
-                <a:gridCol w="3697224"/>
-                <a:gridCol w="3697224"/>
-                <a:gridCol w="3697224"/>
+                <a:gridCol w="3697224">
+                  <a:extLst>
+                    <a:ext uri="{9D8B030D-6E8A-4147-A177-3AD203B41FA5}">
+                      <a16:colId xmlns:a16="http://schemas.microsoft.com/office/drawing/2014/main" val="20000"/>
+                    </a:ext>
+                  </a:extLst>
+                </a:gridCol>
+                <a:gridCol w="3697224">
+                  <a:extLst>
+                    <a:ext uri="{9D8B030D-6E8A-4147-A177-3AD203B41FA5}">
+                      <a16:colId xmlns:a16="http://schemas.microsoft.com/office/drawing/2014/main" val="20001"/>
+                    </a:ext>
+                  </a:extLst>
+                </a:gridCol>
+                <a:gridCol w="3697224">
+                  <a:extLst>
+                    <a:ext uri="{9D8B030D-6E8A-4147-A177-3AD203B41FA5}">
+                      <a16:colId xmlns:a16="http://schemas.microsoft.com/office/drawing/2014/main" val="20002"/>
+                    </a:ext>
+                  </a:extLst>
+                </a:gridCol>
               </a:tblGrid>
               <a:tr h="0">
                 <a:tc>
@@ -6368,7 +5987,7 @@
                     <a:bodyPr/>
                     <a:lstStyle/>
                     <a:p>
-                      <a:pPr algn="ctr" indent="0" marL="0">
+                      <a:pPr marL="0" indent="0" algn="ctr">
                         <a:buNone/>
                       </a:pPr>
                       <a:r>
@@ -6436,7 +6055,7 @@
                     <a:bodyPr/>
                     <a:lstStyle/>
                     <a:p>
-                      <a:pPr algn="ctr" indent="0" marL="0">
+                      <a:pPr marL="0" indent="0" algn="ctr">
                         <a:buNone/>
                       </a:pPr>
                       <a:r>
@@ -6504,7 +6123,7 @@
                     <a:bodyPr/>
                     <a:lstStyle/>
                     <a:p>
-                      <a:pPr algn="ctr" indent="0" marL="0">
+                      <a:pPr marL="0" indent="0" algn="ctr">
                         <a:buNone/>
                       </a:pPr>
                       <a:r>
@@ -6567,6 +6186,11 @@
                     </a:solidFill>
                   </a:tcPr>
                 </a:tc>
+                <a:extLst>
+                  <a:ext uri="{0D108BD9-81ED-4DB2-BD59-A6C34878D82A}">
+                    <a16:rowId xmlns:a16="http://schemas.microsoft.com/office/drawing/2014/main" val="10000"/>
+                  </a:ext>
+                </a:extLst>
               </a:tr>
               <a:tr h="0">
                 <a:tc>
@@ -6574,7 +6198,7 @@
                     <a:bodyPr/>
                     <a:lstStyle/>
                     <a:p>
-                      <a:pPr indent="0" marL="0">
+                      <a:pPr marL="0" indent="0">
                         <a:buNone/>
                       </a:pPr>
                       <a:r>
@@ -6639,7 +6263,7 @@
                     <a:bodyPr/>
                     <a:lstStyle/>
                     <a:p>
-                      <a:pPr indent="0" marL="0">
+                      <a:pPr marL="0" indent="0">
                         <a:buNone/>
                       </a:pPr>
                       <a:r>
@@ -6704,7 +6328,7 @@
                     <a:bodyPr/>
                     <a:lstStyle/>
                     <a:p>
-                      <a:pPr indent="0" marL="0">
+                      <a:pPr marL="0" indent="0">
                         <a:buNone/>
                       </a:pPr>
                       <a:r>
@@ -6764,6 +6388,11 @@
                     </a:lnB>
                   </a:tcPr>
                 </a:tc>
+                <a:extLst>
+                  <a:ext uri="{0D108BD9-81ED-4DB2-BD59-A6C34878D82A}">
+                    <a16:rowId xmlns:a16="http://schemas.microsoft.com/office/drawing/2014/main" val="10001"/>
+                  </a:ext>
+                </a:extLst>
               </a:tr>
               <a:tr h="0">
                 <a:tc>
@@ -6771,7 +6400,7 @@
                     <a:bodyPr/>
                     <a:lstStyle/>
                     <a:p>
-                      <a:pPr indent="0" marL="0">
+                      <a:pPr marL="0" indent="0">
                         <a:buNone/>
                       </a:pPr>
                       <a:r>
@@ -6839,7 +6468,7 @@
                     <a:bodyPr/>
                     <a:lstStyle/>
                     <a:p>
-                      <a:pPr indent="0" marL="0">
+                      <a:pPr marL="0" indent="0">
                         <a:buNone/>
                       </a:pPr>
                       <a:r>
@@ -6907,7 +6536,7 @@
                     <a:bodyPr/>
                     <a:lstStyle/>
                     <a:p>
-                      <a:pPr indent="0" marL="0">
+                      <a:pPr marL="0" indent="0">
                         <a:buNone/>
                       </a:pPr>
                       <a:r>
@@ -6970,6 +6599,11 @@
                     </a:solidFill>
                   </a:tcPr>
                 </a:tc>
+                <a:extLst>
+                  <a:ext uri="{0D108BD9-81ED-4DB2-BD59-A6C34878D82A}">
+                    <a16:rowId xmlns:a16="http://schemas.microsoft.com/office/drawing/2014/main" val="10002"/>
+                  </a:ext>
+                </a:extLst>
               </a:tr>
               <a:tr h="0">
                 <a:tc>
@@ -6977,7 +6611,7 @@
                     <a:bodyPr/>
                     <a:lstStyle/>
                     <a:p>
-                      <a:pPr indent="0" marL="0">
+                      <a:pPr marL="0" indent="0">
                         <a:buNone/>
                       </a:pPr>
                       <a:r>
@@ -7042,7 +6676,7 @@
                     <a:bodyPr/>
                     <a:lstStyle/>
                     <a:p>
-                      <a:pPr indent="0" marL="0">
+                      <a:pPr marL="0" indent="0">
                         <a:buNone/>
                       </a:pPr>
                       <a:r>
@@ -7107,7 +6741,7 @@
                     <a:bodyPr/>
                     <a:lstStyle/>
                     <a:p>
-                      <a:pPr indent="0" marL="0">
+                      <a:pPr marL="0" indent="0">
                         <a:buNone/>
                       </a:pPr>
                       <a:r>
@@ -7167,6 +6801,11 @@
                     </a:lnB>
                   </a:tcPr>
                 </a:tc>
+                <a:extLst>
+                  <a:ext uri="{0D108BD9-81ED-4DB2-BD59-A6C34878D82A}">
+                    <a16:rowId xmlns:a16="http://schemas.microsoft.com/office/drawing/2014/main" val="10003"/>
+                  </a:ext>
+                </a:extLst>
               </a:tr>
               <a:tr h="0">
                 <a:tc>
@@ -7174,7 +6813,7 @@
                     <a:bodyPr/>
                     <a:lstStyle/>
                     <a:p>
-                      <a:pPr indent="0" marL="0">
+                      <a:pPr marL="0" indent="0">
                         <a:buNone/>
                       </a:pPr>
                       <a:r>
@@ -7242,7 +6881,7 @@
                     <a:bodyPr/>
                     <a:lstStyle/>
                     <a:p>
-                      <a:pPr indent="0" marL="0">
+                      <a:pPr marL="0" indent="0">
                         <a:buNone/>
                       </a:pPr>
                       <a:r>
@@ -7310,7 +6949,7 @@
                     <a:bodyPr/>
                     <a:lstStyle/>
                     <a:p>
-                      <a:pPr indent="0" marL="0">
+                      <a:pPr marL="0" indent="0">
                         <a:buNone/>
                       </a:pPr>
                       <a:r>
@@ -7373,6 +7012,11 @@
                     </a:solidFill>
                   </a:tcPr>
                 </a:tc>
+                <a:extLst>
+                  <a:ext uri="{0D108BD9-81ED-4DB2-BD59-A6C34878D82A}">
+                    <a16:rowId xmlns:a16="http://schemas.microsoft.com/office/drawing/2014/main" val="10004"/>
+                  </a:ext>
+                </a:extLst>
               </a:tr>
               <a:tr h="0">
                 <a:tc>
@@ -7380,7 +7024,7 @@
                     <a:bodyPr/>
                     <a:lstStyle/>
                     <a:p>
-                      <a:pPr indent="0" marL="0">
+                      <a:pPr marL="0" indent="0">
                         <a:buNone/>
                       </a:pPr>
                       <a:r>
@@ -7445,7 +7089,7 @@
                     <a:bodyPr/>
                     <a:lstStyle/>
                     <a:p>
-                      <a:pPr indent="0" marL="0">
+                      <a:pPr marL="0" indent="0">
                         <a:buNone/>
                       </a:pPr>
                       <a:r>
@@ -7510,7 +7154,7 @@
                     <a:bodyPr/>
                     <a:lstStyle/>
                     <a:p>
-                      <a:pPr indent="0" marL="0">
+                      <a:pPr marL="0" indent="0">
                         <a:buNone/>
                       </a:pPr>
                       <a:r>
@@ -7570,6 +7214,11 @@
                     </a:lnB>
                   </a:tcPr>
                 </a:tc>
+                <a:extLst>
+                  <a:ext uri="{0D108BD9-81ED-4DB2-BD59-A6C34878D82A}">
+                    <a16:rowId xmlns:a16="http://schemas.microsoft.com/office/drawing/2014/main" val="10005"/>
+                  </a:ext>
+                </a:extLst>
               </a:tr>
               <a:tr h="0">
                 <a:tc>
@@ -7577,7 +7226,7 @@
                     <a:bodyPr/>
                     <a:lstStyle/>
                     <a:p>
-                      <a:pPr indent="0" marL="0">
+                      <a:pPr marL="0" indent="0">
                         <a:buNone/>
                       </a:pPr>
                       <a:r>
@@ -7645,7 +7294,7 @@
                     <a:bodyPr/>
                     <a:lstStyle/>
                     <a:p>
-                      <a:pPr indent="0" marL="0">
+                      <a:pPr marL="0" indent="0">
                         <a:buNone/>
                       </a:pPr>
                       <a:r>
@@ -7713,7 +7362,7 @@
                     <a:bodyPr/>
                     <a:lstStyle/>
                     <a:p>
-                      <a:pPr indent="0" marL="0">
+                      <a:pPr marL="0" indent="0">
                         <a:buNone/>
                       </a:pPr>
                       <a:r>
@@ -7776,6 +7425,11 @@
                     </a:solidFill>
                   </a:tcPr>
                 </a:tc>
+                <a:extLst>
+                  <a:ext uri="{0D108BD9-81ED-4DB2-BD59-A6C34878D82A}">
+                    <a16:rowId xmlns:a16="http://schemas.microsoft.com/office/drawing/2014/main" val="10006"/>
+                  </a:ext>
+                </a:extLst>
               </a:tr>
               <a:tr h="0">
                 <a:tc>
@@ -7783,7 +7437,7 @@
                     <a:bodyPr/>
                     <a:lstStyle/>
                     <a:p>
-                      <a:pPr indent="0" marL="0">
+                      <a:pPr marL="0" indent="0">
                         <a:buNone/>
                       </a:pPr>
                       <a:r>
@@ -7848,7 +7502,7 @@
                     <a:bodyPr/>
                     <a:lstStyle/>
                     <a:p>
-                      <a:pPr indent="0" marL="0">
+                      <a:pPr marL="0" indent="0">
                         <a:buNone/>
                       </a:pPr>
                       <a:r>
@@ -7913,7 +7567,7 @@
                     <a:bodyPr/>
                     <a:lstStyle/>
                     <a:p>
-                      <a:pPr indent="0" marL="0">
+                      <a:pPr marL="0" indent="0">
                         <a:buNone/>
                       </a:pPr>
                       <a:r>
@@ -7973,6 +7627,11 @@
                     </a:lnB>
                   </a:tcPr>
                 </a:tc>
+                <a:extLst>
+                  <a:ext uri="{0D108BD9-81ED-4DB2-BD59-A6C34878D82A}">
+                    <a16:rowId xmlns:a16="http://schemas.microsoft.com/office/drawing/2014/main" val="10007"/>
+                  </a:ext>
+                </a:extLst>
               </a:tr>
               <a:tr h="0">
                 <a:tc>
@@ -7980,7 +7639,7 @@
                     <a:bodyPr/>
                     <a:lstStyle/>
                     <a:p>
-                      <a:pPr indent="0" marL="0">
+                      <a:pPr marL="0" indent="0">
                         <a:buNone/>
                       </a:pPr>
                       <a:r>
@@ -8048,7 +7707,7 @@
                     <a:bodyPr/>
                     <a:lstStyle/>
                     <a:p>
-                      <a:pPr indent="0" marL="0">
+                      <a:pPr marL="0" indent="0">
                         <a:buNone/>
                       </a:pPr>
                       <a:r>
@@ -8116,7 +7775,7 @@
                     <a:bodyPr/>
                     <a:lstStyle/>
                     <a:p>
-                      <a:pPr indent="0" marL="0">
+                      <a:pPr marL="0" indent="0">
                         <a:buNone/>
                       </a:pPr>
                       <a:r>
@@ -8179,6 +7838,11 @@
                     </a:solidFill>
                   </a:tcPr>
                 </a:tc>
+                <a:extLst>
+                  <a:ext uri="{0D108BD9-81ED-4DB2-BD59-A6C34878D82A}">
+                    <a16:rowId xmlns:a16="http://schemas.microsoft.com/office/drawing/2014/main" val="10008"/>
+                  </a:ext>
+                </a:extLst>
               </a:tr>
             </a:tbl>
           </a:graphicData>
@@ -8228,6 +7892,13 @@
           </a:solidFill>
           <a:ln/>
         </p:spPr>
+        <p:txBody>
+          <a:bodyPr/>
+          <a:lstStyle/>
+          <a:p>
+            <a:endParaRPr lang="ko-KR" altLang="en-US"/>
+          </a:p>
+        </p:txBody>
       </p:sp>
       <p:sp>
         <p:nvSpPr>
@@ -8252,11 +7923,11 @@
           </a:bodyPr>
           <a:lstStyle/>
           <a:p>
-            <a:pPr indent="0" marL="0">
+            <a:pPr marL="0" indent="0">
               <a:buNone/>
             </a:pPr>
             <a:r>
-              <a:rPr lang="en-US" sz="2800" b="1" spc="-30" kern="0" dirty="0">
+              <a:rPr lang="en-US" sz="2800" b="1" kern="0" spc="-30" dirty="0">
                 <a:solidFill>
                   <a:srgbClr val="1A1F36"/>
                 </a:solidFill>
@@ -8291,7 +7962,7 @@
           <a:bodyPr wrap="square" rtlCol="0" anchor="ctr"/>
           <a:lstStyle/>
           <a:p>
-            <a:pPr algn="r" indent="0" marL="0">
+            <a:pPr marL="0" indent="0" algn="r">
               <a:buNone/>
             </a:pPr>
             <a:r>
@@ -8330,13 +8001,20 @@
           </a:solidFill>
           <a:ln/>
           <a:effectLst>
-            <a:outerShdw sx="100000" sy="100000" kx="0" ky="0" algn="bl" rotWithShape="0" blurRad="76200" dist="25400" dir="16200000">
+            <a:outerShdw blurRad="76200" dist="25400" dir="16200000" algn="bl" rotWithShape="0">
               <a:srgbClr val="000000">
                 <a:alpha val="8000"/>
               </a:srgbClr>
             </a:outerShdw>
           </a:effectLst>
         </p:spPr>
+        <p:txBody>
+          <a:bodyPr/>
+          <a:lstStyle/>
+          <a:p>
+            <a:endParaRPr lang="ko-KR" altLang="en-US"/>
+          </a:p>
+        </p:txBody>
       </p:sp>
       <p:sp>
         <p:nvSpPr>
@@ -8357,6 +8035,13 @@
           </a:solidFill>
           <a:ln/>
         </p:spPr>
+        <p:txBody>
+          <a:bodyPr/>
+          <a:lstStyle/>
+          <a:p>
+            <a:endParaRPr lang="ko-KR" altLang="en-US"/>
+          </a:p>
+        </p:txBody>
       </p:sp>
       <p:sp>
         <p:nvSpPr>
@@ -8381,7 +8066,7 @@
           </a:bodyPr>
           <a:lstStyle/>
           <a:p>
-            <a:pPr indent="0" marL="0">
+            <a:pPr marL="0" indent="0">
               <a:buNone/>
             </a:pPr>
             <a:r>
@@ -8422,7 +8107,7 @@
           </a:bodyPr>
           <a:lstStyle/>
           <a:p>
-            <a:pPr indent="0" marL="0">
+            <a:pPr marL="0" indent="0">
               <a:lnSpc>
                 <a:spcPct val="135000"/>
               </a:lnSpc>
@@ -8442,7 +8127,7 @@
             <a:endParaRPr lang="en-US" sz="1200" dirty="0"/>
           </a:p>
           <a:p>
-            <a:pPr indent="0" marL="0">
+            <a:pPr marL="0" indent="0">
               <a:lnSpc>
                 <a:spcPct val="135000"/>
               </a:lnSpc>
@@ -8462,7 +8147,7 @@
             <a:endParaRPr lang="en-US" sz="1200" dirty="0"/>
           </a:p>
           <a:p>
-            <a:pPr indent="0" marL="0">
+            <a:pPr marL="0" indent="0">
               <a:lnSpc>
                 <a:spcPct val="135000"/>
               </a:lnSpc>
@@ -8504,13 +8189,20 @@
           </a:solidFill>
           <a:ln/>
           <a:effectLst>
-            <a:outerShdw sx="100000" sy="100000" kx="0" ky="0" algn="bl" rotWithShape="0" blurRad="76200" dist="25400" dir="16200000">
+            <a:outerShdw blurRad="76200" dist="25400" dir="16200000" algn="bl" rotWithShape="0">
               <a:srgbClr val="000000">
                 <a:alpha val="8000"/>
               </a:srgbClr>
             </a:outerShdw>
           </a:effectLst>
         </p:spPr>
+        <p:txBody>
+          <a:bodyPr/>
+          <a:lstStyle/>
+          <a:p>
+            <a:endParaRPr lang="ko-KR" altLang="en-US"/>
+          </a:p>
+        </p:txBody>
       </p:sp>
       <p:sp>
         <p:nvSpPr>
@@ -8531,6 +8223,13 @@
           </a:solidFill>
           <a:ln/>
         </p:spPr>
+        <p:txBody>
+          <a:bodyPr/>
+          <a:lstStyle/>
+          <a:p>
+            <a:endParaRPr lang="ko-KR" altLang="en-US"/>
+          </a:p>
+        </p:txBody>
       </p:sp>
       <p:sp>
         <p:nvSpPr>
@@ -8555,7 +8254,7 @@
           </a:bodyPr>
           <a:lstStyle/>
           <a:p>
-            <a:pPr indent="0" marL="0">
+            <a:pPr marL="0" indent="0">
               <a:buNone/>
             </a:pPr>
             <a:r>
@@ -8596,7 +8295,7 @@
           </a:bodyPr>
           <a:lstStyle/>
           <a:p>
-            <a:pPr indent="0" marL="0">
+            <a:pPr marL="0" indent="0">
               <a:lnSpc>
                 <a:spcPct val="135000"/>
               </a:lnSpc>
@@ -8616,7 +8315,7 @@
             <a:endParaRPr lang="en-US" sz="1200" dirty="0"/>
           </a:p>
           <a:p>
-            <a:pPr indent="0" marL="0">
+            <a:pPr marL="0" indent="0">
               <a:lnSpc>
                 <a:spcPct val="135000"/>
               </a:lnSpc>
@@ -8636,7 +8335,7 @@
             <a:endParaRPr lang="en-US" sz="1200" dirty="0"/>
           </a:p>
           <a:p>
-            <a:pPr indent="0" marL="0">
+            <a:pPr marL="0" indent="0">
               <a:lnSpc>
                 <a:spcPct val="135000"/>
               </a:lnSpc>
@@ -8678,13 +8377,20 @@
           </a:solidFill>
           <a:ln/>
           <a:effectLst>
-            <a:outerShdw sx="100000" sy="100000" kx="0" ky="0" algn="bl" rotWithShape="0" blurRad="76200" dist="25400" dir="16200000">
+            <a:outerShdw blurRad="76200" dist="25400" dir="16200000" algn="bl" rotWithShape="0">
               <a:srgbClr val="000000">
                 <a:alpha val="8000"/>
               </a:srgbClr>
             </a:outerShdw>
           </a:effectLst>
         </p:spPr>
+        <p:txBody>
+          <a:bodyPr/>
+          <a:lstStyle/>
+          <a:p>
+            <a:endParaRPr lang="ko-KR" altLang="en-US"/>
+          </a:p>
+        </p:txBody>
       </p:sp>
       <p:sp>
         <p:nvSpPr>
@@ -8705,6 +8411,13 @@
           </a:solidFill>
           <a:ln/>
         </p:spPr>
+        <p:txBody>
+          <a:bodyPr/>
+          <a:lstStyle/>
+          <a:p>
+            <a:endParaRPr lang="ko-KR" altLang="en-US"/>
+          </a:p>
+        </p:txBody>
       </p:sp>
       <p:sp>
         <p:nvSpPr>
@@ -8729,7 +8442,7 @@
           </a:bodyPr>
           <a:lstStyle/>
           <a:p>
-            <a:pPr indent="0" marL="0">
+            <a:pPr marL="0" indent="0">
               <a:buNone/>
             </a:pPr>
             <a:r>
@@ -8770,7 +8483,7 @@
           </a:bodyPr>
           <a:lstStyle/>
           <a:p>
-            <a:pPr indent="0" marL="0">
+            <a:pPr marL="0" indent="0">
               <a:lnSpc>
                 <a:spcPct val="135000"/>
               </a:lnSpc>
@@ -8790,7 +8503,7 @@
             <a:endParaRPr lang="en-US" sz="1200" dirty="0"/>
           </a:p>
           <a:p>
-            <a:pPr indent="0" marL="0">
+            <a:pPr marL="0" indent="0">
               <a:lnSpc>
                 <a:spcPct val="135000"/>
               </a:lnSpc>
@@ -8810,7 +8523,7 @@
             <a:endParaRPr lang="en-US" sz="1200" dirty="0"/>
           </a:p>
           <a:p>
-            <a:pPr indent="0" marL="0">
+            <a:pPr marL="0" indent="0">
               <a:lnSpc>
                 <a:spcPct val="135000"/>
               </a:lnSpc>
@@ -8852,13 +8565,20 @@
           </a:solidFill>
           <a:ln/>
           <a:effectLst>
-            <a:outerShdw sx="100000" sy="100000" kx="0" ky="0" algn="bl" rotWithShape="0" blurRad="76200" dist="25400" dir="16200000">
+            <a:outerShdw blurRad="76200" dist="25400" dir="16200000" algn="bl" rotWithShape="0">
               <a:srgbClr val="000000">
                 <a:alpha val="8000"/>
               </a:srgbClr>
             </a:outerShdw>
           </a:effectLst>
         </p:spPr>
+        <p:txBody>
+          <a:bodyPr/>
+          <a:lstStyle/>
+          <a:p>
+            <a:endParaRPr lang="ko-KR" altLang="en-US"/>
+          </a:p>
+        </p:txBody>
       </p:sp>
       <p:sp>
         <p:nvSpPr>
@@ -8879,6 +8599,13 @@
           </a:solidFill>
           <a:ln/>
         </p:spPr>
+        <p:txBody>
+          <a:bodyPr/>
+          <a:lstStyle/>
+          <a:p>
+            <a:endParaRPr lang="ko-KR" altLang="en-US"/>
+          </a:p>
+        </p:txBody>
       </p:sp>
       <p:sp>
         <p:nvSpPr>
@@ -8903,7 +8630,7 @@
           </a:bodyPr>
           <a:lstStyle/>
           <a:p>
-            <a:pPr indent="0" marL="0">
+            <a:pPr marL="0" indent="0">
               <a:buNone/>
             </a:pPr>
             <a:r>
@@ -8944,7 +8671,7 @@
           </a:bodyPr>
           <a:lstStyle/>
           <a:p>
-            <a:pPr indent="0" marL="0">
+            <a:pPr marL="0" indent="0">
               <a:lnSpc>
                 <a:spcPct val="135000"/>
               </a:lnSpc>
@@ -8964,7 +8691,7 @@
             <a:endParaRPr lang="en-US" sz="1200" dirty="0"/>
           </a:p>
           <a:p>
-            <a:pPr indent="0" marL="0">
+            <a:pPr marL="0" indent="0">
               <a:lnSpc>
                 <a:spcPct val="135000"/>
               </a:lnSpc>
@@ -8984,7 +8711,7 @@
             <a:endParaRPr lang="en-US" sz="1200" dirty="0"/>
           </a:p>
           <a:p>
-            <a:pPr indent="0" marL="0">
+            <a:pPr marL="0" indent="0">
               <a:lnSpc>
                 <a:spcPct val="135000"/>
               </a:lnSpc>
@@ -9026,13 +8753,20 @@
           </a:solidFill>
           <a:ln/>
           <a:effectLst>
-            <a:outerShdw sx="100000" sy="100000" kx="0" ky="0" algn="bl" rotWithShape="0" blurRad="76200" dist="25400" dir="16200000">
+            <a:outerShdw blurRad="76200" dist="25400" dir="16200000" algn="bl" rotWithShape="0">
               <a:srgbClr val="000000">
                 <a:alpha val="8000"/>
               </a:srgbClr>
             </a:outerShdw>
           </a:effectLst>
         </p:spPr>
+        <p:txBody>
+          <a:bodyPr/>
+          <a:lstStyle/>
+          <a:p>
+            <a:endParaRPr lang="ko-KR" altLang="en-US"/>
+          </a:p>
+        </p:txBody>
       </p:sp>
       <p:sp>
         <p:nvSpPr>
@@ -9053,6 +8787,13 @@
           </a:solidFill>
           <a:ln/>
         </p:spPr>
+        <p:txBody>
+          <a:bodyPr/>
+          <a:lstStyle/>
+          <a:p>
+            <a:endParaRPr lang="ko-KR" altLang="en-US"/>
+          </a:p>
+        </p:txBody>
       </p:sp>
       <p:sp>
         <p:nvSpPr>
@@ -9077,7 +8818,7 @@
           </a:bodyPr>
           <a:lstStyle/>
           <a:p>
-            <a:pPr indent="0" marL="0">
+            <a:pPr marL="0" indent="0">
               <a:buNone/>
             </a:pPr>
             <a:r>
@@ -9118,7 +8859,7 @@
           </a:bodyPr>
           <a:lstStyle/>
           <a:p>
-            <a:pPr indent="0" marL="0">
+            <a:pPr marL="0" indent="0">
               <a:lnSpc>
                 <a:spcPct val="135000"/>
               </a:lnSpc>
@@ -9138,7 +8879,7 @@
             <a:endParaRPr lang="en-US" sz="1200" dirty="0"/>
           </a:p>
           <a:p>
-            <a:pPr indent="0" marL="0">
+            <a:pPr marL="0" indent="0">
               <a:lnSpc>
                 <a:spcPct val="135000"/>
               </a:lnSpc>
@@ -9158,7 +8899,7 @@
             <a:endParaRPr lang="en-US" sz="1200" dirty="0"/>
           </a:p>
           <a:p>
-            <a:pPr indent="0" marL="0">
+            <a:pPr marL="0" indent="0">
               <a:lnSpc>
                 <a:spcPct val="135000"/>
               </a:lnSpc>
@@ -9200,13 +8941,20 @@
           </a:solidFill>
           <a:ln/>
           <a:effectLst>
-            <a:outerShdw sx="100000" sy="100000" kx="0" ky="0" algn="bl" rotWithShape="0" blurRad="76200" dist="25400" dir="16200000">
+            <a:outerShdw blurRad="76200" dist="25400" dir="16200000" algn="bl" rotWithShape="0">
               <a:srgbClr val="000000">
                 <a:alpha val="8000"/>
               </a:srgbClr>
             </a:outerShdw>
           </a:effectLst>
         </p:spPr>
+        <p:txBody>
+          <a:bodyPr/>
+          <a:lstStyle/>
+          <a:p>
+            <a:endParaRPr lang="ko-KR" altLang="en-US"/>
+          </a:p>
+        </p:txBody>
       </p:sp>
       <p:sp>
         <p:nvSpPr>
@@ -9227,6 +8975,13 @@
           </a:solidFill>
           <a:ln/>
         </p:spPr>
+        <p:txBody>
+          <a:bodyPr/>
+          <a:lstStyle/>
+          <a:p>
+            <a:endParaRPr lang="ko-KR" altLang="en-US"/>
+          </a:p>
+        </p:txBody>
       </p:sp>
       <p:sp>
         <p:nvSpPr>
@@ -9251,7 +9006,7 @@
           </a:bodyPr>
           <a:lstStyle/>
           <a:p>
-            <a:pPr indent="0" marL="0">
+            <a:pPr marL="0" indent="0">
               <a:buNone/>
             </a:pPr>
             <a:r>
@@ -9292,7 +9047,7 @@
           </a:bodyPr>
           <a:lstStyle/>
           <a:p>
-            <a:pPr indent="0" marL="0">
+            <a:pPr marL="0" indent="0">
               <a:lnSpc>
                 <a:spcPct val="135000"/>
               </a:lnSpc>
@@ -9312,7 +9067,7 @@
             <a:endParaRPr lang="en-US" sz="1200" dirty="0"/>
           </a:p>
           <a:p>
-            <a:pPr indent="0" marL="0">
+            <a:pPr marL="0" indent="0">
               <a:lnSpc>
                 <a:spcPct val="135000"/>
               </a:lnSpc>
@@ -9332,7 +9087,7 @@
             <a:endParaRPr lang="en-US" sz="1200" dirty="0"/>
           </a:p>
           <a:p>
-            <a:pPr indent="0" marL="0">
+            <a:pPr marL="0" indent="0">
               <a:lnSpc>
                 <a:spcPct val="135000"/>
               </a:lnSpc>
@@ -9397,6 +9152,13 @@
           </a:solidFill>
           <a:ln/>
         </p:spPr>
+        <p:txBody>
+          <a:bodyPr/>
+          <a:lstStyle/>
+          <a:p>
+            <a:endParaRPr lang="ko-KR" altLang="en-US"/>
+          </a:p>
+        </p:txBody>
       </p:sp>
       <p:sp>
         <p:nvSpPr>
@@ -9421,11 +9183,11 @@
           </a:bodyPr>
           <a:lstStyle/>
           <a:p>
-            <a:pPr indent="0" marL="0">
+            <a:pPr marL="0" indent="0">
               <a:buNone/>
             </a:pPr>
             <a:r>
-              <a:rPr lang="en-US" sz="2800" b="1" spc="-30" kern="0" dirty="0">
+              <a:rPr lang="en-US" sz="2800" b="1" kern="0" spc="-30" dirty="0">
                 <a:solidFill>
                   <a:srgbClr val="1A1F36"/>
                 </a:solidFill>
@@ -9460,7 +9222,7 @@
           <a:bodyPr wrap="square" rtlCol="0" anchor="ctr"/>
           <a:lstStyle/>
           <a:p>
-            <a:pPr algn="r" indent="0" marL="0">
+            <a:pPr marL="0" indent="0" algn="r">
               <a:buNone/>
             </a:pPr>
             <a:r>
@@ -9665,6 +9427,13 @@
           </a:solidFill>
           <a:ln/>
         </p:spPr>
+        <p:txBody>
+          <a:bodyPr/>
+          <a:lstStyle/>
+          <a:p>
+            <a:endParaRPr lang="ko-KR" altLang="en-US"/>
+          </a:p>
+        </p:txBody>
       </p:sp>
       <p:sp>
         <p:nvSpPr>
@@ -9687,7 +9456,7 @@
           <a:bodyPr wrap="square" rtlCol="0" anchor="ctr"/>
           <a:lstStyle/>
           <a:p>
-            <a:pPr indent="0" marL="0">
+            <a:pPr marL="0" indent="0">
               <a:buNone/>
             </a:pPr>
             <a:r>
@@ -9749,6 +9518,13 @@
           </a:solidFill>
           <a:ln/>
         </p:spPr>
+        <p:txBody>
+          <a:bodyPr/>
+          <a:lstStyle/>
+          <a:p>
+            <a:endParaRPr lang="ko-KR" altLang="en-US"/>
+          </a:p>
+        </p:txBody>
       </p:sp>
       <p:sp>
         <p:nvSpPr>
@@ -9773,11 +9549,11 @@
           </a:bodyPr>
           <a:lstStyle/>
           <a:p>
-            <a:pPr indent="0" marL="0">
+            <a:pPr marL="0" indent="0">
               <a:buNone/>
             </a:pPr>
             <a:r>
-              <a:rPr lang="en-US" sz="2800" b="1" spc="-30" kern="0" dirty="0">
+              <a:rPr lang="en-US" sz="2800" b="1" kern="0" spc="-30" dirty="0">
                 <a:solidFill>
                   <a:srgbClr val="1A1F36"/>
                 </a:solidFill>
@@ -9812,7 +9588,7 @@
           <a:bodyPr wrap="square" rtlCol="0" anchor="ctr"/>
           <a:lstStyle/>
           <a:p>
-            <a:pPr algn="r" indent="0" marL="0">
+            <a:pPr marL="0" indent="0" algn="r">
               <a:buNone/>
             </a:pPr>
             <a:r>
@@ -9846,16 +9622,34 @@
         </p:nvGraphicFramePr>
         <p:xfrm>
           <a:off x="548640" y="1645920"/>
-          <a:ext cx="11091672" cy="914400"/>
+          <a:ext cx="11091672" cy="2357120"/>
         </p:xfrm>
         <a:graphic>
           <a:graphicData uri="http://schemas.openxmlformats.org/drawingml/2006/table">
             <a:tbl>
               <a:tblPr/>
               <a:tblGrid>
-                <a:gridCol w="3697224"/>
-                <a:gridCol w="3697224"/>
-                <a:gridCol w="3697224"/>
+                <a:gridCol w="3697224">
+                  <a:extLst>
+                    <a:ext uri="{9D8B030D-6E8A-4147-A177-3AD203B41FA5}">
+                      <a16:colId xmlns:a16="http://schemas.microsoft.com/office/drawing/2014/main" val="20000"/>
+                    </a:ext>
+                  </a:extLst>
+                </a:gridCol>
+                <a:gridCol w="3697224">
+                  <a:extLst>
+                    <a:ext uri="{9D8B030D-6E8A-4147-A177-3AD203B41FA5}">
+                      <a16:colId xmlns:a16="http://schemas.microsoft.com/office/drawing/2014/main" val="20001"/>
+                    </a:ext>
+                  </a:extLst>
+                </a:gridCol>
+                <a:gridCol w="3697224">
+                  <a:extLst>
+                    <a:ext uri="{9D8B030D-6E8A-4147-A177-3AD203B41FA5}">
+                      <a16:colId xmlns:a16="http://schemas.microsoft.com/office/drawing/2014/main" val="20002"/>
+                    </a:ext>
+                  </a:extLst>
+                </a:gridCol>
               </a:tblGrid>
               <a:tr h="0">
                 <a:tc>
@@ -9863,7 +9657,7 @@
                     <a:bodyPr/>
                     <a:lstStyle/>
                     <a:p>
-                      <a:pPr algn="ctr" indent="0" marL="0">
+                      <a:pPr marL="0" indent="0" algn="ctr">
                         <a:buNone/>
                       </a:pPr>
                       <a:r>
@@ -9931,7 +9725,7 @@
                     <a:bodyPr/>
                     <a:lstStyle/>
                     <a:p>
-                      <a:pPr algn="ctr" indent="0" marL="0">
+                      <a:pPr marL="0" indent="0" algn="ctr">
                         <a:buNone/>
                       </a:pPr>
                       <a:r>
@@ -9999,7 +9793,7 @@
                     <a:bodyPr/>
                     <a:lstStyle/>
                     <a:p>
-                      <a:pPr algn="ctr" indent="0" marL="0">
+                      <a:pPr marL="0" indent="0" algn="ctr">
                         <a:buNone/>
                       </a:pPr>
                       <a:r>
@@ -10062,6 +9856,11 @@
                     </a:solidFill>
                   </a:tcPr>
                 </a:tc>
+                <a:extLst>
+                  <a:ext uri="{0D108BD9-81ED-4DB2-BD59-A6C34878D82A}">
+                    <a16:rowId xmlns:a16="http://schemas.microsoft.com/office/drawing/2014/main" val="10000"/>
+                  </a:ext>
+                </a:extLst>
               </a:tr>
               <a:tr h="0">
                 <a:tc>
@@ -10069,7 +9868,7 @@
                     <a:bodyPr/>
                     <a:lstStyle/>
                     <a:p>
-                      <a:pPr indent="0" marL="0">
+                      <a:pPr marL="0" indent="0">
                         <a:buNone/>
                       </a:pPr>
                       <a:r>
@@ -10134,7 +9933,7 @@
                     <a:bodyPr/>
                     <a:lstStyle/>
                     <a:p>
-                      <a:pPr indent="0" marL="0">
+                      <a:pPr marL="0" indent="0">
                         <a:buNone/>
                       </a:pPr>
                       <a:r>
@@ -10199,7 +9998,7 @@
                     <a:bodyPr/>
                     <a:lstStyle/>
                     <a:p>
-                      <a:pPr indent="0" marL="0">
+                      <a:pPr marL="0" indent="0">
                         <a:buNone/>
                       </a:pPr>
                       <a:r>
@@ -10259,6 +10058,11 @@
                     </a:lnB>
                   </a:tcPr>
                 </a:tc>
+                <a:extLst>
+                  <a:ext uri="{0D108BD9-81ED-4DB2-BD59-A6C34878D82A}">
+                    <a16:rowId xmlns:a16="http://schemas.microsoft.com/office/drawing/2014/main" val="10001"/>
+                  </a:ext>
+                </a:extLst>
               </a:tr>
               <a:tr h="0">
                 <a:tc>
@@ -10266,7 +10070,7 @@
                     <a:bodyPr/>
                     <a:lstStyle/>
                     <a:p>
-                      <a:pPr indent="0" marL="0">
+                      <a:pPr marL="0" indent="0">
                         <a:buNone/>
                       </a:pPr>
                       <a:r>
@@ -10334,7 +10138,7 @@
                     <a:bodyPr/>
                     <a:lstStyle/>
                     <a:p>
-                      <a:pPr indent="0" marL="0">
+                      <a:pPr marL="0" indent="0">
                         <a:buNone/>
                       </a:pPr>
                       <a:r>
@@ -10402,7 +10206,7 @@
                     <a:bodyPr/>
                     <a:lstStyle/>
                     <a:p>
-                      <a:pPr indent="0" marL="0">
+                      <a:pPr marL="0" indent="0">
                         <a:buNone/>
                       </a:pPr>
                       <a:r>
@@ -10465,6 +10269,11 @@
                     </a:solidFill>
                   </a:tcPr>
                 </a:tc>
+                <a:extLst>
+                  <a:ext uri="{0D108BD9-81ED-4DB2-BD59-A6C34878D82A}">
+                    <a16:rowId xmlns:a16="http://schemas.microsoft.com/office/drawing/2014/main" val="10002"/>
+                  </a:ext>
+                </a:extLst>
               </a:tr>
               <a:tr h="0">
                 <a:tc>
@@ -10472,7 +10281,7 @@
                     <a:bodyPr/>
                     <a:lstStyle/>
                     <a:p>
-                      <a:pPr indent="0" marL="0">
+                      <a:pPr marL="0" indent="0">
                         <a:buNone/>
                       </a:pPr>
                       <a:r>
@@ -10537,7 +10346,7 @@
                     <a:bodyPr/>
                     <a:lstStyle/>
                     <a:p>
-                      <a:pPr indent="0" marL="0">
+                      <a:pPr marL="0" indent="0">
                         <a:buNone/>
                       </a:pPr>
                       <a:r>
@@ -10602,7 +10411,7 @@
                     <a:bodyPr/>
                     <a:lstStyle/>
                     <a:p>
-                      <a:pPr indent="0" marL="0">
+                      <a:pPr marL="0" indent="0">
                         <a:buNone/>
                       </a:pPr>
                       <a:r>
@@ -10662,6 +10471,11 @@
                     </a:lnB>
                   </a:tcPr>
                 </a:tc>
+                <a:extLst>
+                  <a:ext uri="{0D108BD9-81ED-4DB2-BD59-A6C34878D82A}">
+                    <a16:rowId xmlns:a16="http://schemas.microsoft.com/office/drawing/2014/main" val="10003"/>
+                  </a:ext>
+                </a:extLst>
               </a:tr>
               <a:tr h="0">
                 <a:tc>
@@ -10669,7 +10483,7 @@
                     <a:bodyPr/>
                     <a:lstStyle/>
                     <a:p>
-                      <a:pPr indent="0" marL="0">
+                      <a:pPr marL="0" indent="0">
                         <a:buNone/>
                       </a:pPr>
                       <a:r>
@@ -10737,7 +10551,7 @@
                     <a:bodyPr/>
                     <a:lstStyle/>
                     <a:p>
-                      <a:pPr indent="0" marL="0">
+                      <a:pPr marL="0" indent="0">
                         <a:buNone/>
                       </a:pPr>
                       <a:r>
@@ -10805,7 +10619,7 @@
                     <a:bodyPr/>
                     <a:lstStyle/>
                     <a:p>
-                      <a:pPr indent="0" marL="0">
+                      <a:pPr marL="0" indent="0">
                         <a:buNone/>
                       </a:pPr>
                       <a:r>
@@ -10868,6 +10682,11 @@
                     </a:solidFill>
                   </a:tcPr>
                 </a:tc>
+                <a:extLst>
+                  <a:ext uri="{0D108BD9-81ED-4DB2-BD59-A6C34878D82A}">
+                    <a16:rowId xmlns:a16="http://schemas.microsoft.com/office/drawing/2014/main" val="10004"/>
+                  </a:ext>
+                </a:extLst>
               </a:tr>
               <a:tr h="0">
                 <a:tc>
@@ -10875,7 +10694,7 @@
                     <a:bodyPr/>
                     <a:lstStyle/>
                     <a:p>
-                      <a:pPr indent="0" marL="0">
+                      <a:pPr marL="0" indent="0">
                         <a:buNone/>
                       </a:pPr>
                       <a:r>
@@ -10940,7 +10759,7 @@
                     <a:bodyPr/>
                     <a:lstStyle/>
                     <a:p>
-                      <a:pPr indent="0" marL="0">
+                      <a:pPr marL="0" indent="0">
                         <a:buNone/>
                       </a:pPr>
                       <a:r>
@@ -11005,7 +10824,7 @@
                     <a:bodyPr/>
                     <a:lstStyle/>
                     <a:p>
-                      <a:pPr indent="0" marL="0">
+                      <a:pPr marL="0" indent="0">
                         <a:buNone/>
                       </a:pPr>
                       <a:r>
@@ -11065,6 +10884,11 @@
                     </a:lnB>
                   </a:tcPr>
                 </a:tc>
+                <a:extLst>
+                  <a:ext uri="{0D108BD9-81ED-4DB2-BD59-A6C34878D82A}">
+                    <a16:rowId xmlns:a16="http://schemas.microsoft.com/office/drawing/2014/main" val="10005"/>
+                  </a:ext>
+                </a:extLst>
               </a:tr>
               <a:tr h="0">
                 <a:tc>
@@ -11072,7 +10896,7 @@
                     <a:bodyPr/>
                     <a:lstStyle/>
                     <a:p>
-                      <a:pPr indent="0" marL="0">
+                      <a:pPr marL="0" indent="0">
                         <a:buNone/>
                       </a:pPr>
                       <a:r>
@@ -11140,7 +10964,7 @@
                     <a:bodyPr/>
                     <a:lstStyle/>
                     <a:p>
-                      <a:pPr indent="0" marL="0">
+                      <a:pPr marL="0" indent="0">
                         <a:buNone/>
                       </a:pPr>
                       <a:r>
@@ -11208,7 +11032,7 @@
                     <a:bodyPr/>
                     <a:lstStyle/>
                     <a:p>
-                      <a:pPr indent="0" marL="0">
+                      <a:pPr marL="0" indent="0">
                         <a:buNone/>
                       </a:pPr>
                       <a:r>
@@ -11271,6 +11095,11 @@
                     </a:solidFill>
                   </a:tcPr>
                 </a:tc>
+                <a:extLst>
+                  <a:ext uri="{0D108BD9-81ED-4DB2-BD59-A6C34878D82A}">
+                    <a16:rowId xmlns:a16="http://schemas.microsoft.com/office/drawing/2014/main" val="10006"/>
+                  </a:ext>
+                </a:extLst>
               </a:tr>
               <a:tr h="0">
                 <a:tc>
@@ -11278,7 +11107,7 @@
                     <a:bodyPr/>
                     <a:lstStyle/>
                     <a:p>
-                      <a:pPr indent="0" marL="0">
+                      <a:pPr marL="0" indent="0">
                         <a:buNone/>
                       </a:pPr>
                       <a:r>
@@ -11343,7 +11172,7 @@
                     <a:bodyPr/>
                     <a:lstStyle/>
                     <a:p>
-                      <a:pPr indent="0" marL="0">
+                      <a:pPr marL="0" indent="0">
                         <a:buNone/>
                       </a:pPr>
                       <a:r>
@@ -11408,7 +11237,7 @@
                     <a:bodyPr/>
                     <a:lstStyle/>
                     <a:p>
-                      <a:pPr indent="0" marL="0">
+                      <a:pPr marL="0" indent="0">
                         <a:buNone/>
                       </a:pPr>
                       <a:r>
@@ -11468,6 +11297,11 @@
                     </a:lnB>
                   </a:tcPr>
                 </a:tc>
+                <a:extLst>
+                  <a:ext uri="{0D108BD9-81ED-4DB2-BD59-A6C34878D82A}">
+                    <a16:rowId xmlns:a16="http://schemas.microsoft.com/office/drawing/2014/main" val="10007"/>
+                  </a:ext>
+                </a:extLst>
               </a:tr>
             </a:tbl>
           </a:graphicData>
@@ -11494,6 +11328,13 @@
           </a:solidFill>
           <a:ln/>
         </p:spPr>
+        <p:txBody>
+          <a:bodyPr/>
+          <a:lstStyle/>
+          <a:p>
+            <a:endParaRPr lang="ko-KR" altLang="en-US"/>
+          </a:p>
+        </p:txBody>
       </p:sp>
       <p:sp>
         <p:nvSpPr>
@@ -11516,7 +11357,7 @@
           <a:bodyPr wrap="square" rtlCol="0" anchor="ctr"/>
           <a:lstStyle/>
           <a:p>
-            <a:pPr indent="0" marL="0">
+            <a:pPr marL="0" indent="0">
               <a:buNone/>
             </a:pPr>
             <a:r>
@@ -11578,6 +11419,13 @@
           </a:solidFill>
           <a:ln/>
         </p:spPr>
+        <p:txBody>
+          <a:bodyPr/>
+          <a:lstStyle/>
+          <a:p>
+            <a:endParaRPr lang="ko-KR" altLang="en-US"/>
+          </a:p>
+        </p:txBody>
       </p:sp>
       <p:sp>
         <p:nvSpPr>
@@ -11602,11 +11450,11 @@
           </a:bodyPr>
           <a:lstStyle/>
           <a:p>
-            <a:pPr indent="0" marL="0">
+            <a:pPr marL="0" indent="0">
               <a:buNone/>
             </a:pPr>
             <a:r>
-              <a:rPr lang="en-US" sz="2800" b="1" spc="-30" kern="0" dirty="0">
+              <a:rPr lang="en-US" sz="2800" b="1" kern="0" spc="-30" dirty="0">
                 <a:solidFill>
                   <a:srgbClr val="1A1F36"/>
                 </a:solidFill>
@@ -11641,7 +11489,7 @@
           <a:bodyPr wrap="square" rtlCol="0" anchor="ctr"/>
           <a:lstStyle/>
           <a:p>
-            <a:pPr algn="r" indent="0" marL="0">
+            <a:pPr marL="0" indent="0" algn="r">
               <a:buNone/>
             </a:pPr>
             <a:r>
@@ -11869,6 +11717,13 @@
           </a:solidFill>
           <a:ln/>
         </p:spPr>
+        <p:txBody>
+          <a:bodyPr/>
+          <a:lstStyle/>
+          <a:p>
+            <a:endParaRPr lang="ko-KR" altLang="en-US"/>
+          </a:p>
+        </p:txBody>
       </p:sp>
       <p:sp>
         <p:nvSpPr>
@@ -11893,11 +11748,11 @@
           </a:bodyPr>
           <a:lstStyle/>
           <a:p>
-            <a:pPr indent="0" marL="0">
+            <a:pPr marL="0" indent="0">
               <a:buNone/>
             </a:pPr>
             <a:r>
-              <a:rPr lang="en-US" sz="2800" b="1" spc="-30" kern="0" dirty="0">
+              <a:rPr lang="en-US" sz="2800" b="1" kern="0" spc="-30" dirty="0">
                 <a:solidFill>
                   <a:srgbClr val="1A1F36"/>
                 </a:solidFill>
@@ -11932,7 +11787,7 @@
           <a:bodyPr wrap="square" rtlCol="0" anchor="ctr"/>
           <a:lstStyle/>
           <a:p>
-            <a:pPr algn="r" indent="0" marL="0">
+            <a:pPr marL="0" indent="0" algn="r">
               <a:buNone/>
             </a:pPr>
             <a:r>
@@ -11966,16 +11821,34 @@
         </p:nvGraphicFramePr>
         <p:xfrm>
           <a:off x="548640" y="1645920"/>
-          <a:ext cx="11091672" cy="914400"/>
+          <a:ext cx="11091672" cy="2357120"/>
         </p:xfrm>
         <a:graphic>
           <a:graphicData uri="http://schemas.openxmlformats.org/drawingml/2006/table">
             <a:tbl>
               <a:tblPr/>
               <a:tblGrid>
-                <a:gridCol w="3697224"/>
-                <a:gridCol w="3697224"/>
-                <a:gridCol w="3697224"/>
+                <a:gridCol w="3697224">
+                  <a:extLst>
+                    <a:ext uri="{9D8B030D-6E8A-4147-A177-3AD203B41FA5}">
+                      <a16:colId xmlns:a16="http://schemas.microsoft.com/office/drawing/2014/main" val="20000"/>
+                    </a:ext>
+                  </a:extLst>
+                </a:gridCol>
+                <a:gridCol w="3697224">
+                  <a:extLst>
+                    <a:ext uri="{9D8B030D-6E8A-4147-A177-3AD203B41FA5}">
+                      <a16:colId xmlns:a16="http://schemas.microsoft.com/office/drawing/2014/main" val="20001"/>
+                    </a:ext>
+                  </a:extLst>
+                </a:gridCol>
+                <a:gridCol w="3697224">
+                  <a:extLst>
+                    <a:ext uri="{9D8B030D-6E8A-4147-A177-3AD203B41FA5}">
+                      <a16:colId xmlns:a16="http://schemas.microsoft.com/office/drawing/2014/main" val="20002"/>
+                    </a:ext>
+                  </a:extLst>
+                </a:gridCol>
               </a:tblGrid>
               <a:tr h="0">
                 <a:tc>
@@ -11983,7 +11856,7 @@
                     <a:bodyPr/>
                     <a:lstStyle/>
                     <a:p>
-                      <a:pPr algn="ctr" indent="0" marL="0">
+                      <a:pPr marL="0" indent="0" algn="ctr">
                         <a:buNone/>
                       </a:pPr>
                       <a:r>
@@ -12051,7 +11924,7 @@
                     <a:bodyPr/>
                     <a:lstStyle/>
                     <a:p>
-                      <a:pPr algn="ctr" indent="0" marL="0">
+                      <a:pPr marL="0" indent="0" algn="ctr">
                         <a:buNone/>
                       </a:pPr>
                       <a:r>
@@ -12119,7 +11992,7 @@
                     <a:bodyPr/>
                     <a:lstStyle/>
                     <a:p>
-                      <a:pPr algn="ctr" indent="0" marL="0">
+                      <a:pPr marL="0" indent="0" algn="ctr">
                         <a:buNone/>
                       </a:pPr>
                       <a:r>
@@ -12182,6 +12055,11 @@
                     </a:solidFill>
                   </a:tcPr>
                 </a:tc>
+                <a:extLst>
+                  <a:ext uri="{0D108BD9-81ED-4DB2-BD59-A6C34878D82A}">
+                    <a16:rowId xmlns:a16="http://schemas.microsoft.com/office/drawing/2014/main" val="10000"/>
+                  </a:ext>
+                </a:extLst>
               </a:tr>
               <a:tr h="0">
                 <a:tc>
@@ -12189,7 +12067,7 @@
                     <a:bodyPr/>
                     <a:lstStyle/>
                     <a:p>
-                      <a:pPr indent="0" marL="0">
+                      <a:pPr marL="0" indent="0">
                         <a:buNone/>
                       </a:pPr>
                       <a:r>
@@ -12254,7 +12132,7 @@
                     <a:bodyPr/>
                     <a:lstStyle/>
                     <a:p>
-                      <a:pPr indent="0" marL="0">
+                      <a:pPr marL="0" indent="0">
                         <a:buNone/>
                       </a:pPr>
                       <a:r>
@@ -12319,7 +12197,7 @@
                     <a:bodyPr/>
                     <a:lstStyle/>
                     <a:p>
-                      <a:pPr indent="0" marL="0">
+                      <a:pPr marL="0" indent="0">
                         <a:buNone/>
                       </a:pPr>
                       <a:r>
@@ -12379,6 +12257,11 @@
                     </a:lnB>
                   </a:tcPr>
                 </a:tc>
+                <a:extLst>
+                  <a:ext uri="{0D108BD9-81ED-4DB2-BD59-A6C34878D82A}">
+                    <a16:rowId xmlns:a16="http://schemas.microsoft.com/office/drawing/2014/main" val="10001"/>
+                  </a:ext>
+                </a:extLst>
               </a:tr>
               <a:tr h="0">
                 <a:tc>
@@ -12386,7 +12269,7 @@
                     <a:bodyPr/>
                     <a:lstStyle/>
                     <a:p>
-                      <a:pPr indent="0" marL="0">
+                      <a:pPr marL="0" indent="0">
                         <a:buNone/>
                       </a:pPr>
                       <a:r>
@@ -12454,7 +12337,7 @@
                     <a:bodyPr/>
                     <a:lstStyle/>
                     <a:p>
-                      <a:pPr indent="0" marL="0">
+                      <a:pPr marL="0" indent="0">
                         <a:buNone/>
                       </a:pPr>
                       <a:r>
@@ -12522,7 +12405,7 @@
                     <a:bodyPr/>
                     <a:lstStyle/>
                     <a:p>
-                      <a:pPr indent="0" marL="0">
+                      <a:pPr marL="0" indent="0">
                         <a:buNone/>
                       </a:pPr>
                       <a:r>
@@ -12585,6 +12468,11 @@
                     </a:solidFill>
                   </a:tcPr>
                 </a:tc>
+                <a:extLst>
+                  <a:ext uri="{0D108BD9-81ED-4DB2-BD59-A6C34878D82A}">
+                    <a16:rowId xmlns:a16="http://schemas.microsoft.com/office/drawing/2014/main" val="10002"/>
+                  </a:ext>
+                </a:extLst>
               </a:tr>
               <a:tr h="0">
                 <a:tc>
@@ -12592,7 +12480,7 @@
                     <a:bodyPr/>
                     <a:lstStyle/>
                     <a:p>
-                      <a:pPr indent="0" marL="0">
+                      <a:pPr marL="0" indent="0">
                         <a:buNone/>
                       </a:pPr>
                       <a:r>
@@ -12657,7 +12545,7 @@
                     <a:bodyPr/>
                     <a:lstStyle/>
                     <a:p>
-                      <a:pPr indent="0" marL="0">
+                      <a:pPr marL="0" indent="0">
                         <a:buNone/>
                       </a:pPr>
                       <a:r>
@@ -12722,7 +12610,7 @@
                     <a:bodyPr/>
                     <a:lstStyle/>
                     <a:p>
-                      <a:pPr indent="0" marL="0">
+                      <a:pPr marL="0" indent="0">
                         <a:buNone/>
                       </a:pPr>
                       <a:r>
@@ -12782,6 +12670,11 @@
                     </a:lnB>
                   </a:tcPr>
                 </a:tc>
+                <a:extLst>
+                  <a:ext uri="{0D108BD9-81ED-4DB2-BD59-A6C34878D82A}">
+                    <a16:rowId xmlns:a16="http://schemas.microsoft.com/office/drawing/2014/main" val="10003"/>
+                  </a:ext>
+                </a:extLst>
               </a:tr>
               <a:tr h="0">
                 <a:tc>
@@ -12789,7 +12682,7 @@
                     <a:bodyPr/>
                     <a:lstStyle/>
                     <a:p>
-                      <a:pPr indent="0" marL="0">
+                      <a:pPr marL="0" indent="0">
                         <a:buNone/>
                       </a:pPr>
                       <a:r>
@@ -12857,7 +12750,7 @@
                     <a:bodyPr/>
                     <a:lstStyle/>
                     <a:p>
-                      <a:pPr indent="0" marL="0">
+                      <a:pPr marL="0" indent="0">
                         <a:buNone/>
                       </a:pPr>
                       <a:r>
@@ -12925,7 +12818,7 @@
                     <a:bodyPr/>
                     <a:lstStyle/>
                     <a:p>
-                      <a:pPr indent="0" marL="0">
+                      <a:pPr marL="0" indent="0">
                         <a:buNone/>
                       </a:pPr>
                       <a:r>
@@ -12988,6 +12881,11 @@
                     </a:solidFill>
                   </a:tcPr>
                 </a:tc>
+                <a:extLst>
+                  <a:ext uri="{0D108BD9-81ED-4DB2-BD59-A6C34878D82A}">
+                    <a16:rowId xmlns:a16="http://schemas.microsoft.com/office/drawing/2014/main" val="10004"/>
+                  </a:ext>
+                </a:extLst>
               </a:tr>
               <a:tr h="0">
                 <a:tc>
@@ -12995,7 +12893,7 @@
                     <a:bodyPr/>
                     <a:lstStyle/>
                     <a:p>
-                      <a:pPr indent="0" marL="0">
+                      <a:pPr marL="0" indent="0">
                         <a:buNone/>
                       </a:pPr>
                       <a:r>
@@ -13060,7 +12958,7 @@
                     <a:bodyPr/>
                     <a:lstStyle/>
                     <a:p>
-                      <a:pPr indent="0" marL="0">
+                      <a:pPr marL="0" indent="0">
                         <a:buNone/>
                       </a:pPr>
                       <a:r>
@@ -13125,7 +13023,7 @@
                     <a:bodyPr/>
                     <a:lstStyle/>
                     <a:p>
-                      <a:pPr indent="0" marL="0">
+                      <a:pPr marL="0" indent="0">
                         <a:buNone/>
                       </a:pPr>
                       <a:r>
@@ -13185,6 +13083,11 @@
                     </a:lnB>
                   </a:tcPr>
                 </a:tc>
+                <a:extLst>
+                  <a:ext uri="{0D108BD9-81ED-4DB2-BD59-A6C34878D82A}">
+                    <a16:rowId xmlns:a16="http://schemas.microsoft.com/office/drawing/2014/main" val="10005"/>
+                  </a:ext>
+                </a:extLst>
               </a:tr>
               <a:tr h="0">
                 <a:tc>
@@ -13192,7 +13095,7 @@
                     <a:bodyPr/>
                     <a:lstStyle/>
                     <a:p>
-                      <a:pPr indent="0" marL="0">
+                      <a:pPr marL="0" indent="0">
                         <a:buNone/>
                       </a:pPr>
                       <a:r>
@@ -13260,7 +13163,7 @@
                     <a:bodyPr/>
                     <a:lstStyle/>
                     <a:p>
-                      <a:pPr indent="0" marL="0">
+                      <a:pPr marL="0" indent="0">
                         <a:buNone/>
                       </a:pPr>
                       <a:r>
@@ -13328,7 +13231,7 @@
                     <a:bodyPr/>
                     <a:lstStyle/>
                     <a:p>
-                      <a:pPr indent="0" marL="0">
+                      <a:pPr marL="0" indent="0">
                         <a:buNone/>
                       </a:pPr>
                       <a:r>
@@ -13391,6 +13294,11 @@
                     </a:solidFill>
                   </a:tcPr>
                 </a:tc>
+                <a:extLst>
+                  <a:ext uri="{0D108BD9-81ED-4DB2-BD59-A6C34878D82A}">
+                    <a16:rowId xmlns:a16="http://schemas.microsoft.com/office/drawing/2014/main" val="10006"/>
+                  </a:ext>
+                </a:extLst>
               </a:tr>
               <a:tr h="0">
                 <a:tc>
@@ -13398,7 +13306,7 @@
                     <a:bodyPr/>
                     <a:lstStyle/>
                     <a:p>
-                      <a:pPr indent="0" marL="0">
+                      <a:pPr marL="0" indent="0">
                         <a:buNone/>
                       </a:pPr>
                       <a:r>
@@ -13463,7 +13371,7 @@
                     <a:bodyPr/>
                     <a:lstStyle/>
                     <a:p>
-                      <a:pPr indent="0" marL="0">
+                      <a:pPr marL="0" indent="0">
                         <a:buNone/>
                       </a:pPr>
                       <a:r>
@@ -13528,7 +13436,7 @@
                     <a:bodyPr/>
                     <a:lstStyle/>
                     <a:p>
-                      <a:pPr indent="0" marL="0">
+                      <a:pPr marL="0" indent="0">
                         <a:buNone/>
                       </a:pPr>
                       <a:r>
@@ -13588,6 +13496,11 @@
                     </a:lnB>
                   </a:tcPr>
                 </a:tc>
+                <a:extLst>
+                  <a:ext uri="{0D108BD9-81ED-4DB2-BD59-A6C34878D82A}">
+                    <a16:rowId xmlns:a16="http://schemas.microsoft.com/office/drawing/2014/main" val="10007"/>
+                  </a:ext>
+                </a:extLst>
               </a:tr>
             </a:tbl>
           </a:graphicData>
@@ -13637,6 +13550,13 @@
           </a:solidFill>
           <a:ln/>
         </p:spPr>
+        <p:txBody>
+          <a:bodyPr/>
+          <a:lstStyle/>
+          <a:p>
+            <a:endParaRPr lang="ko-KR" altLang="en-US"/>
+          </a:p>
+        </p:txBody>
       </p:sp>
       <p:sp>
         <p:nvSpPr>
@@ -13661,11 +13581,11 @@
           </a:bodyPr>
           <a:lstStyle/>
           <a:p>
-            <a:pPr indent="0" marL="0">
+            <a:pPr marL="0" indent="0">
               <a:buNone/>
             </a:pPr>
             <a:r>
-              <a:rPr lang="en-US" sz="2800" b="1" spc="-30" kern="0" dirty="0">
+              <a:rPr lang="en-US" sz="2800" b="1" kern="0" spc="-30" dirty="0">
                 <a:solidFill>
                   <a:srgbClr val="1A1F36"/>
                 </a:solidFill>
@@ -13700,7 +13620,7 @@
           <a:bodyPr wrap="square" rtlCol="0" anchor="ctr"/>
           <a:lstStyle/>
           <a:p>
-            <a:pPr algn="r" indent="0" marL="0">
+            <a:pPr marL="0" indent="0" algn="r">
               <a:buNone/>
             </a:pPr>
             <a:r>
@@ -13965,6 +13885,13 @@
           </a:solidFill>
           <a:ln/>
         </p:spPr>
+        <p:txBody>
+          <a:bodyPr/>
+          <a:lstStyle/>
+          <a:p>
+            <a:endParaRPr lang="ko-KR" altLang="en-US"/>
+          </a:p>
+        </p:txBody>
       </p:sp>
       <p:sp>
         <p:nvSpPr>
@@ -13989,11 +13916,11 @@
           </a:bodyPr>
           <a:lstStyle/>
           <a:p>
-            <a:pPr indent="0" marL="0">
+            <a:pPr marL="0" indent="0">
               <a:buNone/>
             </a:pPr>
             <a:r>
-              <a:rPr lang="en-US" sz="2800" b="1" spc="-30" kern="0" dirty="0">
+              <a:rPr lang="en-US" sz="2800" b="1" kern="0" spc="-30" dirty="0">
                 <a:solidFill>
                   <a:srgbClr val="1A1F36"/>
                 </a:solidFill>
@@ -14028,7 +13955,7 @@
           <a:bodyPr wrap="square" rtlCol="0" anchor="ctr"/>
           <a:lstStyle/>
           <a:p>
-            <a:pPr algn="r" indent="0" marL="0">
+            <a:pPr marL="0" indent="0" algn="r">
               <a:buNone/>
             </a:pPr>
             <a:r>
@@ -14062,16 +13989,34 @@
         </p:nvGraphicFramePr>
         <p:xfrm>
           <a:off x="548640" y="1645920"/>
-          <a:ext cx="11091672" cy="914400"/>
+          <a:ext cx="11091672" cy="1681480"/>
         </p:xfrm>
         <a:graphic>
           <a:graphicData uri="http://schemas.openxmlformats.org/drawingml/2006/table">
             <a:tbl>
               <a:tblPr/>
               <a:tblGrid>
-                <a:gridCol w="3697224"/>
-                <a:gridCol w="3697224"/>
-                <a:gridCol w="3697224"/>
+                <a:gridCol w="3697224">
+                  <a:extLst>
+                    <a:ext uri="{9D8B030D-6E8A-4147-A177-3AD203B41FA5}">
+                      <a16:colId xmlns:a16="http://schemas.microsoft.com/office/drawing/2014/main" val="20000"/>
+                    </a:ext>
+                  </a:extLst>
+                </a:gridCol>
+                <a:gridCol w="3697224">
+                  <a:extLst>
+                    <a:ext uri="{9D8B030D-6E8A-4147-A177-3AD203B41FA5}">
+                      <a16:colId xmlns:a16="http://schemas.microsoft.com/office/drawing/2014/main" val="20001"/>
+                    </a:ext>
+                  </a:extLst>
+                </a:gridCol>
+                <a:gridCol w="3697224">
+                  <a:extLst>
+                    <a:ext uri="{9D8B030D-6E8A-4147-A177-3AD203B41FA5}">
+                      <a16:colId xmlns:a16="http://schemas.microsoft.com/office/drawing/2014/main" val="20002"/>
+                    </a:ext>
+                  </a:extLst>
+                </a:gridCol>
               </a:tblGrid>
               <a:tr h="0">
                 <a:tc>
@@ -14079,7 +14024,7 @@
                     <a:bodyPr/>
                     <a:lstStyle/>
                     <a:p>
-                      <a:pPr algn="ctr" indent="0" marL="0">
+                      <a:pPr marL="0" indent="0" algn="ctr">
                         <a:buNone/>
                       </a:pPr>
                       <a:r>
@@ -14147,7 +14092,7 @@
                     <a:bodyPr/>
                     <a:lstStyle/>
                     <a:p>
-                      <a:pPr algn="ctr" indent="0" marL="0">
+                      <a:pPr marL="0" indent="0" algn="ctr">
                         <a:buNone/>
                       </a:pPr>
                       <a:r>
@@ -14215,7 +14160,7 @@
                     <a:bodyPr/>
                     <a:lstStyle/>
                     <a:p>
-                      <a:pPr algn="ctr" indent="0" marL="0">
+                      <a:pPr marL="0" indent="0" algn="ctr">
                         <a:buNone/>
                       </a:pPr>
                       <a:r>
@@ -14278,6 +14223,11 @@
                     </a:solidFill>
                   </a:tcPr>
                 </a:tc>
+                <a:extLst>
+                  <a:ext uri="{0D108BD9-81ED-4DB2-BD59-A6C34878D82A}">
+                    <a16:rowId xmlns:a16="http://schemas.microsoft.com/office/drawing/2014/main" val="10000"/>
+                  </a:ext>
+                </a:extLst>
               </a:tr>
               <a:tr h="0">
                 <a:tc>
@@ -14285,7 +14235,7 @@
                     <a:bodyPr/>
                     <a:lstStyle/>
                     <a:p>
-                      <a:pPr indent="0" marL="0">
+                      <a:pPr marL="0" indent="0">
                         <a:buNone/>
                       </a:pPr>
                       <a:r>
@@ -14350,7 +14300,7 @@
                     <a:bodyPr/>
                     <a:lstStyle/>
                     <a:p>
-                      <a:pPr indent="0" marL="0">
+                      <a:pPr marL="0" indent="0">
                         <a:buNone/>
                       </a:pPr>
                       <a:r>
@@ -14371,7 +14321,7 @@
                       </a:endParaRPr>
                     </a:p>
                     <a:p>
-                      <a:pPr indent="0" marL="0">
+                      <a:pPr marL="0" indent="0">
                         <a:buNone/>
                       </a:pPr>
                       <a:r>
@@ -14436,7 +14386,7 @@
                     <a:bodyPr/>
                     <a:lstStyle/>
                     <a:p>
-                      <a:pPr indent="0" marL="0">
+                      <a:pPr marL="0" indent="0">
                         <a:buNone/>
                       </a:pPr>
                       <a:r>
@@ -14496,6 +14446,11 @@
                     </a:lnB>
                   </a:tcPr>
                 </a:tc>
+                <a:extLst>
+                  <a:ext uri="{0D108BD9-81ED-4DB2-BD59-A6C34878D82A}">
+                    <a16:rowId xmlns:a16="http://schemas.microsoft.com/office/drawing/2014/main" val="10001"/>
+                  </a:ext>
+                </a:extLst>
               </a:tr>
               <a:tr h="0">
                 <a:tc>
@@ -14503,7 +14458,7 @@
                     <a:bodyPr/>
                     <a:lstStyle/>
                     <a:p>
-                      <a:pPr indent="0" marL="0">
+                      <a:pPr marL="0" indent="0">
                         <a:buNone/>
                       </a:pPr>
                       <a:r>
@@ -14571,7 +14526,7 @@
                     <a:bodyPr/>
                     <a:lstStyle/>
                     <a:p>
-                      <a:pPr indent="0" marL="0">
+                      <a:pPr marL="0" indent="0">
                         <a:buNone/>
                       </a:pPr>
                       <a:r>
@@ -14592,7 +14547,7 @@
                       </a:endParaRPr>
                     </a:p>
                     <a:p>
-                      <a:pPr indent="0" marL="0">
+                      <a:pPr marL="0" indent="0">
                         <a:buNone/>
                       </a:pPr>
                       <a:r>
@@ -14660,7 +14615,7 @@
                     <a:bodyPr/>
                     <a:lstStyle/>
                     <a:p>
-                      <a:pPr indent="0" marL="0">
+                      <a:pPr marL="0" indent="0">
                         <a:buNone/>
                       </a:pPr>
                       <a:r>
@@ -14723,6 +14678,11 @@
                     </a:solidFill>
                   </a:tcPr>
                 </a:tc>
+                <a:extLst>
+                  <a:ext uri="{0D108BD9-81ED-4DB2-BD59-A6C34878D82A}">
+                    <a16:rowId xmlns:a16="http://schemas.microsoft.com/office/drawing/2014/main" val="10002"/>
+                  </a:ext>
+                </a:extLst>
               </a:tr>
               <a:tr h="0">
                 <a:tc>
@@ -14730,7 +14690,7 @@
                     <a:bodyPr/>
                     <a:lstStyle/>
                     <a:p>
-                      <a:pPr indent="0" marL="0">
+                      <a:pPr marL="0" indent="0">
                         <a:buNone/>
                       </a:pPr>
                       <a:r>
@@ -14795,7 +14755,7 @@
                     <a:bodyPr/>
                     <a:lstStyle/>
                     <a:p>
-                      <a:pPr indent="0" marL="0">
+                      <a:pPr marL="0" indent="0">
                         <a:buNone/>
                       </a:pPr>
                       <a:r>
@@ -14816,7 +14776,7 @@
                       </a:endParaRPr>
                     </a:p>
                     <a:p>
-                      <a:pPr indent="0" marL="0">
+                      <a:pPr marL="0" indent="0">
                         <a:buNone/>
                       </a:pPr>
                       <a:r>
@@ -14881,7 +14841,7 @@
                     <a:bodyPr/>
                     <a:lstStyle/>
                     <a:p>
-                      <a:pPr indent="0" marL="0">
+                      <a:pPr marL="0" indent="0">
                         <a:buNone/>
                       </a:pPr>
                       <a:r>
@@ -14902,7 +14862,7 @@
                       </a:endParaRPr>
                     </a:p>
                     <a:p>
-                      <a:pPr indent="0" marL="0">
+                      <a:pPr marL="0" indent="0">
                         <a:buNone/>
                       </a:pPr>
                       <a:r>
@@ -14962,6 +14922,11 @@
                     </a:lnB>
                   </a:tcPr>
                 </a:tc>
+                <a:extLst>
+                  <a:ext uri="{0D108BD9-81ED-4DB2-BD59-A6C34878D82A}">
+                    <a16:rowId xmlns:a16="http://schemas.microsoft.com/office/drawing/2014/main" val="10003"/>
+                  </a:ext>
+                </a:extLst>
               </a:tr>
             </a:tbl>
           </a:graphicData>
@@ -15011,6 +14976,13 @@
           </a:solidFill>
           <a:ln/>
         </p:spPr>
+        <p:txBody>
+          <a:bodyPr/>
+          <a:lstStyle/>
+          <a:p>
+            <a:endParaRPr lang="ko-KR" altLang="en-US"/>
+          </a:p>
+        </p:txBody>
       </p:sp>
       <p:sp>
         <p:nvSpPr>
@@ -15035,11 +15007,11 @@
           </a:bodyPr>
           <a:lstStyle/>
           <a:p>
-            <a:pPr indent="0" marL="0">
+            <a:pPr marL="0" indent="0">
               <a:buNone/>
             </a:pPr>
             <a:r>
-              <a:rPr lang="en-US" sz="2800" b="1" spc="-30" kern="0" dirty="0">
+              <a:rPr lang="en-US" sz="2800" b="1" kern="0" spc="-30" dirty="0">
                 <a:solidFill>
                   <a:srgbClr val="1A1F36"/>
                 </a:solidFill>
@@ -15074,7 +15046,7 @@
           <a:bodyPr wrap="square" rtlCol="0" anchor="ctr"/>
           <a:lstStyle/>
           <a:p>
-            <a:pPr algn="r" indent="0" marL="0">
+            <a:pPr marL="0" indent="0" algn="r">
               <a:buNone/>
             </a:pPr>
             <a:r>
@@ -15291,6 +15263,13 @@
           </a:solidFill>
           <a:ln/>
         </p:spPr>
+        <p:txBody>
+          <a:bodyPr/>
+          <a:lstStyle/>
+          <a:p>
+            <a:endParaRPr lang="ko-KR" altLang="en-US"/>
+          </a:p>
+        </p:txBody>
       </p:sp>
       <p:sp>
         <p:nvSpPr>
@@ -15315,11 +15294,11 @@
           </a:bodyPr>
           <a:lstStyle/>
           <a:p>
-            <a:pPr indent="0" marL="0">
+            <a:pPr marL="0" indent="0">
               <a:buNone/>
             </a:pPr>
             <a:r>
-              <a:rPr lang="en-US" sz="2800" b="1" spc="-30" kern="0" dirty="0">
+              <a:rPr lang="en-US" sz="2800" b="1" kern="0" spc="-30" dirty="0">
                 <a:solidFill>
                   <a:srgbClr val="1A1F36"/>
                 </a:solidFill>
@@ -15354,7 +15333,7 @@
           <a:bodyPr wrap="square" rtlCol="0" anchor="ctr"/>
           <a:lstStyle/>
           <a:p>
-            <a:pPr algn="r" indent="0" marL="0">
+            <a:pPr marL="0" indent="0" algn="r">
               <a:buNone/>
             </a:pPr>
             <a:r>
@@ -15393,6 +15372,13 @@
           </a:solidFill>
           <a:ln/>
         </p:spPr>
+        <p:txBody>
+          <a:bodyPr/>
+          <a:lstStyle/>
+          <a:p>
+            <a:endParaRPr lang="ko-KR" altLang="en-US"/>
+          </a:p>
+        </p:txBody>
       </p:sp>
       <p:sp>
         <p:nvSpPr>
@@ -15415,7 +15401,7 @@
           <a:bodyPr wrap="square" rtlCol="0" anchor="ctr"/>
           <a:lstStyle/>
           <a:p>
-            <a:pPr indent="0" marL="0">
+            <a:pPr marL="0" indent="0">
               <a:buNone/>
             </a:pPr>
             <a:r>
@@ -15596,6 +15582,13 @@
           </a:solidFill>
           <a:ln/>
         </p:spPr>
+        <p:txBody>
+          <a:bodyPr/>
+          <a:lstStyle/>
+          <a:p>
+            <a:endParaRPr lang="ko-KR" altLang="en-US"/>
+          </a:p>
+        </p:txBody>
       </p:sp>
       <p:sp>
         <p:nvSpPr>
@@ -15618,7 +15611,7 @@
           <a:bodyPr wrap="square" rtlCol="0" anchor="ctr"/>
           <a:lstStyle/>
           <a:p>
-            <a:pPr indent="0" marL="0">
+            <a:pPr marL="0" indent="0">
               <a:buNone/>
             </a:pPr>
             <a:r>
@@ -15822,6 +15815,13 @@
           </a:solidFill>
           <a:ln/>
         </p:spPr>
+        <p:txBody>
+          <a:bodyPr/>
+          <a:lstStyle/>
+          <a:p>
+            <a:endParaRPr lang="ko-KR" altLang="en-US"/>
+          </a:p>
+        </p:txBody>
       </p:sp>
       <p:sp>
         <p:nvSpPr>
@@ -15846,11 +15846,11 @@
           </a:bodyPr>
           <a:lstStyle/>
           <a:p>
-            <a:pPr indent="0" marL="0">
+            <a:pPr marL="0" indent="0">
               <a:buNone/>
             </a:pPr>
             <a:r>
-              <a:rPr lang="en-US" sz="2800" b="1" spc="-30" kern="0" dirty="0">
+              <a:rPr lang="en-US" sz="2800" b="1" kern="0" spc="-30" dirty="0">
                 <a:solidFill>
                   <a:srgbClr val="1A1F36"/>
                 </a:solidFill>
@@ -15885,7 +15885,7 @@
           <a:bodyPr wrap="square" rtlCol="0" anchor="ctr"/>
           <a:lstStyle/>
           <a:p>
-            <a:pPr algn="r" indent="0" marL="0">
+            <a:pPr marL="0" indent="0" algn="r">
               <a:buNone/>
             </a:pPr>
             <a:r>
@@ -16174,6 +16174,13 @@
           </a:solidFill>
           <a:ln/>
         </p:spPr>
+        <p:txBody>
+          <a:bodyPr/>
+          <a:lstStyle/>
+          <a:p>
+            <a:endParaRPr lang="ko-KR" altLang="en-US"/>
+          </a:p>
+        </p:txBody>
       </p:sp>
       <p:sp>
         <p:nvSpPr>
@@ -16196,7 +16203,7 @@
           <a:bodyPr wrap="square" rtlCol="0" anchor="ctr"/>
           <a:lstStyle/>
           <a:p>
-            <a:pPr algn="ctr" indent="0" marL="0">
+            <a:pPr marL="0" indent="0" algn="ctr">
               <a:buNone/>
             </a:pPr>
             <a:r>
@@ -16235,7 +16242,7 @@
           <a:bodyPr wrap="square" rtlCol="0" anchor="ctr"/>
           <a:lstStyle/>
           <a:p>
-            <a:pPr indent="0" marL="0">
+            <a:pPr marL="0" indent="0">
               <a:buNone/>
             </a:pPr>
             <a:r>
@@ -16274,7 +16281,7 @@
           <a:bodyPr wrap="square" rtlCol="0" anchor="ctr"/>
           <a:lstStyle/>
           <a:p>
-            <a:pPr indent="0" marL="0">
+            <a:pPr marL="0" indent="0">
               <a:lnSpc>
                 <a:spcPct val="140000"/>
               </a:lnSpc>
@@ -16339,6 +16346,13 @@
           </a:solidFill>
           <a:ln/>
         </p:spPr>
+        <p:txBody>
+          <a:bodyPr/>
+          <a:lstStyle/>
+          <a:p>
+            <a:endParaRPr lang="ko-KR" altLang="en-US"/>
+          </a:p>
+        </p:txBody>
       </p:sp>
       <p:sp>
         <p:nvSpPr>
@@ -16363,11 +16377,11 @@
           </a:bodyPr>
           <a:lstStyle/>
           <a:p>
-            <a:pPr indent="0" marL="0">
+            <a:pPr marL="0" indent="0">
               <a:buNone/>
             </a:pPr>
             <a:r>
-              <a:rPr lang="en-US" sz="2800" b="1" spc="-30" kern="0" dirty="0">
+              <a:rPr lang="en-US" sz="2800" b="1" kern="0" spc="-30" dirty="0">
                 <a:solidFill>
                   <a:srgbClr val="1A1F36"/>
                 </a:solidFill>
@@ -16402,7 +16416,7 @@
           <a:bodyPr wrap="square" rtlCol="0" anchor="ctr"/>
           <a:lstStyle/>
           <a:p>
-            <a:pPr algn="r" indent="0" marL="0">
+            <a:pPr marL="0" indent="0" algn="r">
               <a:buNone/>
             </a:pPr>
             <a:r>
@@ -16441,6 +16455,13 @@
           </a:solidFill>
           <a:ln/>
         </p:spPr>
+        <p:txBody>
+          <a:bodyPr/>
+          <a:lstStyle/>
+          <a:p>
+            <a:endParaRPr lang="ko-KR" altLang="en-US"/>
+          </a:p>
+        </p:txBody>
       </p:sp>
       <p:sp>
         <p:nvSpPr>
@@ -16463,7 +16484,7 @@
           <a:bodyPr wrap="square" rtlCol="0" anchor="ctr"/>
           <a:lstStyle/>
           <a:p>
-            <a:pPr algn="ctr" indent="0" marL="0">
+            <a:pPr marL="0" indent="0" algn="ctr">
               <a:buNone/>
             </a:pPr>
             <a:r>
@@ -16502,7 +16523,7 @@
           <a:bodyPr wrap="square" rtlCol="0" anchor="ctr"/>
           <a:lstStyle/>
           <a:p>
-            <a:pPr algn="ctr" indent="0" marL="0">
+            <a:pPr marL="0" indent="0" algn="ctr">
               <a:buNone/>
             </a:pPr>
             <a:r>
@@ -16541,7 +16562,7 @@
           <a:bodyPr wrap="square" rtlCol="0" anchor="ctr"/>
           <a:lstStyle/>
           <a:p>
-            <a:pPr algn="ctr" indent="0" marL="0">
+            <a:pPr marL="0" indent="0" algn="ctr">
               <a:buNone/>
             </a:pPr>
             <a:r>
@@ -16580,6 +16601,13 @@
           </a:solidFill>
           <a:ln/>
         </p:spPr>
+        <p:txBody>
+          <a:bodyPr/>
+          <a:lstStyle/>
+          <a:p>
+            <a:endParaRPr lang="ko-KR" altLang="en-US"/>
+          </a:p>
+        </p:txBody>
       </p:sp>
       <p:sp>
         <p:nvSpPr>
@@ -16602,7 +16630,7 @@
           <a:bodyPr wrap="square" rtlCol="0" anchor="ctr"/>
           <a:lstStyle/>
           <a:p>
-            <a:pPr algn="ctr" indent="0" marL="0">
+            <a:pPr marL="0" indent="0" algn="ctr">
               <a:buNone/>
             </a:pPr>
             <a:r>
@@ -16641,7 +16669,7 @@
           <a:bodyPr wrap="square" rtlCol="0" anchor="ctr"/>
           <a:lstStyle/>
           <a:p>
-            <a:pPr algn="ctr" indent="0" marL="0">
+            <a:pPr marL="0" indent="0" algn="ctr">
               <a:buNone/>
             </a:pPr>
             <a:r>
@@ -16680,7 +16708,7 @@
           <a:bodyPr wrap="square" rtlCol="0" anchor="ctr"/>
           <a:lstStyle/>
           <a:p>
-            <a:pPr algn="ctr" indent="0" marL="0">
+            <a:pPr marL="0" indent="0" algn="ctr">
               <a:buNone/>
             </a:pPr>
             <a:r>
@@ -16719,6 +16747,13 @@
           </a:solidFill>
           <a:ln/>
         </p:spPr>
+        <p:txBody>
+          <a:bodyPr/>
+          <a:lstStyle/>
+          <a:p>
+            <a:endParaRPr lang="ko-KR" altLang="en-US"/>
+          </a:p>
+        </p:txBody>
       </p:sp>
       <p:sp>
         <p:nvSpPr>
@@ -16741,7 +16776,7 @@
           <a:bodyPr wrap="square" rtlCol="0" anchor="ctr"/>
           <a:lstStyle/>
           <a:p>
-            <a:pPr algn="ctr" indent="0" marL="0">
+            <a:pPr marL="0" indent="0" algn="ctr">
               <a:buNone/>
             </a:pPr>
             <a:r>
@@ -16780,7 +16815,7 @@
           <a:bodyPr wrap="square" rtlCol="0" anchor="ctr"/>
           <a:lstStyle/>
           <a:p>
-            <a:pPr algn="ctr" indent="0" marL="0">
+            <a:pPr marL="0" indent="0" algn="ctr">
               <a:buNone/>
             </a:pPr>
             <a:r>
@@ -16819,7 +16854,7 @@
           <a:bodyPr wrap="square" rtlCol="0" anchor="ctr"/>
           <a:lstStyle/>
           <a:p>
-            <a:pPr algn="ctr" indent="0" marL="0">
+            <a:pPr marL="0" indent="0" algn="ctr">
               <a:buNone/>
             </a:pPr>
             <a:r>
@@ -16858,7 +16893,7 @@
           <a:bodyPr wrap="square" rtlCol="0" anchor="t"/>
           <a:lstStyle/>
           <a:p>
-            <a:pPr indent="0" marL="0">
+            <a:pPr marL="0" indent="0">
               <a:lnSpc>
                 <a:spcPct val="140000"/>
               </a:lnSpc>
@@ -16872,16 +16907,10 @@
               </a:rPr>
               <a:t>왜 +30%인가?</a:t>
             </a:r>
-            <a:pPr indent="0" marL="0">
-              <a:lnSpc>
-                <a:spcPct val="140000"/>
-              </a:lnSpc>
-              <a:buNone/>
-            </a:pPr>
             <a:endParaRPr lang="en-US" sz="1600" dirty="0"/>
           </a:p>
           <a:p>
-            <a:pPr indent="0" marL="0">
+            <a:pPr marL="0" indent="0">
               <a:lnSpc>
                 <a:spcPct val="140000"/>
               </a:lnSpc>
@@ -16898,7 +16927,7 @@
             <a:endParaRPr lang="en-US" sz="1600" dirty="0"/>
           </a:p>
           <a:p>
-            <a:pPr indent="0" marL="0">
+            <a:pPr marL="0" indent="0">
               <a:lnSpc>
                 <a:spcPct val="140000"/>
               </a:lnSpc>
@@ -16960,6 +16989,13 @@
           </a:solidFill>
           <a:ln/>
         </p:spPr>
+        <p:txBody>
+          <a:bodyPr/>
+          <a:lstStyle/>
+          <a:p>
+            <a:endParaRPr lang="ko-KR" altLang="en-US"/>
+          </a:p>
+        </p:txBody>
       </p:sp>
       <p:sp>
         <p:nvSpPr>
@@ -16984,11 +17020,11 @@
           </a:bodyPr>
           <a:lstStyle/>
           <a:p>
-            <a:pPr indent="0" marL="0">
+            <a:pPr marL="0" indent="0">
               <a:buNone/>
             </a:pPr>
             <a:r>
-              <a:rPr lang="en-US" sz="2800" b="1" spc="-30" kern="0" dirty="0">
+              <a:rPr lang="en-US" sz="2800" b="1" kern="0" spc="-30" dirty="0">
                 <a:solidFill>
                   <a:srgbClr val="1A1F36"/>
                 </a:solidFill>
@@ -17023,7 +17059,7 @@
           <a:bodyPr wrap="square" rtlCol="0" anchor="ctr"/>
           <a:lstStyle/>
           <a:p>
-            <a:pPr algn="r" indent="0" marL="0">
+            <a:pPr marL="0" indent="0" algn="r">
               <a:buNone/>
             </a:pPr>
             <a:r>
@@ -17265,6 +17301,13 @@
           </a:solidFill>
           <a:ln/>
         </p:spPr>
+        <p:txBody>
+          <a:bodyPr/>
+          <a:lstStyle/>
+          <a:p>
+            <a:endParaRPr lang="ko-KR" altLang="en-US"/>
+          </a:p>
+        </p:txBody>
       </p:sp>
       <p:sp>
         <p:nvSpPr>
@@ -17287,7 +17330,7 @@
           <a:bodyPr wrap="square" rtlCol="0" anchor="ctr"/>
           <a:lstStyle/>
           <a:p>
-            <a:pPr indent="0" marL="0">
+            <a:pPr marL="0" indent="0">
               <a:buNone/>
             </a:pPr>
             <a:r>
@@ -17349,6 +17392,13 @@
           </a:solidFill>
           <a:ln/>
         </p:spPr>
+        <p:txBody>
+          <a:bodyPr/>
+          <a:lstStyle/>
+          <a:p>
+            <a:endParaRPr lang="ko-KR" altLang="en-US"/>
+          </a:p>
+        </p:txBody>
       </p:sp>
       <p:sp>
         <p:nvSpPr>
@@ -17371,7 +17421,7 @@
           <a:bodyPr wrap="square" rtlCol="0" anchor="ctr"/>
           <a:lstStyle/>
           <a:p>
-            <a:pPr algn="ctr" indent="0" marL="0">
+            <a:pPr marL="0" indent="0" algn="ctr">
               <a:buNone/>
             </a:pPr>
             <a:r>
@@ -17410,7 +17460,7 @@
           <a:bodyPr wrap="square" rtlCol="0" anchor="ctr"/>
           <a:lstStyle/>
           <a:p>
-            <a:pPr indent="0" marL="0">
+            <a:pPr marL="0" indent="0">
               <a:buNone/>
             </a:pPr>
             <a:r>
@@ -17449,7 +17499,7 @@
           <a:bodyPr wrap="square" rtlCol="0" anchor="ctr"/>
           <a:lstStyle/>
           <a:p>
-            <a:pPr indent="0" marL="0">
+            <a:pPr marL="0" indent="0">
               <a:buNone/>
             </a:pPr>
             <a:r>
@@ -17511,6 +17561,13 @@
           </a:solidFill>
           <a:ln/>
         </p:spPr>
+        <p:txBody>
+          <a:bodyPr/>
+          <a:lstStyle/>
+          <a:p>
+            <a:endParaRPr lang="ko-KR" altLang="en-US"/>
+          </a:p>
+        </p:txBody>
       </p:sp>
       <p:sp>
         <p:nvSpPr>
@@ -17535,11 +17592,11 @@
           </a:bodyPr>
           <a:lstStyle/>
           <a:p>
-            <a:pPr indent="0" marL="0">
+            <a:pPr marL="0" indent="0">
               <a:buNone/>
             </a:pPr>
             <a:r>
-              <a:rPr lang="en-US" sz="2800" b="1" spc="-30" kern="0" dirty="0">
+              <a:rPr lang="en-US" sz="2800" b="1" kern="0" spc="-30" dirty="0">
                 <a:solidFill>
                   <a:srgbClr val="1A1F36"/>
                 </a:solidFill>
@@ -17574,7 +17631,7 @@
           <a:bodyPr wrap="square" rtlCol="0" anchor="ctr"/>
           <a:lstStyle/>
           <a:p>
-            <a:pPr algn="r" indent="0" marL="0">
+            <a:pPr marL="0" indent="0" algn="r">
               <a:buNone/>
             </a:pPr>
             <a:r>
@@ -17611,6 +17668,13 @@
           </a:solidFill>
           <a:ln/>
         </p:spPr>
+        <p:txBody>
+          <a:bodyPr/>
+          <a:lstStyle/>
+          <a:p>
+            <a:endParaRPr lang="ko-KR" altLang="en-US"/>
+          </a:p>
+        </p:txBody>
       </p:sp>
       <p:sp>
         <p:nvSpPr>
@@ -17631,6 +17695,13 @@
           </a:solidFill>
           <a:ln/>
         </p:spPr>
+        <p:txBody>
+          <a:bodyPr/>
+          <a:lstStyle/>
+          <a:p>
+            <a:endParaRPr lang="ko-KR" altLang="en-US"/>
+          </a:p>
+        </p:txBody>
       </p:sp>
       <p:sp>
         <p:nvSpPr>
@@ -17653,7 +17724,7 @@
           <a:bodyPr wrap="square" rtlCol="0" anchor="ctr"/>
           <a:lstStyle/>
           <a:p>
-            <a:pPr indent="0" marL="0">
+            <a:pPr marL="0" indent="0">
               <a:buNone/>
             </a:pPr>
             <a:r>
@@ -17692,7 +17763,7 @@
           <a:bodyPr wrap="square" rtlCol="0" anchor="ctr"/>
           <a:lstStyle/>
           <a:p>
-            <a:pPr indent="0" marL="0">
+            <a:pPr marL="0" indent="0">
               <a:buNone/>
             </a:pPr>
             <a:r>
@@ -17731,7 +17802,7 @@
           <a:bodyPr wrap="square" rtlCol="0" anchor="ctr"/>
           <a:lstStyle/>
           <a:p>
-            <a:pPr indent="0" marL="0">
+            <a:pPr marL="0" indent="0">
               <a:buNone/>
             </a:pPr>
             <a:r>
@@ -17771,6 +17842,13 @@
             <a:prstDash val="solid"/>
           </a:ln>
         </p:spPr>
+        <p:txBody>
+          <a:bodyPr/>
+          <a:lstStyle/>
+          <a:p>
+            <a:endParaRPr lang="ko-KR" altLang="en-US"/>
+          </a:p>
+        </p:txBody>
       </p:sp>
       <p:sp>
         <p:nvSpPr>
@@ -17791,6 +17869,13 @@
           </a:solidFill>
           <a:ln/>
         </p:spPr>
+        <p:txBody>
+          <a:bodyPr/>
+          <a:lstStyle/>
+          <a:p>
+            <a:endParaRPr lang="ko-KR" altLang="en-US"/>
+          </a:p>
+        </p:txBody>
       </p:sp>
       <p:sp>
         <p:nvSpPr>
@@ -17813,7 +17898,7 @@
           <a:bodyPr wrap="square" rtlCol="0" anchor="ctr"/>
           <a:lstStyle/>
           <a:p>
-            <a:pPr indent="0" marL="0">
+            <a:pPr marL="0" indent="0">
               <a:buNone/>
             </a:pPr>
             <a:r>
@@ -17852,7 +17937,7 @@
           <a:bodyPr wrap="square" rtlCol="0" anchor="ctr"/>
           <a:lstStyle/>
           <a:p>
-            <a:pPr indent="0" marL="0">
+            <a:pPr marL="0" indent="0">
               <a:buNone/>
             </a:pPr>
             <a:r>
@@ -17891,7 +17976,7 @@
           <a:bodyPr wrap="square" rtlCol="0" anchor="ctr"/>
           <a:lstStyle/>
           <a:p>
-            <a:pPr indent="0" marL="0">
+            <a:pPr marL="0" indent="0">
               <a:buNone/>
             </a:pPr>
             <a:r>
@@ -17931,6 +18016,13 @@
             <a:prstDash val="solid"/>
           </a:ln>
         </p:spPr>
+        <p:txBody>
+          <a:bodyPr/>
+          <a:lstStyle/>
+          <a:p>
+            <a:endParaRPr lang="ko-KR" altLang="en-US"/>
+          </a:p>
+        </p:txBody>
       </p:sp>
       <p:sp>
         <p:nvSpPr>
@@ -17951,6 +18043,13 @@
           </a:solidFill>
           <a:ln/>
         </p:spPr>
+        <p:txBody>
+          <a:bodyPr/>
+          <a:lstStyle/>
+          <a:p>
+            <a:endParaRPr lang="ko-KR" altLang="en-US"/>
+          </a:p>
+        </p:txBody>
       </p:sp>
       <p:sp>
         <p:nvSpPr>
@@ -17973,7 +18072,7 @@
           <a:bodyPr wrap="square" rtlCol="0" anchor="ctr"/>
           <a:lstStyle/>
           <a:p>
-            <a:pPr indent="0" marL="0">
+            <a:pPr marL="0" indent="0">
               <a:buNone/>
             </a:pPr>
             <a:r>
@@ -18012,7 +18111,7 @@
           <a:bodyPr wrap="square" rtlCol="0" anchor="ctr"/>
           <a:lstStyle/>
           <a:p>
-            <a:pPr indent="0" marL="0">
+            <a:pPr marL="0" indent="0">
               <a:buNone/>
             </a:pPr>
             <a:r>
@@ -18051,7 +18150,7 @@
           <a:bodyPr wrap="square" rtlCol="0" anchor="ctr"/>
           <a:lstStyle/>
           <a:p>
-            <a:pPr indent="0" marL="0">
+            <a:pPr marL="0" indent="0">
               <a:buNone/>
             </a:pPr>
             <a:r>
@@ -18091,6 +18190,13 @@
             <a:prstDash val="solid"/>
           </a:ln>
         </p:spPr>
+        <p:txBody>
+          <a:bodyPr/>
+          <a:lstStyle/>
+          <a:p>
+            <a:endParaRPr lang="ko-KR" altLang="en-US"/>
+          </a:p>
+        </p:txBody>
       </p:sp>
       <p:sp>
         <p:nvSpPr>
@@ -18111,6 +18217,13 @@
           </a:solidFill>
           <a:ln/>
         </p:spPr>
+        <p:txBody>
+          <a:bodyPr/>
+          <a:lstStyle/>
+          <a:p>
+            <a:endParaRPr lang="ko-KR" altLang="en-US"/>
+          </a:p>
+        </p:txBody>
       </p:sp>
       <p:sp>
         <p:nvSpPr>
@@ -18133,7 +18246,7 @@
           <a:bodyPr wrap="square" rtlCol="0" anchor="ctr"/>
           <a:lstStyle/>
           <a:p>
-            <a:pPr indent="0" marL="0">
+            <a:pPr marL="0" indent="0">
               <a:buNone/>
             </a:pPr>
             <a:r>
@@ -18172,7 +18285,7 @@
           <a:bodyPr wrap="square" rtlCol="0" anchor="ctr"/>
           <a:lstStyle/>
           <a:p>
-            <a:pPr indent="0" marL="0">
+            <a:pPr marL="0" indent="0">
               <a:buNone/>
             </a:pPr>
             <a:r>
@@ -18211,7 +18324,7 @@
           <a:bodyPr wrap="square" rtlCol="0" anchor="ctr"/>
           <a:lstStyle/>
           <a:p>
-            <a:pPr indent="0" marL="0">
+            <a:pPr marL="0" indent="0">
               <a:buNone/>
             </a:pPr>
             <a:r>
@@ -18273,6 +18386,13 @@
           </a:solidFill>
           <a:ln/>
         </p:spPr>
+        <p:txBody>
+          <a:bodyPr/>
+          <a:lstStyle/>
+          <a:p>
+            <a:endParaRPr lang="ko-KR" altLang="en-US"/>
+          </a:p>
+        </p:txBody>
       </p:sp>
       <p:sp>
         <p:nvSpPr>
@@ -18297,11 +18417,11 @@
           </a:bodyPr>
           <a:lstStyle/>
           <a:p>
-            <a:pPr indent="0" marL="0">
+            <a:pPr marL="0" indent="0">
               <a:buNone/>
             </a:pPr>
             <a:r>
-              <a:rPr lang="en-US" sz="2800" b="1" spc="-30" kern="0" dirty="0">
+              <a:rPr lang="en-US" sz="2800" b="1" kern="0" spc="-30" dirty="0">
                 <a:solidFill>
                   <a:srgbClr val="1A1F36"/>
                 </a:solidFill>
@@ -18336,7 +18456,7 @@
           <a:bodyPr wrap="square" rtlCol="0" anchor="ctr"/>
           <a:lstStyle/>
           <a:p>
-            <a:pPr algn="r" indent="0" marL="0">
+            <a:pPr marL="0" indent="0" algn="r">
               <a:buNone/>
             </a:pPr>
             <a:r>
@@ -18625,6 +18745,13 @@
           </a:solidFill>
           <a:ln/>
         </p:spPr>
+        <p:txBody>
+          <a:bodyPr/>
+          <a:lstStyle/>
+          <a:p>
+            <a:endParaRPr lang="ko-KR" altLang="en-US"/>
+          </a:p>
+        </p:txBody>
       </p:sp>
       <p:sp>
         <p:nvSpPr>
@@ -18649,11 +18776,11 @@
           </a:bodyPr>
           <a:lstStyle/>
           <a:p>
-            <a:pPr indent="0" marL="0">
+            <a:pPr marL="0" indent="0">
               <a:buNone/>
             </a:pPr>
             <a:r>
-              <a:rPr lang="en-US" sz="2800" b="1" spc="-30" kern="0" dirty="0">
+              <a:rPr lang="en-US" sz="2800" b="1" kern="0" spc="-30" dirty="0">
                 <a:solidFill>
                   <a:srgbClr val="1A1F36"/>
                 </a:solidFill>
@@ -18688,7 +18815,7 @@
           <a:bodyPr wrap="square" rtlCol="0" anchor="ctr"/>
           <a:lstStyle/>
           <a:p>
-            <a:pPr algn="r" indent="0" marL="0">
+            <a:pPr marL="0" indent="0" algn="r">
               <a:buNone/>
             </a:pPr>
             <a:r>
@@ -18977,6 +19104,13 @@
           </a:solidFill>
           <a:ln/>
         </p:spPr>
+        <p:txBody>
+          <a:bodyPr/>
+          <a:lstStyle/>
+          <a:p>
+            <a:endParaRPr lang="ko-KR" altLang="en-US"/>
+          </a:p>
+        </p:txBody>
       </p:sp>
       <p:sp>
         <p:nvSpPr>
@@ -19001,11 +19135,11 @@
           </a:bodyPr>
           <a:lstStyle/>
           <a:p>
-            <a:pPr indent="0" marL="0">
+            <a:pPr marL="0" indent="0">
               <a:buNone/>
             </a:pPr>
             <a:r>
-              <a:rPr lang="en-US" sz="2800" b="1" spc="-30" kern="0" dirty="0">
+              <a:rPr lang="en-US" sz="2800" b="1" kern="0" spc="-30" dirty="0">
                 <a:solidFill>
                   <a:srgbClr val="1A1F36"/>
                 </a:solidFill>
@@ -19040,7 +19174,7 @@
           <a:bodyPr wrap="square" rtlCol="0" anchor="ctr"/>
           <a:lstStyle/>
           <a:p>
-            <a:pPr algn="r" indent="0" marL="0">
+            <a:pPr marL="0" indent="0" algn="r">
               <a:buNone/>
             </a:pPr>
             <a:r>
@@ -19329,6 +19463,13 @@
           </a:solidFill>
           <a:ln/>
         </p:spPr>
+        <p:txBody>
+          <a:bodyPr/>
+          <a:lstStyle/>
+          <a:p>
+            <a:endParaRPr lang="ko-KR" altLang="en-US"/>
+          </a:p>
+        </p:txBody>
       </p:sp>
       <p:sp>
         <p:nvSpPr>
@@ -19353,11 +19494,11 @@
           </a:bodyPr>
           <a:lstStyle/>
           <a:p>
-            <a:pPr indent="0" marL="0">
+            <a:pPr marL="0" indent="0">
               <a:buNone/>
             </a:pPr>
             <a:r>
-              <a:rPr lang="en-US" sz="2800" b="1" spc="-30" kern="0" dirty="0">
+              <a:rPr lang="en-US" sz="2800" b="1" kern="0" spc="-30" dirty="0">
                 <a:solidFill>
                   <a:srgbClr val="1A1F36"/>
                 </a:solidFill>
@@ -19392,7 +19533,7 @@
           <a:bodyPr wrap="square" rtlCol="0" anchor="ctr"/>
           <a:lstStyle/>
           <a:p>
-            <a:pPr algn="r" indent="0" marL="0">
+            <a:pPr marL="0" indent="0" algn="r">
               <a:buNone/>
             </a:pPr>
             <a:r>
@@ -19426,16 +19567,34 @@
         </p:nvGraphicFramePr>
         <p:xfrm>
           <a:off x="548640" y="1645920"/>
-          <a:ext cx="11091672" cy="914400"/>
+          <a:ext cx="11091672" cy="1473200"/>
         </p:xfrm>
         <a:graphic>
           <a:graphicData uri="http://schemas.openxmlformats.org/drawingml/2006/table">
             <a:tbl>
               <a:tblPr/>
               <a:tblGrid>
-                <a:gridCol w="3697224"/>
-                <a:gridCol w="3697224"/>
-                <a:gridCol w="3697224"/>
+                <a:gridCol w="3697224">
+                  <a:extLst>
+                    <a:ext uri="{9D8B030D-6E8A-4147-A177-3AD203B41FA5}">
+                      <a16:colId xmlns:a16="http://schemas.microsoft.com/office/drawing/2014/main" val="20000"/>
+                    </a:ext>
+                  </a:extLst>
+                </a:gridCol>
+                <a:gridCol w="3697224">
+                  <a:extLst>
+                    <a:ext uri="{9D8B030D-6E8A-4147-A177-3AD203B41FA5}">
+                      <a16:colId xmlns:a16="http://schemas.microsoft.com/office/drawing/2014/main" val="20001"/>
+                    </a:ext>
+                  </a:extLst>
+                </a:gridCol>
+                <a:gridCol w="3697224">
+                  <a:extLst>
+                    <a:ext uri="{9D8B030D-6E8A-4147-A177-3AD203B41FA5}">
+                      <a16:colId xmlns:a16="http://schemas.microsoft.com/office/drawing/2014/main" val="20002"/>
+                    </a:ext>
+                  </a:extLst>
+                </a:gridCol>
               </a:tblGrid>
               <a:tr h="0">
                 <a:tc>
@@ -19443,7 +19602,7 @@
                     <a:bodyPr/>
                     <a:lstStyle/>
                     <a:p>
-                      <a:pPr algn="ctr" indent="0" marL="0">
+                      <a:pPr marL="0" indent="0" algn="ctr">
                         <a:buNone/>
                       </a:pPr>
                       <a:r>
@@ -19511,7 +19670,7 @@
                     <a:bodyPr/>
                     <a:lstStyle/>
                     <a:p>
-                      <a:pPr algn="ctr" indent="0" marL="0">
+                      <a:pPr marL="0" indent="0" algn="ctr">
                         <a:buNone/>
                       </a:pPr>
                       <a:r>
@@ -19579,7 +19738,7 @@
                     <a:bodyPr/>
                     <a:lstStyle/>
                     <a:p>
-                      <a:pPr algn="ctr" indent="0" marL="0">
+                      <a:pPr marL="0" indent="0" algn="ctr">
                         <a:buNone/>
                       </a:pPr>
                       <a:r>
@@ -19642,6 +19801,11 @@
                     </a:solidFill>
                   </a:tcPr>
                 </a:tc>
+                <a:extLst>
+                  <a:ext uri="{0D108BD9-81ED-4DB2-BD59-A6C34878D82A}">
+                    <a16:rowId xmlns:a16="http://schemas.microsoft.com/office/drawing/2014/main" val="10000"/>
+                  </a:ext>
+                </a:extLst>
               </a:tr>
               <a:tr h="0">
                 <a:tc>
@@ -19649,7 +19813,7 @@
                     <a:bodyPr/>
                     <a:lstStyle/>
                     <a:p>
-                      <a:pPr indent="0" marL="0">
+                      <a:pPr marL="0" indent="0">
                         <a:buNone/>
                       </a:pPr>
                       <a:r>
@@ -19714,7 +19878,7 @@
                     <a:bodyPr/>
                     <a:lstStyle/>
                     <a:p>
-                      <a:pPr indent="0" marL="0">
+                      <a:pPr marL="0" indent="0">
                         <a:buNone/>
                       </a:pPr>
                       <a:r>
@@ -19779,7 +19943,7 @@
                     <a:bodyPr/>
                     <a:lstStyle/>
                     <a:p>
-                      <a:pPr indent="0" marL="0">
+                      <a:pPr marL="0" indent="0">
                         <a:buNone/>
                       </a:pPr>
                       <a:r>
@@ -19839,6 +20003,11 @@
                     </a:lnB>
                   </a:tcPr>
                 </a:tc>
+                <a:extLst>
+                  <a:ext uri="{0D108BD9-81ED-4DB2-BD59-A6C34878D82A}">
+                    <a16:rowId xmlns:a16="http://schemas.microsoft.com/office/drawing/2014/main" val="10001"/>
+                  </a:ext>
+                </a:extLst>
               </a:tr>
               <a:tr h="0">
                 <a:tc>
@@ -19846,7 +20015,7 @@
                     <a:bodyPr/>
                     <a:lstStyle/>
                     <a:p>
-                      <a:pPr indent="0" marL="0">
+                      <a:pPr marL="0" indent="0">
                         <a:buNone/>
                       </a:pPr>
                       <a:r>
@@ -19914,7 +20083,7 @@
                     <a:bodyPr/>
                     <a:lstStyle/>
                     <a:p>
-                      <a:pPr indent="0" marL="0">
+                      <a:pPr marL="0" indent="0">
                         <a:buNone/>
                       </a:pPr>
                       <a:r>
@@ -19982,7 +20151,7 @@
                     <a:bodyPr/>
                     <a:lstStyle/>
                     <a:p>
-                      <a:pPr indent="0" marL="0">
+                      <a:pPr marL="0" indent="0">
                         <a:buNone/>
                       </a:pPr>
                       <a:r>
@@ -20045,6 +20214,11 @@
                     </a:solidFill>
                   </a:tcPr>
                 </a:tc>
+                <a:extLst>
+                  <a:ext uri="{0D108BD9-81ED-4DB2-BD59-A6C34878D82A}">
+                    <a16:rowId xmlns:a16="http://schemas.microsoft.com/office/drawing/2014/main" val="10002"/>
+                  </a:ext>
+                </a:extLst>
               </a:tr>
               <a:tr h="0">
                 <a:tc>
@@ -20052,7 +20226,7 @@
                     <a:bodyPr/>
                     <a:lstStyle/>
                     <a:p>
-                      <a:pPr indent="0" marL="0">
+                      <a:pPr marL="0" indent="0">
                         <a:buNone/>
                       </a:pPr>
                       <a:r>
@@ -20117,7 +20291,7 @@
                     <a:bodyPr/>
                     <a:lstStyle/>
                     <a:p>
-                      <a:pPr indent="0" marL="0">
+                      <a:pPr marL="0" indent="0">
                         <a:buNone/>
                       </a:pPr>
                       <a:r>
@@ -20182,7 +20356,7 @@
                     <a:bodyPr/>
                     <a:lstStyle/>
                     <a:p>
-                      <a:pPr indent="0" marL="0">
+                      <a:pPr marL="0" indent="0">
                         <a:buNone/>
                       </a:pPr>
                       <a:r>
@@ -20242,6 +20416,11 @@
                     </a:lnB>
                   </a:tcPr>
                 </a:tc>
+                <a:extLst>
+                  <a:ext uri="{0D108BD9-81ED-4DB2-BD59-A6C34878D82A}">
+                    <a16:rowId xmlns:a16="http://schemas.microsoft.com/office/drawing/2014/main" val="10003"/>
+                  </a:ext>
+                </a:extLst>
               </a:tr>
               <a:tr h="0">
                 <a:tc>
@@ -20249,7 +20428,7 @@
                     <a:bodyPr/>
                     <a:lstStyle/>
                     <a:p>
-                      <a:pPr indent="0" marL="0">
+                      <a:pPr marL="0" indent="0">
                         <a:buNone/>
                       </a:pPr>
                       <a:r>
@@ -20317,7 +20496,7 @@
                     <a:bodyPr/>
                     <a:lstStyle/>
                     <a:p>
-                      <a:pPr indent="0" marL="0">
+                      <a:pPr marL="0" indent="0">
                         <a:buNone/>
                       </a:pPr>
                       <a:r>
@@ -20385,7 +20564,7 @@
                     <a:bodyPr/>
                     <a:lstStyle/>
                     <a:p>
-                      <a:pPr indent="0" marL="0">
+                      <a:pPr marL="0" indent="0">
                         <a:buNone/>
                       </a:pPr>
                       <a:r>
@@ -20448,6 +20627,11 @@
                     </a:solidFill>
                   </a:tcPr>
                 </a:tc>
+                <a:extLst>
+                  <a:ext uri="{0D108BD9-81ED-4DB2-BD59-A6C34878D82A}">
+                    <a16:rowId xmlns:a16="http://schemas.microsoft.com/office/drawing/2014/main" val="10004"/>
+                  </a:ext>
+                </a:extLst>
               </a:tr>
             </a:tbl>
           </a:graphicData>
@@ -20474,7 +20658,7 @@
           <a:bodyPr wrap="square" rtlCol="0" anchor="ctr"/>
           <a:lstStyle/>
           <a:p>
-            <a:pPr indent="0" marL="0">
+            <a:pPr marL="0" indent="0">
               <a:lnSpc>
                 <a:spcPct val="150000"/>
               </a:lnSpc>
@@ -20494,7 +20678,7 @@
             <a:endParaRPr lang="en-US" sz="1500" dirty="0"/>
           </a:p>
           <a:p>
-            <a:pPr indent="0" marL="0">
+            <a:pPr marL="0" indent="0">
               <a:lnSpc>
                 <a:spcPct val="150000"/>
               </a:lnSpc>
@@ -20559,6 +20743,13 @@
           </a:solidFill>
           <a:ln/>
         </p:spPr>
+        <p:txBody>
+          <a:bodyPr/>
+          <a:lstStyle/>
+          <a:p>
+            <a:endParaRPr lang="ko-KR" altLang="en-US"/>
+          </a:p>
+        </p:txBody>
       </p:sp>
       <p:sp>
         <p:nvSpPr>
@@ -20583,11 +20774,11 @@
           </a:bodyPr>
           <a:lstStyle/>
           <a:p>
-            <a:pPr indent="0" marL="0">
+            <a:pPr marL="0" indent="0">
               <a:buNone/>
             </a:pPr>
             <a:r>
-              <a:rPr lang="en-US" sz="2800" b="1" spc="-30" kern="0" dirty="0">
+              <a:rPr lang="en-US" sz="2800" b="1" kern="0" spc="-30" dirty="0">
                 <a:solidFill>
                   <a:srgbClr val="1A1F36"/>
                 </a:solidFill>
@@ -20622,7 +20813,7 @@
           <a:bodyPr wrap="square" rtlCol="0" anchor="ctr"/>
           <a:lstStyle/>
           <a:p>
-            <a:pPr indent="0" marL="0">
+            <a:pPr marL="0" indent="0">
               <a:buNone/>
             </a:pPr>
             <a:r>
@@ -20661,7 +20852,7 @@
           <a:bodyPr wrap="square" rtlCol="0" anchor="ctr"/>
           <a:lstStyle/>
           <a:p>
-            <a:pPr algn="r" indent="0" marL="0">
+            <a:pPr marL="0" indent="0" algn="r">
               <a:buNone/>
             </a:pPr>
             <a:r>
@@ -20700,13 +20891,20 @@
           </a:solidFill>
           <a:ln/>
           <a:effectLst>
-            <a:outerShdw sx="100000" sy="100000" kx="0" ky="0" algn="bl" rotWithShape="0" blurRad="101600" dist="38100" dir="16200000">
+            <a:outerShdw blurRad="101600" dist="38100" dir="16200000" algn="bl" rotWithShape="0">
               <a:srgbClr val="000000">
                 <a:alpha val="10000"/>
               </a:srgbClr>
             </a:outerShdw>
           </a:effectLst>
         </p:spPr>
+        <p:txBody>
+          <a:bodyPr/>
+          <a:lstStyle/>
+          <a:p>
+            <a:endParaRPr lang="ko-KR" altLang="en-US"/>
+          </a:p>
+        </p:txBody>
       </p:sp>
       <p:sp>
         <p:nvSpPr>
@@ -20727,6 +20925,13 @@
           </a:solidFill>
           <a:ln/>
         </p:spPr>
+        <p:txBody>
+          <a:bodyPr/>
+          <a:lstStyle/>
+          <a:p>
+            <a:endParaRPr lang="ko-KR" altLang="en-US"/>
+          </a:p>
+        </p:txBody>
       </p:sp>
       <p:sp>
         <p:nvSpPr>
@@ -20749,7 +20954,7 @@
           <a:bodyPr wrap="square" rtlCol="0" anchor="t"/>
           <a:lstStyle/>
           <a:p>
-            <a:pPr indent="0" marL="0">
+            <a:pPr marL="0" indent="0">
               <a:lnSpc>
                 <a:spcPct val="130000"/>
               </a:lnSpc>
@@ -20766,18 +20971,25 @@
               </a:rPr>
               <a:t>[삼성전기 009150]  2026-03-21</a:t>
             </a:r>
-            <a:pPr indent="0" marL="0">
+          </a:p>
+          <a:p>
+            <a:pPr marL="0" indent="0">
               <a:lnSpc>
                 <a:spcPct val="130000"/>
               </a:lnSpc>
               <a:buNone/>
             </a:pPr>
-            <a:pPr indent="0" marL="0">
-              <a:lnSpc>
-                <a:spcPct val="130000"/>
-              </a:lnSpc>
-              <a:buNone/>
-            </a:pPr>
+            <a:r>
+              <a:rPr lang="en-US" sz="1400" dirty="0" err="1">
+                <a:solidFill>
+                  <a:srgbClr val="4A5568"/>
+                </a:solidFill>
+                <a:latin typeface="Pretendard" pitchFamily="34" charset="0"/>
+                <a:ea typeface="Pretendard" pitchFamily="34" charset="-122"/>
+                <a:cs typeface="Pretendard" pitchFamily="34" charset="-120"/>
+              </a:rPr>
+              <a:t>패턴</a:t>
+            </a:r>
             <a:r>
               <a:rPr lang="en-US" sz="1400" dirty="0">
                 <a:solidFill>
@@ -20787,14 +20999,27 @@
                 <a:ea typeface="Pretendard" pitchFamily="34" charset="-122"/>
                 <a:cs typeface="Pretendard" pitchFamily="34" charset="-120"/>
               </a:rPr>
-              <a:t>패턴: VCP (3차 수축, 품질 82/100)</a:t>
+              <a:t>: VCP (3차 수축, 품질 82/100)</a:t>
             </a:r>
-            <a:pPr indent="0" marL="0">
+          </a:p>
+          <a:p>
+            <a:pPr marL="0" indent="0">
               <a:lnSpc>
                 <a:spcPct val="130000"/>
               </a:lnSpc>
               <a:buNone/>
             </a:pPr>
+            <a:r>
+              <a:rPr lang="en-US" sz="1400" dirty="0" err="1">
+                <a:solidFill>
+                  <a:srgbClr val="4A5568"/>
+                </a:solidFill>
+                <a:latin typeface="Pretendard" pitchFamily="34" charset="0"/>
+                <a:ea typeface="Pretendard" pitchFamily="34" charset="-122"/>
+                <a:cs typeface="Pretendard" pitchFamily="34" charset="-120"/>
+              </a:rPr>
+              <a:t>수축</a:t>
+            </a:r>
             <a:r>
               <a:rPr lang="en-US" sz="1400" dirty="0">
                 <a:solidFill>
@@ -20804,14 +21029,27 @@
                 <a:ea typeface="Pretendard" pitchFamily="34" charset="-122"/>
                 <a:cs typeface="Pretendard" pitchFamily="34" charset="-120"/>
               </a:rPr>
-              <a:t>수축 깊이: 18% → 9% → 4%  |  볼륨 위축: -62%</a:t>
+              <a:t> 깊이: 18% → 9% → 4%  |  볼륨 위축: -62%</a:t>
             </a:r>
-            <a:pPr indent="0" marL="0">
+          </a:p>
+          <a:p>
+            <a:pPr marL="0" indent="0">
               <a:lnSpc>
                 <a:spcPct val="130000"/>
               </a:lnSpc>
               <a:buNone/>
             </a:pPr>
+            <a:r>
+              <a:rPr lang="en-US" sz="1400" dirty="0" err="1">
+                <a:solidFill>
+                  <a:srgbClr val="4A5568"/>
+                </a:solidFill>
+                <a:latin typeface="Pretendard" pitchFamily="34" charset="0"/>
+                <a:ea typeface="Pretendard" pitchFamily="34" charset="-122"/>
+                <a:cs typeface="Pretendard" pitchFamily="34" charset="-120"/>
+              </a:rPr>
+              <a:t>피봇</a:t>
+            </a:r>
             <a:r>
               <a:rPr lang="en-US" sz="1400" dirty="0">
                 <a:solidFill>
@@ -20821,20 +21059,27 @@
                 <a:ea typeface="Pretendard" pitchFamily="34" charset="-122"/>
                 <a:cs typeface="Pretendard" pitchFamily="34" charset="-120"/>
               </a:rPr>
-              <a:t>피봇 가격: 142,500원</a:t>
+              <a:t> 가격: 142,500원</a:t>
             </a:r>
-            <a:pPr indent="0" marL="0">
+          </a:p>
+          <a:p>
+            <a:pPr marL="0" indent="0">
               <a:lnSpc>
                 <a:spcPct val="130000"/>
               </a:lnSpc>
               <a:buNone/>
             </a:pPr>
-            <a:pPr indent="0" marL="0">
-              <a:lnSpc>
-                <a:spcPct val="130000"/>
-              </a:lnSpc>
-              <a:buNone/>
-            </a:pPr>
+            <a:r>
+              <a:rPr lang="en-US" sz="1500" b="1" dirty="0" err="1">
+                <a:solidFill>
+                  <a:srgbClr val="4A7BF7"/>
+                </a:solidFill>
+                <a:latin typeface="Pretendard" pitchFamily="34" charset="0"/>
+                <a:ea typeface="Pretendard" pitchFamily="34" charset="-122"/>
+                <a:cs typeface="Pretendard" pitchFamily="34" charset="-120"/>
+              </a:rPr>
+              <a:t>성공</a:t>
+            </a:r>
             <a:r>
               <a:rPr lang="en-US" sz="1500" b="1" dirty="0">
                 <a:solidFill>
@@ -20844,14 +21089,8 @@
                 <a:ea typeface="Pretendard" pitchFamily="34" charset="-122"/>
                 <a:cs typeface="Pretendard" pitchFamily="34" charset="-120"/>
               </a:rPr>
-              <a:t>성공 확률:  P(+30%/10일)=19%  |  P(+20%/10일)=34%</a:t>
+              <a:t> 확률:  P(+30%/10일)=19%  |  P(+20%/10일)=34%</a:t>
             </a:r>
-            <a:pPr indent="0" marL="0">
-              <a:lnSpc>
-                <a:spcPct val="130000"/>
-              </a:lnSpc>
-              <a:buNone/>
-            </a:pPr>
             <a:r>
               <a:rPr lang="en-US" sz="1400" dirty="0">
                 <a:solidFill>
@@ -20863,12 +21102,25 @@
               </a:rPr>
               <a:t>E[최대이익]: +14.8%   |   E[최대손실]: -5.3%</a:t>
             </a:r>
-            <a:pPr indent="0" marL="0">
+          </a:p>
+          <a:p>
+            <a:pPr marL="0" indent="0">
               <a:lnSpc>
                 <a:spcPct val="130000"/>
               </a:lnSpc>
               <a:buNone/>
             </a:pPr>
+            <a:r>
+              <a:rPr lang="en-US" sz="1400" b="1" dirty="0" err="1">
+                <a:solidFill>
+                  <a:srgbClr val="27AE60"/>
+                </a:solidFill>
+                <a:latin typeface="Pretendard" pitchFamily="34" charset="0"/>
+                <a:ea typeface="Pretendard" pitchFamily="34" charset="-122"/>
+                <a:cs typeface="Pretendard" pitchFamily="34" charset="-120"/>
+              </a:rPr>
+              <a:t>시장</a:t>
+            </a:r>
             <a:r>
               <a:rPr lang="en-US" sz="1400" b="1" dirty="0">
                 <a:solidFill>
@@ -20878,20 +21130,27 @@
                 <a:ea typeface="Pretendard" pitchFamily="34" charset="-122"/>
                 <a:cs typeface="Pretendard" pitchFamily="34" charset="-120"/>
               </a:rPr>
-              <a:t>시장: 강세확산 → 보정 확률: P(+30%)=24%</a:t>
+              <a:t>: 강세확산 → 보정 확률: P(+30%)=24%</a:t>
             </a:r>
-            <a:pPr indent="0" marL="0">
+          </a:p>
+          <a:p>
+            <a:pPr marL="0" indent="0">
               <a:lnSpc>
                 <a:spcPct val="130000"/>
               </a:lnSpc>
               <a:buNone/>
             </a:pPr>
-            <a:pPr indent="0" marL="0">
-              <a:lnSpc>
-                <a:spcPct val="130000"/>
-              </a:lnSpc>
-              <a:buNone/>
-            </a:pPr>
+            <a:r>
+              <a:rPr lang="en-US" sz="1300" dirty="0" err="1">
+                <a:solidFill>
+                  <a:srgbClr val="718096"/>
+                </a:solidFill>
+                <a:latin typeface="Pretendard" pitchFamily="34" charset="0"/>
+                <a:ea typeface="Pretendard" pitchFamily="34" charset="-122"/>
+                <a:cs typeface="Pretendard" pitchFamily="34" charset="-120"/>
+              </a:rPr>
+              <a:t>유사</a:t>
+            </a:r>
             <a:r>
               <a:rPr lang="en-US" sz="1300" dirty="0">
                 <a:solidFill>
@@ -20901,15 +21160,11 @@
                 <a:ea typeface="Pretendard" pitchFamily="34" charset="-122"/>
                 <a:cs typeface="Pretendard" pitchFamily="34" charset="-120"/>
               </a:rPr>
-              <a:t>유사 사례:  한미반도체 25.07 [성공+42%]  |  에코프로 25.03 [실패-8%]  |  리노공업 25.11 [성공+35%]</a:t>
+              <a:t> 사례:  한미반도체 25.07 [성공+42%]  |  에코프로 25.03 [실패-8%]  |  리노공업 25.11 [성공+35%]</a:t>
             </a:r>
-            <a:pPr indent="0" marL="0">
-              <a:lnSpc>
-                <a:spcPct val="130000"/>
-              </a:lnSpc>
-              <a:buNone/>
-            </a:pPr>
-            <a:pPr indent="0" marL="0">
+          </a:p>
+          <a:p>
+            <a:pPr marL="0" indent="0">
               <a:lnSpc>
                 <a:spcPct val="130000"/>
               </a:lnSpc>
@@ -20974,6 +21229,13 @@
           </a:solidFill>
           <a:ln/>
         </p:spPr>
+        <p:txBody>
+          <a:bodyPr/>
+          <a:lstStyle/>
+          <a:p>
+            <a:endParaRPr lang="ko-KR" altLang="en-US"/>
+          </a:p>
+        </p:txBody>
       </p:sp>
       <p:sp>
         <p:nvSpPr>
@@ -20996,7 +21258,7 @@
           <a:bodyPr wrap="square" rtlCol="0" anchor="ctr"/>
           <a:lstStyle/>
           <a:p>
-            <a:pPr algn="ctr" indent="0" marL="0">
+            <a:pPr marL="0" indent="0" algn="ctr">
               <a:buNone/>
             </a:pPr>
             <a:r>
@@ -21035,7 +21297,7 @@
           <a:bodyPr wrap="square" rtlCol="0" anchor="ctr"/>
           <a:lstStyle/>
           <a:p>
-            <a:pPr indent="0" marL="0">
+            <a:pPr marL="0" indent="0">
               <a:lnSpc>
                 <a:spcPct val="115000"/>
               </a:lnSpc>
@@ -21055,7 +21317,7 @@
             <a:endParaRPr lang="en-US" sz="3400" dirty="0"/>
           </a:p>
           <a:p>
-            <a:pPr indent="0" marL="0">
+            <a:pPr marL="0" indent="0">
               <a:lnSpc>
                 <a:spcPct val="115000"/>
               </a:lnSpc>
@@ -21097,7 +21359,7 @@
           <a:bodyPr wrap="square" rtlCol="0" anchor="ctr"/>
           <a:lstStyle/>
           <a:p>
-            <a:pPr indent="0" marL="0">
+            <a:pPr marL="0" indent="0">
               <a:buNone/>
             </a:pPr>
             <a:r>
@@ -21159,6 +21421,13 @@
           </a:solidFill>
           <a:ln/>
         </p:spPr>
+        <p:txBody>
+          <a:bodyPr/>
+          <a:lstStyle/>
+          <a:p>
+            <a:endParaRPr lang="ko-KR" altLang="en-US"/>
+          </a:p>
+        </p:txBody>
       </p:sp>
       <p:sp>
         <p:nvSpPr>
@@ -21183,11 +21452,11 @@
           </a:bodyPr>
           <a:lstStyle/>
           <a:p>
-            <a:pPr indent="0" marL="0">
+            <a:pPr marL="0" indent="0">
               <a:buNone/>
             </a:pPr>
             <a:r>
-              <a:rPr lang="en-US" sz="2800" b="1" spc="-30" kern="0" dirty="0">
+              <a:rPr lang="en-US" sz="2800" b="1" kern="0" spc="-30" dirty="0">
                 <a:solidFill>
                   <a:srgbClr val="1A1F36"/>
                 </a:solidFill>
@@ -21222,7 +21491,7 @@
           <a:bodyPr wrap="square" rtlCol="0" anchor="ctr"/>
           <a:lstStyle/>
           <a:p>
-            <a:pPr algn="r" indent="0" marL="0">
+            <a:pPr marL="0" indent="0" algn="r">
               <a:buNone/>
             </a:pPr>
             <a:r>
@@ -21487,6 +21756,13 @@
           </a:solidFill>
           <a:ln/>
         </p:spPr>
+        <p:txBody>
+          <a:bodyPr/>
+          <a:lstStyle/>
+          <a:p>
+            <a:endParaRPr lang="ko-KR" altLang="en-US"/>
+          </a:p>
+        </p:txBody>
       </p:sp>
       <p:sp>
         <p:nvSpPr>
@@ -21511,11 +21787,11 @@
           </a:bodyPr>
           <a:lstStyle/>
           <a:p>
-            <a:pPr indent="0" marL="0">
+            <a:pPr marL="0" indent="0">
               <a:buNone/>
             </a:pPr>
             <a:r>
-              <a:rPr lang="en-US" sz="2800" b="1" spc="-30" kern="0" dirty="0">
+              <a:rPr lang="en-US" sz="2800" b="1" kern="0" spc="-30" dirty="0">
                 <a:solidFill>
                   <a:srgbClr val="1A1F36"/>
                 </a:solidFill>
@@ -21550,7 +21826,7 @@
           <a:bodyPr wrap="square" rtlCol="0" anchor="ctr"/>
           <a:lstStyle/>
           <a:p>
-            <a:pPr algn="r" indent="0" marL="0">
+            <a:pPr marL="0" indent="0" algn="r">
               <a:buNone/>
             </a:pPr>
             <a:r>
@@ -21589,13 +21865,20 @@
           </a:solidFill>
           <a:ln/>
           <a:effectLst>
-            <a:outerShdw sx="100000" sy="100000" kx="0" ky="0" algn="bl" rotWithShape="0" blurRad="76200" dist="25400" dir="16200000">
+            <a:outerShdw blurRad="76200" dist="25400" dir="16200000" algn="bl" rotWithShape="0">
               <a:srgbClr val="000000">
                 <a:alpha val="8000"/>
               </a:srgbClr>
             </a:outerShdw>
           </a:effectLst>
         </p:spPr>
+        <p:txBody>
+          <a:bodyPr/>
+          <a:lstStyle/>
+          <a:p>
+            <a:endParaRPr lang="ko-KR" altLang="en-US"/>
+          </a:p>
+        </p:txBody>
       </p:sp>
       <p:sp>
         <p:nvSpPr>
@@ -21616,6 +21899,13 @@
           </a:solidFill>
           <a:ln/>
         </p:spPr>
+        <p:txBody>
+          <a:bodyPr/>
+          <a:lstStyle/>
+          <a:p>
+            <a:endParaRPr lang="ko-KR" altLang="en-US"/>
+          </a:p>
+        </p:txBody>
       </p:sp>
       <p:sp>
         <p:nvSpPr>
@@ -21640,7 +21930,7 @@
           </a:bodyPr>
           <a:lstStyle/>
           <a:p>
-            <a:pPr indent="0" marL="0">
+            <a:pPr marL="0" indent="0">
               <a:buNone/>
             </a:pPr>
             <a:r>
@@ -21681,7 +21971,7 @@
           </a:bodyPr>
           <a:lstStyle/>
           <a:p>
-            <a:pPr indent="0" marL="0">
+            <a:pPr marL="0" indent="0">
               <a:lnSpc>
                 <a:spcPct val="135000"/>
               </a:lnSpc>
@@ -21701,7 +21991,7 @@
             <a:endParaRPr lang="en-US" sz="1200" dirty="0"/>
           </a:p>
           <a:p>
-            <a:pPr indent="0" marL="0">
+            <a:pPr marL="0" indent="0">
               <a:lnSpc>
                 <a:spcPct val="135000"/>
               </a:lnSpc>
@@ -21721,7 +22011,7 @@
             <a:endParaRPr lang="en-US" sz="1200" dirty="0"/>
           </a:p>
           <a:p>
-            <a:pPr indent="0" marL="0">
+            <a:pPr marL="0" indent="0">
               <a:lnSpc>
                 <a:spcPct val="135000"/>
               </a:lnSpc>
@@ -21763,13 +22053,20 @@
           </a:solidFill>
           <a:ln/>
           <a:effectLst>
-            <a:outerShdw sx="100000" sy="100000" kx="0" ky="0" algn="bl" rotWithShape="0" blurRad="76200" dist="25400" dir="16200000">
+            <a:outerShdw blurRad="76200" dist="25400" dir="16200000" algn="bl" rotWithShape="0">
               <a:srgbClr val="000000">
                 <a:alpha val="8000"/>
               </a:srgbClr>
             </a:outerShdw>
           </a:effectLst>
         </p:spPr>
+        <p:txBody>
+          <a:bodyPr/>
+          <a:lstStyle/>
+          <a:p>
+            <a:endParaRPr lang="ko-KR" altLang="en-US"/>
+          </a:p>
+        </p:txBody>
       </p:sp>
       <p:sp>
         <p:nvSpPr>
@@ -21790,6 +22087,13 @@
           </a:solidFill>
           <a:ln/>
         </p:spPr>
+        <p:txBody>
+          <a:bodyPr/>
+          <a:lstStyle/>
+          <a:p>
+            <a:endParaRPr lang="ko-KR" altLang="en-US"/>
+          </a:p>
+        </p:txBody>
       </p:sp>
       <p:sp>
         <p:nvSpPr>
@@ -21814,7 +22118,7 @@
           </a:bodyPr>
           <a:lstStyle/>
           <a:p>
-            <a:pPr indent="0" marL="0">
+            <a:pPr marL="0" indent="0">
               <a:buNone/>
             </a:pPr>
             <a:r>
@@ -21855,7 +22159,7 @@
           </a:bodyPr>
           <a:lstStyle/>
           <a:p>
-            <a:pPr indent="0" marL="0">
+            <a:pPr marL="0" indent="0">
               <a:lnSpc>
                 <a:spcPct val="135000"/>
               </a:lnSpc>
@@ -21875,7 +22179,7 @@
             <a:endParaRPr lang="en-US" sz="1200" dirty="0"/>
           </a:p>
           <a:p>
-            <a:pPr indent="0" marL="0">
+            <a:pPr marL="0" indent="0">
               <a:lnSpc>
                 <a:spcPct val="135000"/>
               </a:lnSpc>
@@ -21895,7 +22199,7 @@
             <a:endParaRPr lang="en-US" sz="1200" dirty="0"/>
           </a:p>
           <a:p>
-            <a:pPr indent="0" marL="0">
+            <a:pPr marL="0" indent="0">
               <a:lnSpc>
                 <a:spcPct val="135000"/>
               </a:lnSpc>
@@ -21937,13 +22241,20 @@
           </a:solidFill>
           <a:ln/>
           <a:effectLst>
-            <a:outerShdw sx="100000" sy="100000" kx="0" ky="0" algn="bl" rotWithShape="0" blurRad="76200" dist="25400" dir="16200000">
+            <a:outerShdw blurRad="76200" dist="25400" dir="16200000" algn="bl" rotWithShape="0">
               <a:srgbClr val="000000">
                 <a:alpha val="8000"/>
               </a:srgbClr>
             </a:outerShdw>
           </a:effectLst>
         </p:spPr>
+        <p:txBody>
+          <a:bodyPr/>
+          <a:lstStyle/>
+          <a:p>
+            <a:endParaRPr lang="ko-KR" altLang="en-US"/>
+          </a:p>
+        </p:txBody>
       </p:sp>
       <p:sp>
         <p:nvSpPr>
@@ -21964,6 +22275,13 @@
           </a:solidFill>
           <a:ln/>
         </p:spPr>
+        <p:txBody>
+          <a:bodyPr/>
+          <a:lstStyle/>
+          <a:p>
+            <a:endParaRPr lang="ko-KR" altLang="en-US"/>
+          </a:p>
+        </p:txBody>
       </p:sp>
       <p:sp>
         <p:nvSpPr>
@@ -21988,7 +22306,7 @@
           </a:bodyPr>
           <a:lstStyle/>
           <a:p>
-            <a:pPr indent="0" marL="0">
+            <a:pPr marL="0" indent="0">
               <a:buNone/>
             </a:pPr>
             <a:r>
@@ -22029,7 +22347,7 @@
           </a:bodyPr>
           <a:lstStyle/>
           <a:p>
-            <a:pPr indent="0" marL="0">
+            <a:pPr marL="0" indent="0">
               <a:lnSpc>
                 <a:spcPct val="135000"/>
               </a:lnSpc>
@@ -22049,7 +22367,7 @@
             <a:endParaRPr lang="en-US" sz="1200" dirty="0"/>
           </a:p>
           <a:p>
-            <a:pPr indent="0" marL="0">
+            <a:pPr marL="0" indent="0">
               <a:lnSpc>
                 <a:spcPct val="135000"/>
               </a:lnSpc>
@@ -22069,7 +22387,7 @@
             <a:endParaRPr lang="en-US" sz="1200" dirty="0"/>
           </a:p>
           <a:p>
-            <a:pPr indent="0" marL="0">
+            <a:pPr marL="0" indent="0">
               <a:lnSpc>
                 <a:spcPct val="135000"/>
               </a:lnSpc>
@@ -22111,13 +22429,20 @@
           </a:solidFill>
           <a:ln/>
           <a:effectLst>
-            <a:outerShdw sx="100000" sy="100000" kx="0" ky="0" algn="bl" rotWithShape="0" blurRad="76200" dist="25400" dir="16200000">
+            <a:outerShdw blurRad="76200" dist="25400" dir="16200000" algn="bl" rotWithShape="0">
               <a:srgbClr val="000000">
                 <a:alpha val="8000"/>
               </a:srgbClr>
             </a:outerShdw>
           </a:effectLst>
         </p:spPr>
+        <p:txBody>
+          <a:bodyPr/>
+          <a:lstStyle/>
+          <a:p>
+            <a:endParaRPr lang="ko-KR" altLang="en-US"/>
+          </a:p>
+        </p:txBody>
       </p:sp>
       <p:sp>
         <p:nvSpPr>
@@ -22138,6 +22463,13 @@
           </a:solidFill>
           <a:ln/>
         </p:spPr>
+        <p:txBody>
+          <a:bodyPr/>
+          <a:lstStyle/>
+          <a:p>
+            <a:endParaRPr lang="ko-KR" altLang="en-US"/>
+          </a:p>
+        </p:txBody>
       </p:sp>
       <p:sp>
         <p:nvSpPr>
@@ -22162,7 +22494,7 @@
           </a:bodyPr>
           <a:lstStyle/>
           <a:p>
-            <a:pPr indent="0" marL="0">
+            <a:pPr marL="0" indent="0">
               <a:buNone/>
             </a:pPr>
             <a:r>
@@ -22203,7 +22535,7 @@
           </a:bodyPr>
           <a:lstStyle/>
           <a:p>
-            <a:pPr indent="0" marL="0">
+            <a:pPr marL="0" indent="0">
               <a:lnSpc>
                 <a:spcPct val="135000"/>
               </a:lnSpc>
@@ -22223,7 +22555,7 @@
             <a:endParaRPr lang="en-US" sz="1200" dirty="0"/>
           </a:p>
           <a:p>
-            <a:pPr indent="0" marL="0">
+            <a:pPr marL="0" indent="0">
               <a:lnSpc>
                 <a:spcPct val="135000"/>
               </a:lnSpc>
@@ -22243,7 +22575,7 @@
             <a:endParaRPr lang="en-US" sz="1200" dirty="0"/>
           </a:p>
           <a:p>
-            <a:pPr indent="0" marL="0">
+            <a:pPr marL="0" indent="0">
               <a:lnSpc>
                 <a:spcPct val="135000"/>
               </a:lnSpc>
@@ -22308,6 +22640,13 @@
           </a:solidFill>
           <a:ln/>
         </p:spPr>
+        <p:txBody>
+          <a:bodyPr/>
+          <a:lstStyle/>
+          <a:p>
+            <a:endParaRPr lang="ko-KR" altLang="en-US"/>
+          </a:p>
+        </p:txBody>
       </p:sp>
       <p:sp>
         <p:nvSpPr>
@@ -22332,11 +22671,11 @@
           </a:bodyPr>
           <a:lstStyle/>
           <a:p>
-            <a:pPr indent="0" marL="0">
+            <a:pPr marL="0" indent="0">
               <a:buNone/>
             </a:pPr>
             <a:r>
-              <a:rPr lang="en-US" sz="2800" b="1" spc="-30" kern="0" dirty="0">
+              <a:rPr lang="en-US" sz="2800" b="1" kern="0" spc="-30" dirty="0">
                 <a:solidFill>
                   <a:srgbClr val="1A1F36"/>
                 </a:solidFill>
@@ -22371,7 +22710,7 @@
           <a:bodyPr wrap="square" rtlCol="0" anchor="ctr"/>
           <a:lstStyle/>
           <a:p>
-            <a:pPr algn="r" indent="0" marL="0">
+            <a:pPr marL="0" indent="0" algn="r">
               <a:buNone/>
             </a:pPr>
             <a:r>
@@ -22673,6 +23012,13 @@
           </a:solidFill>
           <a:ln/>
         </p:spPr>
+        <p:txBody>
+          <a:bodyPr/>
+          <a:lstStyle/>
+          <a:p>
+            <a:endParaRPr lang="ko-KR" altLang="en-US"/>
+          </a:p>
+        </p:txBody>
       </p:sp>
       <p:sp>
         <p:nvSpPr>
@@ -22697,11 +23043,11 @@
           </a:bodyPr>
           <a:lstStyle/>
           <a:p>
-            <a:pPr indent="0" marL="0">
+            <a:pPr marL="0" indent="0">
               <a:buNone/>
             </a:pPr>
             <a:r>
-              <a:rPr lang="en-US" sz="2800" b="1" spc="-30" kern="0" dirty="0">
+              <a:rPr lang="en-US" sz="2800" b="1" kern="0" spc="-30" dirty="0">
                 <a:solidFill>
                   <a:srgbClr val="1A1F36"/>
                 </a:solidFill>
@@ -22736,7 +23082,7 @@
           <a:bodyPr wrap="square" rtlCol="0" anchor="ctr"/>
           <a:lstStyle/>
           <a:p>
-            <a:pPr algn="r" indent="0" marL="0">
+            <a:pPr marL="0" indent="0" algn="r">
               <a:buNone/>
             </a:pPr>
             <a:r>
@@ -22770,16 +23116,34 @@
         </p:nvGraphicFramePr>
         <p:xfrm>
           <a:off x="548640" y="1645920"/>
-          <a:ext cx="11091672" cy="914400"/>
+          <a:ext cx="11091672" cy="1178560"/>
         </p:xfrm>
         <a:graphic>
           <a:graphicData uri="http://schemas.openxmlformats.org/drawingml/2006/table">
             <a:tbl>
               <a:tblPr/>
               <a:tblGrid>
-                <a:gridCol w="3697224"/>
-                <a:gridCol w="3697224"/>
-                <a:gridCol w="3697224"/>
+                <a:gridCol w="3697224">
+                  <a:extLst>
+                    <a:ext uri="{9D8B030D-6E8A-4147-A177-3AD203B41FA5}">
+                      <a16:colId xmlns:a16="http://schemas.microsoft.com/office/drawing/2014/main" val="20000"/>
+                    </a:ext>
+                  </a:extLst>
+                </a:gridCol>
+                <a:gridCol w="3697224">
+                  <a:extLst>
+                    <a:ext uri="{9D8B030D-6E8A-4147-A177-3AD203B41FA5}">
+                      <a16:colId xmlns:a16="http://schemas.microsoft.com/office/drawing/2014/main" val="20001"/>
+                    </a:ext>
+                  </a:extLst>
+                </a:gridCol>
+                <a:gridCol w="3697224">
+                  <a:extLst>
+                    <a:ext uri="{9D8B030D-6E8A-4147-A177-3AD203B41FA5}">
+                      <a16:colId xmlns:a16="http://schemas.microsoft.com/office/drawing/2014/main" val="20002"/>
+                    </a:ext>
+                  </a:extLst>
+                </a:gridCol>
               </a:tblGrid>
               <a:tr h="0">
                 <a:tc>
@@ -22787,7 +23151,7 @@
                     <a:bodyPr/>
                     <a:lstStyle/>
                     <a:p>
-                      <a:pPr algn="ctr" indent="0" marL="0">
+                      <a:pPr marL="0" indent="0" algn="ctr">
                         <a:buNone/>
                       </a:pPr>
                       <a:r>
@@ -22855,7 +23219,7 @@
                     <a:bodyPr/>
                     <a:lstStyle/>
                     <a:p>
-                      <a:pPr algn="ctr" indent="0" marL="0">
+                      <a:pPr marL="0" indent="0" algn="ctr">
                         <a:buNone/>
                       </a:pPr>
                       <a:r>
@@ -22923,7 +23287,7 @@
                     <a:bodyPr/>
                     <a:lstStyle/>
                     <a:p>
-                      <a:pPr algn="ctr" indent="0" marL="0">
+                      <a:pPr marL="0" indent="0" algn="ctr">
                         <a:buNone/>
                       </a:pPr>
                       <a:r>
@@ -22986,6 +23350,11 @@
                     </a:solidFill>
                   </a:tcPr>
                 </a:tc>
+                <a:extLst>
+                  <a:ext uri="{0D108BD9-81ED-4DB2-BD59-A6C34878D82A}">
+                    <a16:rowId xmlns:a16="http://schemas.microsoft.com/office/drawing/2014/main" val="10000"/>
+                  </a:ext>
+                </a:extLst>
               </a:tr>
               <a:tr h="0">
                 <a:tc>
@@ -22993,7 +23362,7 @@
                     <a:bodyPr/>
                     <a:lstStyle/>
                     <a:p>
-                      <a:pPr indent="0" marL="0">
+                      <a:pPr marL="0" indent="0">
                         <a:buNone/>
                       </a:pPr>
                       <a:r>
@@ -23058,7 +23427,7 @@
                     <a:bodyPr/>
                     <a:lstStyle/>
                     <a:p>
-                      <a:pPr indent="0" marL="0">
+                      <a:pPr marL="0" indent="0">
                         <a:buNone/>
                       </a:pPr>
                       <a:r>
@@ -23123,7 +23492,7 @@
                     <a:bodyPr/>
                     <a:lstStyle/>
                     <a:p>
-                      <a:pPr indent="0" marL="0">
+                      <a:pPr marL="0" indent="0">
                         <a:buNone/>
                       </a:pPr>
                       <a:r>
@@ -23183,6 +23552,11 @@
                     </a:lnB>
                   </a:tcPr>
                 </a:tc>
+                <a:extLst>
+                  <a:ext uri="{0D108BD9-81ED-4DB2-BD59-A6C34878D82A}">
+                    <a16:rowId xmlns:a16="http://schemas.microsoft.com/office/drawing/2014/main" val="10001"/>
+                  </a:ext>
+                </a:extLst>
               </a:tr>
               <a:tr h="0">
                 <a:tc>
@@ -23190,7 +23564,7 @@
                     <a:bodyPr/>
                     <a:lstStyle/>
                     <a:p>
-                      <a:pPr indent="0" marL="0">
+                      <a:pPr marL="0" indent="0">
                         <a:buNone/>
                       </a:pPr>
                       <a:r>
@@ -23258,7 +23632,7 @@
                     <a:bodyPr/>
                     <a:lstStyle/>
                     <a:p>
-                      <a:pPr indent="0" marL="0">
+                      <a:pPr marL="0" indent="0">
                         <a:buNone/>
                       </a:pPr>
                       <a:r>
@@ -23326,7 +23700,7 @@
                     <a:bodyPr/>
                     <a:lstStyle/>
                     <a:p>
-                      <a:pPr indent="0" marL="0">
+                      <a:pPr marL="0" indent="0">
                         <a:buNone/>
                       </a:pPr>
                       <a:r>
@@ -23389,6 +23763,11 @@
                     </a:solidFill>
                   </a:tcPr>
                 </a:tc>
+                <a:extLst>
+                  <a:ext uri="{0D108BD9-81ED-4DB2-BD59-A6C34878D82A}">
+                    <a16:rowId xmlns:a16="http://schemas.microsoft.com/office/drawing/2014/main" val="10002"/>
+                  </a:ext>
+                </a:extLst>
               </a:tr>
               <a:tr h="0">
                 <a:tc>
@@ -23396,7 +23775,7 @@
                     <a:bodyPr/>
                     <a:lstStyle/>
                     <a:p>
-                      <a:pPr indent="0" marL="0">
+                      <a:pPr marL="0" indent="0">
                         <a:buNone/>
                       </a:pPr>
                       <a:r>
@@ -23461,7 +23840,7 @@
                     <a:bodyPr/>
                     <a:lstStyle/>
                     <a:p>
-                      <a:pPr indent="0" marL="0">
+                      <a:pPr marL="0" indent="0">
                         <a:buNone/>
                       </a:pPr>
                       <a:r>
@@ -23526,7 +23905,7 @@
                     <a:bodyPr/>
                     <a:lstStyle/>
                     <a:p>
-                      <a:pPr indent="0" marL="0">
+                      <a:pPr marL="0" indent="0">
                         <a:buNone/>
                       </a:pPr>
                       <a:r>
@@ -23586,6 +23965,11 @@
                     </a:lnB>
                   </a:tcPr>
                 </a:tc>
+                <a:extLst>
+                  <a:ext uri="{0D108BD9-81ED-4DB2-BD59-A6C34878D82A}">
+                    <a16:rowId xmlns:a16="http://schemas.microsoft.com/office/drawing/2014/main" val="10003"/>
+                  </a:ext>
+                </a:extLst>
               </a:tr>
             </a:tbl>
           </a:graphicData>
@@ -23612,7 +23996,7 @@
           <a:bodyPr wrap="square" rtlCol="0" anchor="ctr"/>
           <a:lstStyle/>
           <a:p>
-            <a:pPr indent="0" marL="0">
+            <a:pPr marL="0" indent="0">
               <a:lnSpc>
                 <a:spcPct val="150000"/>
               </a:lnSpc>
@@ -23632,7 +24016,7 @@
             <a:endParaRPr lang="en-US" sz="1500" dirty="0"/>
           </a:p>
           <a:p>
-            <a:pPr indent="0" marL="0">
+            <a:pPr marL="0" indent="0">
               <a:lnSpc>
                 <a:spcPct val="150000"/>
               </a:lnSpc>
@@ -23697,6 +24081,13 @@
           </a:solidFill>
           <a:ln/>
         </p:spPr>
+        <p:txBody>
+          <a:bodyPr/>
+          <a:lstStyle/>
+          <a:p>
+            <a:endParaRPr lang="ko-KR" altLang="en-US"/>
+          </a:p>
+        </p:txBody>
       </p:sp>
       <p:sp>
         <p:nvSpPr>
@@ -23721,11 +24112,11 @@
           </a:bodyPr>
           <a:lstStyle/>
           <a:p>
-            <a:pPr indent="0" marL="0">
+            <a:pPr marL="0" indent="0">
               <a:buNone/>
             </a:pPr>
             <a:r>
-              <a:rPr lang="en-US" sz="2800" b="1" spc="-30" kern="0" dirty="0">
+              <a:rPr lang="en-US" sz="2800" b="1" kern="0" spc="-30" dirty="0">
                 <a:solidFill>
                   <a:srgbClr val="1A1F36"/>
                 </a:solidFill>
@@ -23760,7 +24151,7 @@
           <a:bodyPr wrap="square" rtlCol="0" anchor="ctr"/>
           <a:lstStyle/>
           <a:p>
-            <a:pPr algn="r" indent="0" marL="0">
+            <a:pPr marL="0" indent="0" algn="r">
               <a:buNone/>
             </a:pPr>
             <a:r>
@@ -23977,6 +24368,13 @@
           </a:solidFill>
           <a:ln/>
         </p:spPr>
+        <p:txBody>
+          <a:bodyPr/>
+          <a:lstStyle/>
+          <a:p>
+            <a:endParaRPr lang="ko-KR" altLang="en-US"/>
+          </a:p>
+        </p:txBody>
       </p:sp>
       <p:sp>
         <p:nvSpPr>
@@ -24001,11 +24399,11 @@
           </a:bodyPr>
           <a:lstStyle/>
           <a:p>
-            <a:pPr indent="0" marL="0">
+            <a:pPr marL="0" indent="0">
               <a:buNone/>
             </a:pPr>
             <a:r>
-              <a:rPr lang="en-US" sz="2800" b="1" spc="-30" kern="0" dirty="0">
+              <a:rPr lang="en-US" sz="2800" b="1" kern="0" spc="-30" dirty="0">
                 <a:solidFill>
                   <a:srgbClr val="1A1F36"/>
                 </a:solidFill>
@@ -24040,7 +24438,7 @@
           <a:bodyPr wrap="square" rtlCol="0" anchor="ctr"/>
           <a:lstStyle/>
           <a:p>
-            <a:pPr algn="r" indent="0" marL="0">
+            <a:pPr marL="0" indent="0" algn="r">
               <a:buNone/>
             </a:pPr>
             <a:r>
@@ -24074,16 +24472,34 @@
         </p:nvGraphicFramePr>
         <p:xfrm>
           <a:off x="548640" y="1645920"/>
-          <a:ext cx="11091672" cy="914400"/>
+          <a:ext cx="11091672" cy="2062480"/>
         </p:xfrm>
         <a:graphic>
           <a:graphicData uri="http://schemas.openxmlformats.org/drawingml/2006/table">
             <a:tbl>
               <a:tblPr/>
               <a:tblGrid>
-                <a:gridCol w="3697224"/>
-                <a:gridCol w="3697224"/>
-                <a:gridCol w="3697224"/>
+                <a:gridCol w="3697224">
+                  <a:extLst>
+                    <a:ext uri="{9D8B030D-6E8A-4147-A177-3AD203B41FA5}">
+                      <a16:colId xmlns:a16="http://schemas.microsoft.com/office/drawing/2014/main" val="20000"/>
+                    </a:ext>
+                  </a:extLst>
+                </a:gridCol>
+                <a:gridCol w="3697224">
+                  <a:extLst>
+                    <a:ext uri="{9D8B030D-6E8A-4147-A177-3AD203B41FA5}">
+                      <a16:colId xmlns:a16="http://schemas.microsoft.com/office/drawing/2014/main" val="20001"/>
+                    </a:ext>
+                  </a:extLst>
+                </a:gridCol>
+                <a:gridCol w="3697224">
+                  <a:extLst>
+                    <a:ext uri="{9D8B030D-6E8A-4147-A177-3AD203B41FA5}">
+                      <a16:colId xmlns:a16="http://schemas.microsoft.com/office/drawing/2014/main" val="20002"/>
+                    </a:ext>
+                  </a:extLst>
+                </a:gridCol>
               </a:tblGrid>
               <a:tr h="0">
                 <a:tc>
@@ -24091,7 +24507,7 @@
                     <a:bodyPr/>
                     <a:lstStyle/>
                     <a:p>
-                      <a:pPr algn="ctr" indent="0" marL="0">
+                      <a:pPr marL="0" indent="0" algn="ctr">
                         <a:buNone/>
                       </a:pPr>
                       <a:r>
@@ -24159,7 +24575,7 @@
                     <a:bodyPr/>
                     <a:lstStyle/>
                     <a:p>
-                      <a:pPr algn="ctr" indent="0" marL="0">
+                      <a:pPr marL="0" indent="0" algn="ctr">
                         <a:buNone/>
                       </a:pPr>
                       <a:r>
@@ -24227,7 +24643,7 @@
                     <a:bodyPr/>
                     <a:lstStyle/>
                     <a:p>
-                      <a:pPr algn="ctr" indent="0" marL="0">
+                      <a:pPr marL="0" indent="0" algn="ctr">
                         <a:buNone/>
                       </a:pPr>
                       <a:r>
@@ -24290,6 +24706,11 @@
                     </a:solidFill>
                   </a:tcPr>
                 </a:tc>
+                <a:extLst>
+                  <a:ext uri="{0D108BD9-81ED-4DB2-BD59-A6C34878D82A}">
+                    <a16:rowId xmlns:a16="http://schemas.microsoft.com/office/drawing/2014/main" val="10000"/>
+                  </a:ext>
+                </a:extLst>
               </a:tr>
               <a:tr h="0">
                 <a:tc>
@@ -24297,7 +24718,7 @@
                     <a:bodyPr/>
                     <a:lstStyle/>
                     <a:p>
-                      <a:pPr indent="0" marL="0">
+                      <a:pPr marL="0" indent="0">
                         <a:buNone/>
                       </a:pPr>
                       <a:r>
@@ -24362,7 +24783,7 @@
                     <a:bodyPr/>
                     <a:lstStyle/>
                     <a:p>
-                      <a:pPr indent="0" marL="0">
+                      <a:pPr marL="0" indent="0">
                         <a:buNone/>
                       </a:pPr>
                       <a:r>
@@ -24427,7 +24848,7 @@
                     <a:bodyPr/>
                     <a:lstStyle/>
                     <a:p>
-                      <a:pPr indent="0" marL="0">
+                      <a:pPr marL="0" indent="0">
                         <a:buNone/>
                       </a:pPr>
                       <a:r>
@@ -24487,6 +24908,11 @@
                     </a:lnB>
                   </a:tcPr>
                 </a:tc>
+                <a:extLst>
+                  <a:ext uri="{0D108BD9-81ED-4DB2-BD59-A6C34878D82A}">
+                    <a16:rowId xmlns:a16="http://schemas.microsoft.com/office/drawing/2014/main" val="10001"/>
+                  </a:ext>
+                </a:extLst>
               </a:tr>
               <a:tr h="0">
                 <a:tc>
@@ -24494,7 +24920,7 @@
                     <a:bodyPr/>
                     <a:lstStyle/>
                     <a:p>
-                      <a:pPr indent="0" marL="0">
+                      <a:pPr marL="0" indent="0">
                         <a:buNone/>
                       </a:pPr>
                       <a:r>
@@ -24562,7 +24988,7 @@
                     <a:bodyPr/>
                     <a:lstStyle/>
                     <a:p>
-                      <a:pPr indent="0" marL="0">
+                      <a:pPr marL="0" indent="0">
                         <a:buNone/>
                       </a:pPr>
                       <a:r>
@@ -24630,7 +25056,7 @@
                     <a:bodyPr/>
                     <a:lstStyle/>
                     <a:p>
-                      <a:pPr indent="0" marL="0">
+                      <a:pPr marL="0" indent="0">
                         <a:buNone/>
                       </a:pPr>
                       <a:r>
@@ -24693,6 +25119,11 @@
                     </a:solidFill>
                   </a:tcPr>
                 </a:tc>
+                <a:extLst>
+                  <a:ext uri="{0D108BD9-81ED-4DB2-BD59-A6C34878D82A}">
+                    <a16:rowId xmlns:a16="http://schemas.microsoft.com/office/drawing/2014/main" val="10002"/>
+                  </a:ext>
+                </a:extLst>
               </a:tr>
               <a:tr h="0">
                 <a:tc>
@@ -24700,7 +25131,7 @@
                     <a:bodyPr/>
                     <a:lstStyle/>
                     <a:p>
-                      <a:pPr indent="0" marL="0">
+                      <a:pPr marL="0" indent="0">
                         <a:buNone/>
                       </a:pPr>
                       <a:r>
@@ -24765,7 +25196,7 @@
                     <a:bodyPr/>
                     <a:lstStyle/>
                     <a:p>
-                      <a:pPr indent="0" marL="0">
+                      <a:pPr marL="0" indent="0">
                         <a:buNone/>
                       </a:pPr>
                       <a:r>
@@ -24830,7 +25261,7 @@
                     <a:bodyPr/>
                     <a:lstStyle/>
                     <a:p>
-                      <a:pPr indent="0" marL="0">
+                      <a:pPr marL="0" indent="0">
                         <a:buNone/>
                       </a:pPr>
                       <a:r>
@@ -24890,6 +25321,11 @@
                     </a:lnB>
                   </a:tcPr>
                 </a:tc>
+                <a:extLst>
+                  <a:ext uri="{0D108BD9-81ED-4DB2-BD59-A6C34878D82A}">
+                    <a16:rowId xmlns:a16="http://schemas.microsoft.com/office/drawing/2014/main" val="10003"/>
+                  </a:ext>
+                </a:extLst>
               </a:tr>
               <a:tr h="0">
                 <a:tc>
@@ -24897,7 +25333,7 @@
                     <a:bodyPr/>
                     <a:lstStyle/>
                     <a:p>
-                      <a:pPr indent="0" marL="0">
+                      <a:pPr marL="0" indent="0">
                         <a:buNone/>
                       </a:pPr>
                       <a:r>
@@ -24965,7 +25401,7 @@
                     <a:bodyPr/>
                     <a:lstStyle/>
                     <a:p>
-                      <a:pPr indent="0" marL="0">
+                      <a:pPr marL="0" indent="0">
                         <a:buNone/>
                       </a:pPr>
                       <a:r>
@@ -25033,7 +25469,7 @@
                     <a:bodyPr/>
                     <a:lstStyle/>
                     <a:p>
-                      <a:pPr indent="0" marL="0">
+                      <a:pPr marL="0" indent="0">
                         <a:buNone/>
                       </a:pPr>
                       <a:r>
@@ -25096,6 +25532,11 @@
                     </a:solidFill>
                   </a:tcPr>
                 </a:tc>
+                <a:extLst>
+                  <a:ext uri="{0D108BD9-81ED-4DB2-BD59-A6C34878D82A}">
+                    <a16:rowId xmlns:a16="http://schemas.microsoft.com/office/drawing/2014/main" val="10004"/>
+                  </a:ext>
+                </a:extLst>
               </a:tr>
               <a:tr h="0">
                 <a:tc>
@@ -25103,7 +25544,7 @@
                     <a:bodyPr/>
                     <a:lstStyle/>
                     <a:p>
-                      <a:pPr indent="0" marL="0">
+                      <a:pPr marL="0" indent="0">
                         <a:buNone/>
                       </a:pPr>
                       <a:r>
@@ -25168,7 +25609,7 @@
                     <a:bodyPr/>
                     <a:lstStyle/>
                     <a:p>
-                      <a:pPr indent="0" marL="0">
+                      <a:pPr marL="0" indent="0">
                         <a:buNone/>
                       </a:pPr>
                       <a:r>
@@ -25233,7 +25674,7 @@
                     <a:bodyPr/>
                     <a:lstStyle/>
                     <a:p>
-                      <a:pPr indent="0" marL="0">
+                      <a:pPr marL="0" indent="0">
                         <a:buNone/>
                       </a:pPr>
                       <a:r>
@@ -25293,6 +25734,11 @@
                     </a:lnB>
                   </a:tcPr>
                 </a:tc>
+                <a:extLst>
+                  <a:ext uri="{0D108BD9-81ED-4DB2-BD59-A6C34878D82A}">
+                    <a16:rowId xmlns:a16="http://schemas.microsoft.com/office/drawing/2014/main" val="10005"/>
+                  </a:ext>
+                </a:extLst>
               </a:tr>
               <a:tr h="0">
                 <a:tc>
@@ -25300,7 +25746,7 @@
                     <a:bodyPr/>
                     <a:lstStyle/>
                     <a:p>
-                      <a:pPr indent="0" marL="0">
+                      <a:pPr marL="0" indent="0">
                         <a:buNone/>
                       </a:pPr>
                       <a:r>
@@ -25368,7 +25814,7 @@
                     <a:bodyPr/>
                     <a:lstStyle/>
                     <a:p>
-                      <a:pPr indent="0" marL="0">
+                      <a:pPr marL="0" indent="0">
                         <a:buNone/>
                       </a:pPr>
                       <a:r>
@@ -25436,7 +25882,7 @@
                     <a:bodyPr/>
                     <a:lstStyle/>
                     <a:p>
-                      <a:pPr indent="0" marL="0">
+                      <a:pPr marL="0" indent="0">
                         <a:buNone/>
                       </a:pPr>
                       <a:r>
@@ -25499,6 +25945,11 @@
                     </a:solidFill>
                   </a:tcPr>
                 </a:tc>
+                <a:extLst>
+                  <a:ext uri="{0D108BD9-81ED-4DB2-BD59-A6C34878D82A}">
+                    <a16:rowId xmlns:a16="http://schemas.microsoft.com/office/drawing/2014/main" val="10006"/>
+                  </a:ext>
+                </a:extLst>
               </a:tr>
             </a:tbl>
           </a:graphicData>
@@ -25548,6 +25999,13 @@
           </a:solidFill>
           <a:ln/>
         </p:spPr>
+        <p:txBody>
+          <a:bodyPr/>
+          <a:lstStyle/>
+          <a:p>
+            <a:endParaRPr lang="ko-KR" altLang="en-US"/>
+          </a:p>
+        </p:txBody>
       </p:sp>
       <p:sp>
         <p:nvSpPr>
@@ -25572,11 +26030,11 @@
           </a:bodyPr>
           <a:lstStyle/>
           <a:p>
-            <a:pPr indent="0" marL="0">
+            <a:pPr marL="0" indent="0">
               <a:buNone/>
             </a:pPr>
             <a:r>
-              <a:rPr lang="en-US" sz="2800" b="1" spc="-30" kern="0" dirty="0">
+              <a:rPr lang="en-US" sz="2800" b="1" kern="0" spc="-30" dirty="0">
                 <a:solidFill>
                   <a:srgbClr val="1A1F36"/>
                 </a:solidFill>
@@ -25611,7 +26069,7 @@
           <a:bodyPr wrap="square" rtlCol="0" anchor="ctr"/>
           <a:lstStyle/>
           <a:p>
-            <a:pPr algn="r" indent="0" marL="0">
+            <a:pPr marL="0" indent="0" algn="r">
               <a:buNone/>
             </a:pPr>
             <a:r>
@@ -25876,6 +26334,13 @@
           </a:solidFill>
           <a:ln/>
         </p:spPr>
+        <p:txBody>
+          <a:bodyPr/>
+          <a:lstStyle/>
+          <a:p>
+            <a:endParaRPr lang="ko-KR" altLang="en-US"/>
+          </a:p>
+        </p:txBody>
       </p:sp>
       <p:sp>
         <p:nvSpPr>
@@ -25900,11 +26365,11 @@
           </a:bodyPr>
           <a:lstStyle/>
           <a:p>
-            <a:pPr indent="0" marL="0">
+            <a:pPr marL="0" indent="0">
               <a:buNone/>
             </a:pPr>
             <a:r>
-              <a:rPr lang="en-US" sz="2800" b="1" spc="-30" kern="0" dirty="0">
+              <a:rPr lang="en-US" sz="2800" b="1" kern="0" spc="-30" dirty="0">
                 <a:solidFill>
                   <a:srgbClr val="1A1F36"/>
                 </a:solidFill>
@@ -25939,7 +26404,7 @@
           <a:bodyPr wrap="square" rtlCol="0" anchor="ctr"/>
           <a:lstStyle/>
           <a:p>
-            <a:pPr algn="r" indent="0" marL="0">
+            <a:pPr marL="0" indent="0" algn="r">
               <a:buNone/>
             </a:pPr>
             <a:r>
@@ -25978,6 +26443,13 @@
           </a:solidFill>
           <a:ln/>
         </p:spPr>
+        <p:txBody>
+          <a:bodyPr/>
+          <a:lstStyle/>
+          <a:p>
+            <a:endParaRPr lang="ko-KR" altLang="en-US"/>
+          </a:p>
+        </p:txBody>
       </p:sp>
       <p:sp>
         <p:nvSpPr>
@@ -26000,7 +26472,7 @@
           <a:bodyPr wrap="square" rtlCol="0" anchor="ctr"/>
           <a:lstStyle/>
           <a:p>
-            <a:pPr algn="ctr" indent="0" marL="0">
+            <a:pPr marL="0" indent="0" algn="ctr">
               <a:lnSpc>
                 <a:spcPct val="140000"/>
               </a:lnSpc>
@@ -26020,7 +26492,7 @@
             <a:endParaRPr lang="en-US" sz="1800" dirty="0"/>
           </a:p>
           <a:p>
-            <a:pPr algn="ctr" indent="0" marL="0">
+            <a:pPr marL="0" indent="0" algn="ctr">
               <a:lnSpc>
                 <a:spcPct val="140000"/>
               </a:lnSpc>
@@ -26203,6 +26675,13 @@
           </a:solidFill>
           <a:ln/>
         </p:spPr>
+        <p:txBody>
+          <a:bodyPr/>
+          <a:lstStyle/>
+          <a:p>
+            <a:endParaRPr lang="ko-KR" altLang="en-US"/>
+          </a:p>
+        </p:txBody>
       </p:sp>
       <p:sp>
         <p:nvSpPr>
@@ -26225,7 +26704,7 @@
           <a:bodyPr wrap="square" rtlCol="0" anchor="ctr"/>
           <a:lstStyle/>
           <a:p>
-            <a:pPr algn="ctr" indent="0" marL="0">
+            <a:pPr marL="0" indent="0" algn="ctr">
               <a:buNone/>
             </a:pPr>
             <a:r>
@@ -26264,7 +26743,7 @@
           <a:bodyPr wrap="square" rtlCol="0" anchor="ctr"/>
           <a:lstStyle/>
           <a:p>
-            <a:pPr indent="0" marL="0">
+            <a:pPr marL="0" indent="0">
               <a:lnSpc>
                 <a:spcPct val="115000"/>
               </a:lnSpc>
@@ -26284,7 +26763,7 @@
             <a:endParaRPr lang="en-US" sz="3400" dirty="0"/>
           </a:p>
           <a:p>
-            <a:pPr indent="0" marL="0">
+            <a:pPr marL="0" indent="0">
               <a:lnSpc>
                 <a:spcPct val="115000"/>
               </a:lnSpc>
@@ -26326,7 +26805,7 @@
           <a:bodyPr wrap="square" rtlCol="0" anchor="ctr"/>
           <a:lstStyle/>
           <a:p>
-            <a:pPr indent="0" marL="0">
+            <a:pPr marL="0" indent="0">
               <a:buNone/>
             </a:pPr>
             <a:r>
@@ -26388,6 +26867,13 @@
           </a:solidFill>
           <a:ln/>
         </p:spPr>
+        <p:txBody>
+          <a:bodyPr/>
+          <a:lstStyle/>
+          <a:p>
+            <a:endParaRPr lang="ko-KR" altLang="en-US"/>
+          </a:p>
+        </p:txBody>
       </p:sp>
       <p:sp>
         <p:nvSpPr>
@@ -26410,7 +26896,7 @@
           <a:bodyPr wrap="square" rtlCol="0" anchor="ctr"/>
           <a:lstStyle/>
           <a:p>
-            <a:pPr algn="ctr" indent="0" marL="0">
+            <a:pPr marL="0" indent="0" algn="ctr">
               <a:buNone/>
             </a:pPr>
             <a:r>
@@ -26449,7 +26935,7 @@
           <a:bodyPr wrap="square" rtlCol="0" anchor="ctr"/>
           <a:lstStyle/>
           <a:p>
-            <a:pPr indent="0" marL="0">
+            <a:pPr marL="0" indent="0">
               <a:buNone/>
             </a:pPr>
             <a:r>
@@ -26488,7 +26974,7 @@
           <a:bodyPr wrap="square" rtlCol="0" anchor="ctr"/>
           <a:lstStyle/>
           <a:p>
-            <a:pPr indent="0" marL="0">
+            <a:pPr marL="0" indent="0">
               <a:lnSpc>
                 <a:spcPct val="140000"/>
               </a:lnSpc>
@@ -26553,6 +27039,13 @@
           </a:solidFill>
           <a:ln/>
         </p:spPr>
+        <p:txBody>
+          <a:bodyPr/>
+          <a:lstStyle/>
+          <a:p>
+            <a:endParaRPr lang="ko-KR" altLang="en-US"/>
+          </a:p>
+        </p:txBody>
       </p:sp>
       <p:sp>
         <p:nvSpPr>
@@ -26577,11 +27070,11 @@
           </a:bodyPr>
           <a:lstStyle/>
           <a:p>
-            <a:pPr indent="0" marL="0">
+            <a:pPr marL="0" indent="0">
               <a:buNone/>
             </a:pPr>
             <a:r>
-              <a:rPr lang="en-US" sz="2800" b="1" spc="-30" kern="0" dirty="0">
+              <a:rPr lang="en-US" sz="2800" b="1" kern="0" spc="-30" dirty="0">
                 <a:solidFill>
                   <a:srgbClr val="1A1F36"/>
                 </a:solidFill>
@@ -26616,7 +27109,7 @@
           <a:bodyPr wrap="square" rtlCol="0" anchor="ctr"/>
           <a:lstStyle/>
           <a:p>
-            <a:pPr algn="r" indent="0" marL="0">
+            <a:pPr marL="0" indent="0" algn="r">
               <a:buNone/>
             </a:pPr>
             <a:r>
@@ -26881,6 +27374,13 @@
           </a:solidFill>
           <a:ln/>
         </p:spPr>
+        <p:txBody>
+          <a:bodyPr/>
+          <a:lstStyle/>
+          <a:p>
+            <a:endParaRPr lang="ko-KR" altLang="en-US"/>
+          </a:p>
+        </p:txBody>
       </p:sp>
       <p:sp>
         <p:nvSpPr>
@@ -26905,11 +27405,11 @@
           </a:bodyPr>
           <a:lstStyle/>
           <a:p>
-            <a:pPr indent="0" marL="0">
+            <a:pPr marL="0" indent="0">
               <a:buNone/>
             </a:pPr>
             <a:r>
-              <a:rPr lang="en-US" sz="2800" b="1" spc="-30" kern="0" dirty="0">
+              <a:rPr lang="en-US" sz="2800" b="1" kern="0" spc="-30" dirty="0">
                 <a:solidFill>
                   <a:srgbClr val="1A1F36"/>
                 </a:solidFill>
@@ -26944,7 +27444,7 @@
           <a:bodyPr wrap="square" rtlCol="0" anchor="ctr"/>
           <a:lstStyle/>
           <a:p>
-            <a:pPr algn="r" indent="0" marL="0">
+            <a:pPr marL="0" indent="0" algn="r">
               <a:buNone/>
             </a:pPr>
             <a:r>
@@ -26978,16 +27478,34 @@
         </p:nvGraphicFramePr>
         <p:xfrm>
           <a:off x="548640" y="1645920"/>
-          <a:ext cx="11091672" cy="914400"/>
+          <a:ext cx="11091672" cy="2062480"/>
         </p:xfrm>
         <a:graphic>
           <a:graphicData uri="http://schemas.openxmlformats.org/drawingml/2006/table">
             <a:tbl>
               <a:tblPr/>
               <a:tblGrid>
-                <a:gridCol w="3697224"/>
-                <a:gridCol w="3697224"/>
-                <a:gridCol w="3697224"/>
+                <a:gridCol w="3697224">
+                  <a:extLst>
+                    <a:ext uri="{9D8B030D-6E8A-4147-A177-3AD203B41FA5}">
+                      <a16:colId xmlns:a16="http://schemas.microsoft.com/office/drawing/2014/main" val="20000"/>
+                    </a:ext>
+                  </a:extLst>
+                </a:gridCol>
+                <a:gridCol w="3697224">
+                  <a:extLst>
+                    <a:ext uri="{9D8B030D-6E8A-4147-A177-3AD203B41FA5}">
+                      <a16:colId xmlns:a16="http://schemas.microsoft.com/office/drawing/2014/main" val="20001"/>
+                    </a:ext>
+                  </a:extLst>
+                </a:gridCol>
+                <a:gridCol w="3697224">
+                  <a:extLst>
+                    <a:ext uri="{9D8B030D-6E8A-4147-A177-3AD203B41FA5}">
+                      <a16:colId xmlns:a16="http://schemas.microsoft.com/office/drawing/2014/main" val="20002"/>
+                    </a:ext>
+                  </a:extLst>
+                </a:gridCol>
               </a:tblGrid>
               <a:tr h="0">
                 <a:tc>
@@ -26995,7 +27513,7 @@
                     <a:bodyPr/>
                     <a:lstStyle/>
                     <a:p>
-                      <a:pPr algn="ctr" indent="0" marL="0">
+                      <a:pPr marL="0" indent="0" algn="ctr">
                         <a:buNone/>
                       </a:pPr>
                       <a:r>
@@ -27063,7 +27581,7 @@
                     <a:bodyPr/>
                     <a:lstStyle/>
                     <a:p>
-                      <a:pPr algn="ctr" indent="0" marL="0">
+                      <a:pPr marL="0" indent="0" algn="ctr">
                         <a:buNone/>
                       </a:pPr>
                       <a:r>
@@ -27131,7 +27649,7 @@
                     <a:bodyPr/>
                     <a:lstStyle/>
                     <a:p>
-                      <a:pPr algn="ctr" indent="0" marL="0">
+                      <a:pPr marL="0" indent="0" algn="ctr">
                         <a:buNone/>
                       </a:pPr>
                       <a:r>
@@ -27194,6 +27712,11 @@
                     </a:solidFill>
                   </a:tcPr>
                 </a:tc>
+                <a:extLst>
+                  <a:ext uri="{0D108BD9-81ED-4DB2-BD59-A6C34878D82A}">
+                    <a16:rowId xmlns:a16="http://schemas.microsoft.com/office/drawing/2014/main" val="10000"/>
+                  </a:ext>
+                </a:extLst>
               </a:tr>
               <a:tr h="0">
                 <a:tc>
@@ -27201,7 +27724,7 @@
                     <a:bodyPr/>
                     <a:lstStyle/>
                     <a:p>
-                      <a:pPr indent="0" marL="0">
+                      <a:pPr marL="0" indent="0">
                         <a:buNone/>
                       </a:pPr>
                       <a:r>
@@ -27266,7 +27789,7 @@
                     <a:bodyPr/>
                     <a:lstStyle/>
                     <a:p>
-                      <a:pPr indent="0" marL="0">
+                      <a:pPr marL="0" indent="0">
                         <a:buNone/>
                       </a:pPr>
                       <a:r>
@@ -27331,7 +27854,7 @@
                     <a:bodyPr/>
                     <a:lstStyle/>
                     <a:p>
-                      <a:pPr indent="0" marL="0">
+                      <a:pPr marL="0" indent="0">
                         <a:buNone/>
                       </a:pPr>
                       <a:r>
@@ -27391,6 +27914,11 @@
                     </a:lnB>
                   </a:tcPr>
                 </a:tc>
+                <a:extLst>
+                  <a:ext uri="{0D108BD9-81ED-4DB2-BD59-A6C34878D82A}">
+                    <a16:rowId xmlns:a16="http://schemas.microsoft.com/office/drawing/2014/main" val="10001"/>
+                  </a:ext>
+                </a:extLst>
               </a:tr>
               <a:tr h="0">
                 <a:tc>
@@ -27398,7 +27926,7 @@
                     <a:bodyPr/>
                     <a:lstStyle/>
                     <a:p>
-                      <a:pPr indent="0" marL="0">
+                      <a:pPr marL="0" indent="0">
                         <a:buNone/>
                       </a:pPr>
                       <a:r>
@@ -27466,7 +27994,7 @@
                     <a:bodyPr/>
                     <a:lstStyle/>
                     <a:p>
-                      <a:pPr indent="0" marL="0">
+                      <a:pPr marL="0" indent="0">
                         <a:buNone/>
                       </a:pPr>
                       <a:r>
@@ -27534,7 +28062,7 @@
                     <a:bodyPr/>
                     <a:lstStyle/>
                     <a:p>
-                      <a:pPr indent="0" marL="0">
+                      <a:pPr marL="0" indent="0">
                         <a:buNone/>
                       </a:pPr>
                       <a:r>
@@ -27597,6 +28125,11 @@
                     </a:solidFill>
                   </a:tcPr>
                 </a:tc>
+                <a:extLst>
+                  <a:ext uri="{0D108BD9-81ED-4DB2-BD59-A6C34878D82A}">
+                    <a16:rowId xmlns:a16="http://schemas.microsoft.com/office/drawing/2014/main" val="10002"/>
+                  </a:ext>
+                </a:extLst>
               </a:tr>
               <a:tr h="0">
                 <a:tc>
@@ -27604,7 +28137,7 @@
                     <a:bodyPr/>
                     <a:lstStyle/>
                     <a:p>
-                      <a:pPr indent="0" marL="0">
+                      <a:pPr marL="0" indent="0">
                         <a:buNone/>
                       </a:pPr>
                       <a:r>
@@ -27669,7 +28202,7 @@
                     <a:bodyPr/>
                     <a:lstStyle/>
                     <a:p>
-                      <a:pPr indent="0" marL="0">
+                      <a:pPr marL="0" indent="0">
                         <a:buNone/>
                       </a:pPr>
                       <a:r>
@@ -27734,7 +28267,7 @@
                     <a:bodyPr/>
                     <a:lstStyle/>
                     <a:p>
-                      <a:pPr indent="0" marL="0">
+                      <a:pPr marL="0" indent="0">
                         <a:buNone/>
                       </a:pPr>
                       <a:r>
@@ -27794,6 +28327,11 @@
                     </a:lnB>
                   </a:tcPr>
                 </a:tc>
+                <a:extLst>
+                  <a:ext uri="{0D108BD9-81ED-4DB2-BD59-A6C34878D82A}">
+                    <a16:rowId xmlns:a16="http://schemas.microsoft.com/office/drawing/2014/main" val="10003"/>
+                  </a:ext>
+                </a:extLst>
               </a:tr>
               <a:tr h="0">
                 <a:tc>
@@ -27801,7 +28339,7 @@
                     <a:bodyPr/>
                     <a:lstStyle/>
                     <a:p>
-                      <a:pPr indent="0" marL="0">
+                      <a:pPr marL="0" indent="0">
                         <a:buNone/>
                       </a:pPr>
                       <a:r>
@@ -27869,7 +28407,7 @@
                     <a:bodyPr/>
                     <a:lstStyle/>
                     <a:p>
-                      <a:pPr indent="0" marL="0">
+                      <a:pPr marL="0" indent="0">
                         <a:buNone/>
                       </a:pPr>
                       <a:r>
@@ -27937,7 +28475,7 @@
                     <a:bodyPr/>
                     <a:lstStyle/>
                     <a:p>
-                      <a:pPr indent="0" marL="0">
+                      <a:pPr marL="0" indent="0">
                         <a:buNone/>
                       </a:pPr>
                       <a:r>
@@ -28000,6 +28538,11 @@
                     </a:solidFill>
                   </a:tcPr>
                 </a:tc>
+                <a:extLst>
+                  <a:ext uri="{0D108BD9-81ED-4DB2-BD59-A6C34878D82A}">
+                    <a16:rowId xmlns:a16="http://schemas.microsoft.com/office/drawing/2014/main" val="10004"/>
+                  </a:ext>
+                </a:extLst>
               </a:tr>
               <a:tr h="0">
                 <a:tc>
@@ -28007,7 +28550,7 @@
                     <a:bodyPr/>
                     <a:lstStyle/>
                     <a:p>
-                      <a:pPr indent="0" marL="0">
+                      <a:pPr marL="0" indent="0">
                         <a:buNone/>
                       </a:pPr>
                       <a:r>
@@ -28072,7 +28615,7 @@
                     <a:bodyPr/>
                     <a:lstStyle/>
                     <a:p>
-                      <a:pPr indent="0" marL="0">
+                      <a:pPr marL="0" indent="0">
                         <a:buNone/>
                       </a:pPr>
                       <a:r>
@@ -28137,7 +28680,7 @@
                     <a:bodyPr/>
                     <a:lstStyle/>
                     <a:p>
-                      <a:pPr indent="0" marL="0">
+                      <a:pPr marL="0" indent="0">
                         <a:buNone/>
                       </a:pPr>
                       <a:r>
@@ -28197,6 +28740,11 @@
                     </a:lnB>
                   </a:tcPr>
                 </a:tc>
+                <a:extLst>
+                  <a:ext uri="{0D108BD9-81ED-4DB2-BD59-A6C34878D82A}">
+                    <a16:rowId xmlns:a16="http://schemas.microsoft.com/office/drawing/2014/main" val="10005"/>
+                  </a:ext>
+                </a:extLst>
               </a:tr>
               <a:tr h="0">
                 <a:tc>
@@ -28204,7 +28752,7 @@
                     <a:bodyPr/>
                     <a:lstStyle/>
                     <a:p>
-                      <a:pPr indent="0" marL="0">
+                      <a:pPr marL="0" indent="0">
                         <a:buNone/>
                       </a:pPr>
                       <a:r>
@@ -28272,7 +28820,7 @@
                     <a:bodyPr/>
                     <a:lstStyle/>
                     <a:p>
-                      <a:pPr indent="0" marL="0">
+                      <a:pPr marL="0" indent="0">
                         <a:buNone/>
                       </a:pPr>
                       <a:r>
@@ -28340,7 +28888,7 @@
                     <a:bodyPr/>
                     <a:lstStyle/>
                     <a:p>
-                      <a:pPr indent="0" marL="0">
+                      <a:pPr marL="0" indent="0">
                         <a:buNone/>
                       </a:pPr>
                       <a:r>
@@ -28403,6 +28951,11 @@
                     </a:solidFill>
                   </a:tcPr>
                 </a:tc>
+                <a:extLst>
+                  <a:ext uri="{0D108BD9-81ED-4DB2-BD59-A6C34878D82A}">
+                    <a16:rowId xmlns:a16="http://schemas.microsoft.com/office/drawing/2014/main" val="10006"/>
+                  </a:ext>
+                </a:extLst>
               </a:tr>
             </a:tbl>
           </a:graphicData>
@@ -28452,6 +29005,13 @@
           </a:solidFill>
           <a:ln/>
         </p:spPr>
+        <p:txBody>
+          <a:bodyPr/>
+          <a:lstStyle/>
+          <a:p>
+            <a:endParaRPr lang="ko-KR" altLang="en-US"/>
+          </a:p>
+        </p:txBody>
       </p:sp>
       <p:sp>
         <p:nvSpPr>
@@ -28476,11 +29036,11 @@
           </a:bodyPr>
           <a:lstStyle/>
           <a:p>
-            <a:pPr indent="0" marL="0">
+            <a:pPr marL="0" indent="0">
               <a:buNone/>
             </a:pPr>
             <a:r>
-              <a:rPr lang="en-US" sz="2800" b="1" spc="-30" kern="0" dirty="0">
+              <a:rPr lang="en-US" sz="2800" b="1" kern="0" spc="-30" dirty="0">
                 <a:solidFill>
                   <a:srgbClr val="1A1F36"/>
                 </a:solidFill>
@@ -28515,7 +29075,7 @@
           <a:bodyPr wrap="square" rtlCol="0" anchor="ctr"/>
           <a:lstStyle/>
           <a:p>
-            <a:pPr algn="r" indent="0" marL="0">
+            <a:pPr marL="0" indent="0" algn="r">
               <a:buNone/>
             </a:pPr>
             <a:r>
@@ -28549,16 +29109,34 @@
         </p:nvGraphicFramePr>
         <p:xfrm>
           <a:off x="548640" y="1645920"/>
-          <a:ext cx="11091672" cy="914400"/>
+          <a:ext cx="11091672" cy="1346200"/>
         </p:xfrm>
         <a:graphic>
           <a:graphicData uri="http://schemas.openxmlformats.org/drawingml/2006/table">
             <a:tbl>
               <a:tblPr/>
               <a:tblGrid>
-                <a:gridCol w="3697224"/>
-                <a:gridCol w="3697224"/>
-                <a:gridCol w="3697224"/>
+                <a:gridCol w="3697224">
+                  <a:extLst>
+                    <a:ext uri="{9D8B030D-6E8A-4147-A177-3AD203B41FA5}">
+                      <a16:colId xmlns:a16="http://schemas.microsoft.com/office/drawing/2014/main" val="20000"/>
+                    </a:ext>
+                  </a:extLst>
+                </a:gridCol>
+                <a:gridCol w="3697224">
+                  <a:extLst>
+                    <a:ext uri="{9D8B030D-6E8A-4147-A177-3AD203B41FA5}">
+                      <a16:colId xmlns:a16="http://schemas.microsoft.com/office/drawing/2014/main" val="20001"/>
+                    </a:ext>
+                  </a:extLst>
+                </a:gridCol>
+                <a:gridCol w="3697224">
+                  <a:extLst>
+                    <a:ext uri="{9D8B030D-6E8A-4147-A177-3AD203B41FA5}">
+                      <a16:colId xmlns:a16="http://schemas.microsoft.com/office/drawing/2014/main" val="20002"/>
+                    </a:ext>
+                  </a:extLst>
+                </a:gridCol>
               </a:tblGrid>
               <a:tr h="0">
                 <a:tc>
@@ -28566,7 +29144,7 @@
                     <a:bodyPr/>
                     <a:lstStyle/>
                     <a:p>
-                      <a:pPr algn="ctr" indent="0" marL="0">
+                      <a:pPr marL="0" indent="0" algn="ctr">
                         <a:buNone/>
                       </a:pPr>
                       <a:r>
@@ -28634,7 +29212,7 @@
                     <a:bodyPr/>
                     <a:lstStyle/>
                     <a:p>
-                      <a:pPr algn="ctr" indent="0" marL="0">
+                      <a:pPr marL="0" indent="0" algn="ctr">
                         <a:buNone/>
                       </a:pPr>
                       <a:r>
@@ -28702,7 +29280,7 @@
                     <a:bodyPr/>
                     <a:lstStyle/>
                     <a:p>
-                      <a:pPr algn="ctr" indent="0" marL="0">
+                      <a:pPr marL="0" indent="0" algn="ctr">
                         <a:buNone/>
                       </a:pPr>
                       <a:r>
@@ -28765,6 +29343,11 @@
                     </a:solidFill>
                   </a:tcPr>
                 </a:tc>
+                <a:extLst>
+                  <a:ext uri="{0D108BD9-81ED-4DB2-BD59-A6C34878D82A}">
+                    <a16:rowId xmlns:a16="http://schemas.microsoft.com/office/drawing/2014/main" val="10000"/>
+                  </a:ext>
+                </a:extLst>
               </a:tr>
               <a:tr h="0">
                 <a:tc>
@@ -28772,7 +29355,7 @@
                     <a:bodyPr/>
                     <a:lstStyle/>
                     <a:p>
-                      <a:pPr indent="0" marL="0">
+                      <a:pPr marL="0" indent="0">
                         <a:buNone/>
                       </a:pPr>
                       <a:r>
@@ -28837,7 +29420,7 @@
                     <a:bodyPr/>
                     <a:lstStyle/>
                     <a:p>
-                      <a:pPr indent="0" marL="0">
+                      <a:pPr marL="0" indent="0">
                         <a:buNone/>
                       </a:pPr>
                       <a:r>
@@ -28902,7 +29485,7 @@
                     <a:bodyPr/>
                     <a:lstStyle/>
                     <a:p>
-                      <a:pPr indent="0" marL="0">
+                      <a:pPr marL="0" indent="0">
                         <a:buNone/>
                       </a:pPr>
                       <a:r>
@@ -28962,6 +29545,11 @@
                     </a:lnB>
                   </a:tcPr>
                 </a:tc>
+                <a:extLst>
+                  <a:ext uri="{0D108BD9-81ED-4DB2-BD59-A6C34878D82A}">
+                    <a16:rowId xmlns:a16="http://schemas.microsoft.com/office/drawing/2014/main" val="10001"/>
+                  </a:ext>
+                </a:extLst>
               </a:tr>
               <a:tr h="0">
                 <a:tc>
@@ -28969,7 +29557,7 @@
                     <a:bodyPr/>
                     <a:lstStyle/>
                     <a:p>
-                      <a:pPr indent="0" marL="0">
+                      <a:pPr marL="0" indent="0">
                         <a:buNone/>
                       </a:pPr>
                       <a:r>
@@ -29037,7 +29625,7 @@
                     <a:bodyPr/>
                     <a:lstStyle/>
                     <a:p>
-                      <a:pPr indent="0" marL="0">
+                      <a:pPr marL="0" indent="0">
                         <a:buNone/>
                       </a:pPr>
                       <a:r>
@@ -29105,7 +29693,7 @@
                     <a:bodyPr/>
                     <a:lstStyle/>
                     <a:p>
-                      <a:pPr indent="0" marL="0">
+                      <a:pPr marL="0" indent="0">
                         <a:buNone/>
                       </a:pPr>
                       <a:r>
@@ -29126,7 +29714,7 @@
                       </a:endParaRPr>
                     </a:p>
                     <a:p>
-                      <a:pPr indent="0" marL="0">
+                      <a:pPr marL="0" indent="0">
                         <a:buNone/>
                       </a:pPr>
                       <a:r>
@@ -29189,6 +29777,11 @@
                     </a:solidFill>
                   </a:tcPr>
                 </a:tc>
+                <a:extLst>
+                  <a:ext uri="{0D108BD9-81ED-4DB2-BD59-A6C34878D82A}">
+                    <a16:rowId xmlns:a16="http://schemas.microsoft.com/office/drawing/2014/main" val="10002"/>
+                  </a:ext>
+                </a:extLst>
               </a:tr>
               <a:tr h="0">
                 <a:tc>
@@ -29196,7 +29789,7 @@
                     <a:bodyPr/>
                     <a:lstStyle/>
                     <a:p>
-                      <a:pPr indent="0" marL="0">
+                      <a:pPr marL="0" indent="0">
                         <a:buNone/>
                       </a:pPr>
                       <a:r>
@@ -29261,7 +29854,7 @@
                     <a:bodyPr/>
                     <a:lstStyle/>
                     <a:p>
-                      <a:pPr indent="0" marL="0">
+                      <a:pPr marL="0" indent="0">
                         <a:buNone/>
                       </a:pPr>
                       <a:r>
@@ -29326,7 +29919,7 @@
                     <a:bodyPr/>
                     <a:lstStyle/>
                     <a:p>
-                      <a:pPr indent="0" marL="0">
+                      <a:pPr marL="0" indent="0">
                         <a:buNone/>
                       </a:pPr>
                       <a:r>
@@ -29386,6 +29979,11 @@
                     </a:lnB>
                   </a:tcPr>
                 </a:tc>
+                <a:extLst>
+                  <a:ext uri="{0D108BD9-81ED-4DB2-BD59-A6C34878D82A}">
+                    <a16:rowId xmlns:a16="http://schemas.microsoft.com/office/drawing/2014/main" val="10003"/>
+                  </a:ext>
+                </a:extLst>
               </a:tr>
             </a:tbl>
           </a:graphicData>
@@ -29412,7 +30010,7 @@
           <a:bodyPr wrap="square" rtlCol="0" anchor="ctr"/>
           <a:lstStyle/>
           <a:p>
-            <a:pPr indent="0" marL="0">
+            <a:pPr marL="0" indent="0">
               <a:lnSpc>
                 <a:spcPct val="150000"/>
               </a:lnSpc>
@@ -29432,7 +30030,7 @@
             <a:endParaRPr lang="en-US" sz="1600" dirty="0"/>
           </a:p>
           <a:p>
-            <a:pPr indent="0" marL="0">
+            <a:pPr marL="0" indent="0">
               <a:lnSpc>
                 <a:spcPct val="150000"/>
               </a:lnSpc>
@@ -29497,6 +30095,13 @@
           </a:solidFill>
           <a:ln/>
         </p:spPr>
+        <p:txBody>
+          <a:bodyPr/>
+          <a:lstStyle/>
+          <a:p>
+            <a:endParaRPr lang="ko-KR" altLang="en-US"/>
+          </a:p>
+        </p:txBody>
       </p:sp>
       <p:sp>
         <p:nvSpPr>
@@ -29521,11 +30126,11 @@
           </a:bodyPr>
           <a:lstStyle/>
           <a:p>
-            <a:pPr indent="0" marL="0">
+            <a:pPr marL="0" indent="0">
               <a:buNone/>
             </a:pPr>
             <a:r>
-              <a:rPr lang="en-US" sz="2800" b="1" spc="-30" kern="0" dirty="0">
+              <a:rPr lang="en-US" sz="2800" b="1" kern="0" spc="-30" dirty="0">
                 <a:solidFill>
                   <a:srgbClr val="1A1F36"/>
                 </a:solidFill>
@@ -29560,7 +30165,7 @@
           <a:bodyPr wrap="square" rtlCol="0" anchor="ctr"/>
           <a:lstStyle/>
           <a:p>
-            <a:pPr algn="r" indent="0" marL="0">
+            <a:pPr marL="0" indent="0" algn="r">
               <a:buNone/>
             </a:pPr>
             <a:r>
@@ -29594,18 +30199,48 @@
         </p:nvGraphicFramePr>
         <p:xfrm>
           <a:off x="548640" y="1645920"/>
-          <a:ext cx="11091672" cy="914400"/>
+          <a:ext cx="11091670" cy="1681480"/>
         </p:xfrm>
         <a:graphic>
           <a:graphicData uri="http://schemas.openxmlformats.org/drawingml/2006/table">
             <a:tbl>
               <a:tblPr/>
               <a:tblGrid>
-                <a:gridCol w="2218334"/>
-                <a:gridCol w="2218334"/>
-                <a:gridCol w="2218334"/>
-                <a:gridCol w="2218334"/>
-                <a:gridCol w="2218334"/>
+                <a:gridCol w="2218334">
+                  <a:extLst>
+                    <a:ext uri="{9D8B030D-6E8A-4147-A177-3AD203B41FA5}">
+                      <a16:colId xmlns:a16="http://schemas.microsoft.com/office/drawing/2014/main" val="20000"/>
+                    </a:ext>
+                  </a:extLst>
+                </a:gridCol>
+                <a:gridCol w="2218334">
+                  <a:extLst>
+                    <a:ext uri="{9D8B030D-6E8A-4147-A177-3AD203B41FA5}">
+                      <a16:colId xmlns:a16="http://schemas.microsoft.com/office/drawing/2014/main" val="20001"/>
+                    </a:ext>
+                  </a:extLst>
+                </a:gridCol>
+                <a:gridCol w="2218334">
+                  <a:extLst>
+                    <a:ext uri="{9D8B030D-6E8A-4147-A177-3AD203B41FA5}">
+                      <a16:colId xmlns:a16="http://schemas.microsoft.com/office/drawing/2014/main" val="20002"/>
+                    </a:ext>
+                  </a:extLst>
+                </a:gridCol>
+                <a:gridCol w="2218334">
+                  <a:extLst>
+                    <a:ext uri="{9D8B030D-6E8A-4147-A177-3AD203B41FA5}">
+                      <a16:colId xmlns:a16="http://schemas.microsoft.com/office/drawing/2014/main" val="20003"/>
+                    </a:ext>
+                  </a:extLst>
+                </a:gridCol>
+                <a:gridCol w="2218334">
+                  <a:extLst>
+                    <a:ext uri="{9D8B030D-6E8A-4147-A177-3AD203B41FA5}">
+                      <a16:colId xmlns:a16="http://schemas.microsoft.com/office/drawing/2014/main" val="20004"/>
+                    </a:ext>
+                  </a:extLst>
+                </a:gridCol>
               </a:tblGrid>
               <a:tr h="0">
                 <a:tc>
@@ -29613,7 +30248,7 @@
                     <a:bodyPr/>
                     <a:lstStyle/>
                     <a:p>
-                      <a:pPr algn="ctr" indent="0" marL="0">
+                      <a:pPr marL="0" indent="0" algn="ctr">
                         <a:buNone/>
                       </a:pPr>
                       <a:r>
@@ -29681,7 +30316,7 @@
                     <a:bodyPr/>
                     <a:lstStyle/>
                     <a:p>
-                      <a:pPr algn="ctr" indent="0" marL="0">
+                      <a:pPr marL="0" indent="0" algn="ctr">
                         <a:buNone/>
                       </a:pPr>
                       <a:r>
@@ -29749,7 +30384,7 @@
                     <a:bodyPr/>
                     <a:lstStyle/>
                     <a:p>
-                      <a:pPr algn="ctr" indent="0" marL="0">
+                      <a:pPr marL="0" indent="0" algn="ctr">
                         <a:buNone/>
                       </a:pPr>
                       <a:r>
@@ -29817,7 +30452,7 @@
                     <a:bodyPr/>
                     <a:lstStyle/>
                     <a:p>
-                      <a:pPr algn="ctr" indent="0" marL="0">
+                      <a:pPr marL="0" indent="0" algn="ctr">
                         <a:buNone/>
                       </a:pPr>
                       <a:r>
@@ -29885,7 +30520,7 @@
                     <a:bodyPr/>
                     <a:lstStyle/>
                     <a:p>
-                      <a:pPr algn="ctr" indent="0" marL="0">
+                      <a:pPr marL="0" indent="0" algn="ctr">
                         <a:buNone/>
                       </a:pPr>
                       <a:r>
@@ -29948,6 +30583,11 @@
                     </a:solidFill>
                   </a:tcPr>
                 </a:tc>
+                <a:extLst>
+                  <a:ext uri="{0D108BD9-81ED-4DB2-BD59-A6C34878D82A}">
+                    <a16:rowId xmlns:a16="http://schemas.microsoft.com/office/drawing/2014/main" val="10000"/>
+                  </a:ext>
+                </a:extLst>
               </a:tr>
               <a:tr h="0">
                 <a:tc>
@@ -29955,7 +30595,7 @@
                     <a:bodyPr/>
                     <a:lstStyle/>
                     <a:p>
-                      <a:pPr indent="0" marL="0">
+                      <a:pPr marL="0" indent="0">
                         <a:buNone/>
                       </a:pPr>
                       <a:r>
@@ -30020,7 +30660,7 @@
                     <a:bodyPr/>
                     <a:lstStyle/>
                     <a:p>
-                      <a:pPr indent="0" marL="0">
+                      <a:pPr marL="0" indent="0">
                         <a:buNone/>
                       </a:pPr>
                       <a:r>
@@ -30041,7 +30681,7 @@
                       </a:endParaRPr>
                     </a:p>
                     <a:p>
-                      <a:pPr indent="0" marL="0">
+                      <a:pPr marL="0" indent="0">
                         <a:buNone/>
                       </a:pPr>
                       <a:r>
@@ -30106,7 +30746,7 @@
                     <a:bodyPr/>
                     <a:lstStyle/>
                     <a:p>
-                      <a:pPr indent="0" marL="0">
+                      <a:pPr marL="0" indent="0">
                         <a:buNone/>
                       </a:pPr>
                       <a:r>
@@ -30127,7 +30767,7 @@
                       </a:endParaRPr>
                     </a:p>
                     <a:p>
-                      <a:pPr indent="0" marL="0">
+                      <a:pPr marL="0" indent="0">
                         <a:buNone/>
                       </a:pPr>
                       <a:r>
@@ -30192,7 +30832,7 @@
                     <a:bodyPr/>
                     <a:lstStyle/>
                     <a:p>
-                      <a:pPr indent="0" marL="0">
+                      <a:pPr marL="0" indent="0">
                         <a:buNone/>
                       </a:pPr>
                       <a:r>
@@ -30213,7 +30853,7 @@
                       </a:endParaRPr>
                     </a:p>
                     <a:p>
-                      <a:pPr indent="0" marL="0">
+                      <a:pPr marL="0" indent="0">
                         <a:buNone/>
                       </a:pPr>
                       <a:r>
@@ -30278,7 +30918,7 @@
                     <a:bodyPr/>
                     <a:lstStyle/>
                     <a:p>
-                      <a:pPr indent="0" marL="0">
+                      <a:pPr marL="0" indent="0">
                         <a:buNone/>
                       </a:pPr>
                       <a:r>
@@ -30338,6 +30978,11 @@
                     </a:lnB>
                   </a:tcPr>
                 </a:tc>
+                <a:extLst>
+                  <a:ext uri="{0D108BD9-81ED-4DB2-BD59-A6C34878D82A}">
+                    <a16:rowId xmlns:a16="http://schemas.microsoft.com/office/drawing/2014/main" val="10001"/>
+                  </a:ext>
+                </a:extLst>
               </a:tr>
               <a:tr h="0">
                 <a:tc>
@@ -30345,7 +30990,7 @@
                     <a:bodyPr/>
                     <a:lstStyle/>
                     <a:p>
-                      <a:pPr indent="0" marL="0">
+                      <a:pPr marL="0" indent="0">
                         <a:buNone/>
                       </a:pPr>
                       <a:r>
@@ -30413,7 +31058,7 @@
                     <a:bodyPr/>
                     <a:lstStyle/>
                     <a:p>
-                      <a:pPr indent="0" marL="0">
+                      <a:pPr marL="0" indent="0">
                         <a:buNone/>
                       </a:pPr>
                       <a:r>
@@ -30434,7 +31079,7 @@
                       </a:endParaRPr>
                     </a:p>
                     <a:p>
-                      <a:pPr indent="0" marL="0">
+                      <a:pPr marL="0" indent="0">
                         <a:buNone/>
                       </a:pPr>
                       <a:r>
@@ -30502,7 +31147,7 @@
                     <a:bodyPr/>
                     <a:lstStyle/>
                     <a:p>
-                      <a:pPr indent="0" marL="0">
+                      <a:pPr marL="0" indent="0">
                         <a:buNone/>
                       </a:pPr>
                       <a:r>
@@ -30523,7 +31168,7 @@
                       </a:endParaRPr>
                     </a:p>
                     <a:p>
-                      <a:pPr indent="0" marL="0">
+                      <a:pPr marL="0" indent="0">
                         <a:buNone/>
                       </a:pPr>
                       <a:r>
@@ -30591,7 +31236,7 @@
                     <a:bodyPr/>
                     <a:lstStyle/>
                     <a:p>
-                      <a:pPr indent="0" marL="0">
+                      <a:pPr marL="0" indent="0">
                         <a:buNone/>
                       </a:pPr>
                       <a:r>
@@ -30659,7 +31304,7 @@
                     <a:bodyPr/>
                     <a:lstStyle/>
                     <a:p>
-                      <a:pPr indent="0" marL="0">
+                      <a:pPr marL="0" indent="0">
                         <a:buNone/>
                       </a:pPr>
                       <a:r>
@@ -30722,6 +31367,11 @@
                     </a:solidFill>
                   </a:tcPr>
                 </a:tc>
+                <a:extLst>
+                  <a:ext uri="{0D108BD9-81ED-4DB2-BD59-A6C34878D82A}">
+                    <a16:rowId xmlns:a16="http://schemas.microsoft.com/office/drawing/2014/main" val="10002"/>
+                  </a:ext>
+                </a:extLst>
               </a:tr>
               <a:tr h="0">
                 <a:tc>
@@ -30729,7 +31379,7 @@
                     <a:bodyPr/>
                     <a:lstStyle/>
                     <a:p>
-                      <a:pPr indent="0" marL="0">
+                      <a:pPr marL="0" indent="0">
                         <a:buNone/>
                       </a:pPr>
                       <a:r>
@@ -30794,7 +31444,7 @@
                     <a:bodyPr/>
                     <a:lstStyle/>
                     <a:p>
-                      <a:pPr indent="0" marL="0">
+                      <a:pPr marL="0" indent="0">
                         <a:buNone/>
                       </a:pPr>
                       <a:r>
@@ -30815,7 +31465,7 @@
                       </a:endParaRPr>
                     </a:p>
                     <a:p>
-                      <a:pPr indent="0" marL="0">
+                      <a:pPr marL="0" indent="0">
                         <a:buNone/>
                       </a:pPr>
                       <a:r>
@@ -30880,7 +31530,7 @@
                     <a:bodyPr/>
                     <a:lstStyle/>
                     <a:p>
-                      <a:pPr indent="0" marL="0">
+                      <a:pPr marL="0" indent="0">
                         <a:buNone/>
                       </a:pPr>
                       <a:r>
@@ -30901,7 +31551,7 @@
                       </a:endParaRPr>
                     </a:p>
                     <a:p>
-                      <a:pPr indent="0" marL="0">
+                      <a:pPr marL="0" indent="0">
                         <a:buNone/>
                       </a:pPr>
                       <a:r>
@@ -30966,7 +31616,7 @@
                     <a:bodyPr/>
                     <a:lstStyle/>
                     <a:p>
-                      <a:pPr indent="0" marL="0">
+                      <a:pPr marL="0" indent="0">
                         <a:buNone/>
                       </a:pPr>
                       <a:r>
@@ -30987,7 +31637,7 @@
                       </a:endParaRPr>
                     </a:p>
                     <a:p>
-                      <a:pPr indent="0" marL="0">
+                      <a:pPr marL="0" indent="0">
                         <a:buNone/>
                       </a:pPr>
                       <a:r>
@@ -31052,7 +31702,7 @@
                     <a:bodyPr/>
                     <a:lstStyle/>
                     <a:p>
-                      <a:pPr indent="0" marL="0">
+                      <a:pPr marL="0" indent="0">
                         <a:buNone/>
                       </a:pPr>
                       <a:r>
@@ -31112,6 +31762,11 @@
                     </a:lnB>
                   </a:tcPr>
                 </a:tc>
+                <a:extLst>
+                  <a:ext uri="{0D108BD9-81ED-4DB2-BD59-A6C34878D82A}">
+                    <a16:rowId xmlns:a16="http://schemas.microsoft.com/office/drawing/2014/main" val="10003"/>
+                  </a:ext>
+                </a:extLst>
               </a:tr>
             </a:tbl>
           </a:graphicData>
@@ -31138,6 +31793,13 @@
           </a:solidFill>
           <a:ln/>
         </p:spPr>
+        <p:txBody>
+          <a:bodyPr/>
+          <a:lstStyle/>
+          <a:p>
+            <a:endParaRPr lang="ko-KR" altLang="en-US"/>
+          </a:p>
+        </p:txBody>
       </p:sp>
       <p:sp>
         <p:nvSpPr>
@@ -31160,7 +31822,7 @@
           <a:bodyPr wrap="square" rtlCol="0" anchor="ctr"/>
           <a:lstStyle/>
           <a:p>
-            <a:pPr indent="0" marL="0">
+            <a:pPr marL="0" indent="0">
               <a:buNone/>
             </a:pPr>
             <a:r>
@@ -31222,6 +31884,13 @@
           </a:solidFill>
           <a:ln/>
         </p:spPr>
+        <p:txBody>
+          <a:bodyPr/>
+          <a:lstStyle/>
+          <a:p>
+            <a:endParaRPr lang="ko-KR" altLang="en-US"/>
+          </a:p>
+        </p:txBody>
       </p:sp>
       <p:sp>
         <p:nvSpPr>
@@ -31246,11 +31915,11 @@
           </a:bodyPr>
           <a:lstStyle/>
           <a:p>
-            <a:pPr indent="0" marL="0">
+            <a:pPr marL="0" indent="0">
               <a:buNone/>
             </a:pPr>
             <a:r>
-              <a:rPr lang="en-US" sz="2800" b="1" spc="-30" kern="0" dirty="0">
+              <a:rPr lang="en-US" sz="2800" b="1" kern="0" spc="-30" dirty="0">
                 <a:solidFill>
                   <a:srgbClr val="1A1F36"/>
                 </a:solidFill>
@@ -31285,7 +31954,7 @@
           <a:bodyPr wrap="square" rtlCol="0" anchor="ctr"/>
           <a:lstStyle/>
           <a:p>
-            <a:pPr algn="r" indent="0" marL="0">
+            <a:pPr marL="0" indent="0" algn="r">
               <a:buNone/>
             </a:pPr>
             <a:r>
@@ -31324,6 +31993,13 @@
           </a:solidFill>
           <a:ln/>
         </p:spPr>
+        <p:txBody>
+          <a:bodyPr/>
+          <a:lstStyle/>
+          <a:p>
+            <a:endParaRPr lang="ko-KR" altLang="en-US"/>
+          </a:p>
+        </p:txBody>
       </p:sp>
       <p:sp>
         <p:nvSpPr>
@@ -31346,7 +32022,7 @@
           <a:bodyPr wrap="square" rtlCol="0" anchor="ctr"/>
           <a:lstStyle/>
           <a:p>
-            <a:pPr indent="0" marL="0">
+            <a:pPr marL="0" indent="0">
               <a:buNone/>
             </a:pPr>
             <a:r>
@@ -31385,7 +32061,7 @@
           <a:bodyPr wrap="square" rtlCol="0" anchor="ctr"/>
           <a:lstStyle/>
           <a:p>
-            <a:pPr indent="0" marL="0">
+            <a:pPr marL="0" indent="0">
               <a:lnSpc>
                 <a:spcPct val="160000"/>
               </a:lnSpc>
@@ -31400,43 +32076,11 @@
                 <a:ea typeface="Pretendard" pitchFamily="34" charset="-122"/>
                 <a:cs typeface="Pretendard" pitchFamily="34" charset="-120"/>
               </a:rPr>
-              <a:t>• 특정 패턴(H&amp;S)이 5~7% 초과수익 예측 (Savin 2007)</a:t>
+              <a:t>• 특정 패턴(H&amp;S)이 5~7% 초과수익 예측 (Savin 2007)• DTW 기반 매칭으로 방향 예측 79% (Yao 2017)• 패턴 클러스터링으로 벤치마크 대비 60%+ 초과 (Nakagawa 2019)</a:t>
             </a:r>
-            <a:pPr indent="0" marL="0">
-              <a:lnSpc>
-                <a:spcPct val="160000"/>
-              </a:lnSpc>
-              <a:buNone/>
-            </a:pPr>
-            <a:r>
-              <a:rPr lang="en-US" sz="1300" dirty="0">
-                <a:solidFill>
-                  <a:srgbClr val="4A5568"/>
-                </a:solidFill>
-                <a:latin typeface="Pretendard" pitchFamily="34" charset="0"/>
-                <a:ea typeface="Pretendard" pitchFamily="34" charset="-122"/>
-                <a:cs typeface="Pretendard" pitchFamily="34" charset="-120"/>
-              </a:rPr>
-              <a:t>• DTW 기반 매칭으로 방향 예측 79% (Yao 2017)</a:t>
-            </a:r>
-            <a:pPr indent="0" marL="0">
-              <a:lnSpc>
-                <a:spcPct val="160000"/>
-              </a:lnSpc>
-              <a:buNone/>
-            </a:pPr>
-            <a:r>
-              <a:rPr lang="en-US" sz="1300" dirty="0">
-                <a:solidFill>
-                  <a:srgbClr val="4A5568"/>
-                </a:solidFill>
-                <a:latin typeface="Pretendard" pitchFamily="34" charset="0"/>
-                <a:ea typeface="Pretendard" pitchFamily="34" charset="-122"/>
-                <a:cs typeface="Pretendard" pitchFamily="34" charset="-120"/>
-              </a:rPr>
-              <a:t>• 패턴 클러스터링으로 벤치마크 대비 60%+ 초과 (Nakagawa 2019)</a:t>
-            </a:r>
-            <a:pPr indent="0" marL="0">
+          </a:p>
+          <a:p>
+            <a:pPr marL="0" indent="0">
               <a:lnSpc>
                 <a:spcPct val="160000"/>
               </a:lnSpc>
@@ -31478,6 +32122,13 @@
           </a:solidFill>
           <a:ln/>
         </p:spPr>
+        <p:txBody>
+          <a:bodyPr/>
+          <a:lstStyle/>
+          <a:p>
+            <a:endParaRPr lang="ko-KR" altLang="en-US"/>
+          </a:p>
+        </p:txBody>
       </p:sp>
       <p:sp>
         <p:nvSpPr>
@@ -31500,7 +32151,7 @@
           <a:bodyPr wrap="square" rtlCol="0" anchor="ctr"/>
           <a:lstStyle/>
           <a:p>
-            <a:pPr indent="0" marL="0">
+            <a:pPr marL="0" indent="0">
               <a:buNone/>
             </a:pPr>
             <a:r>
@@ -31539,7 +32190,7 @@
           <a:bodyPr wrap="square" rtlCol="0" anchor="ctr"/>
           <a:lstStyle/>
           <a:p>
-            <a:pPr indent="0" marL="0">
+            <a:pPr marL="0" indent="0">
               <a:lnSpc>
                 <a:spcPct val="160000"/>
               </a:lnSpc>
@@ -31554,43 +32205,11 @@
                 <a:ea typeface="Pretendard" pitchFamily="34" charset="-122"/>
                 <a:cs typeface="Pretendard" pitchFamily="34" charset="-120"/>
               </a:rPr>
-              <a:t>• 범용 클러스터링 = 수익 차이 없음 (JP Morgan)</a:t>
+              <a:t>• 범용 클러스터링 = 수익 차이 없음 (JP Morgan)• 패턴은 랜덤 발생 가능 (Nature 2025)• 거래비용 반영 시 엣지 소멸 가능 (Lo 2000)</a:t>
             </a:r>
-            <a:pPr indent="0" marL="0">
-              <a:lnSpc>
-                <a:spcPct val="160000"/>
-              </a:lnSpc>
-              <a:buNone/>
-            </a:pPr>
-            <a:r>
-              <a:rPr lang="en-US" sz="1300" dirty="0">
-                <a:solidFill>
-                  <a:srgbClr val="4A5568"/>
-                </a:solidFill>
-                <a:latin typeface="Pretendard" pitchFamily="34" charset="0"/>
-                <a:ea typeface="Pretendard" pitchFamily="34" charset="-122"/>
-                <a:cs typeface="Pretendard" pitchFamily="34" charset="-120"/>
-              </a:rPr>
-              <a:t>• 패턴은 랜덤 발생 가능 (Nature 2025)</a:t>
-            </a:r>
-            <a:pPr indent="0" marL="0">
-              <a:lnSpc>
-                <a:spcPct val="160000"/>
-              </a:lnSpc>
-              <a:buNone/>
-            </a:pPr>
-            <a:r>
-              <a:rPr lang="en-US" sz="1300" dirty="0">
-                <a:solidFill>
-                  <a:srgbClr val="4A5568"/>
-                </a:solidFill>
-                <a:latin typeface="Pretendard" pitchFamily="34" charset="0"/>
-                <a:ea typeface="Pretendard" pitchFamily="34" charset="-122"/>
-                <a:cs typeface="Pretendard" pitchFamily="34" charset="-120"/>
-              </a:rPr>
-              <a:t>• 거래비용 반영 시 엣지 소멸 가능 (Lo 2000)</a:t>
-            </a:r>
-            <a:pPr indent="0" marL="0">
+          </a:p>
+          <a:p>
+            <a:pPr marL="0" indent="0">
               <a:lnSpc>
                 <a:spcPct val="160000"/>
               </a:lnSpc>
@@ -31655,6 +32274,13 @@
           </a:solidFill>
           <a:ln/>
         </p:spPr>
+        <p:txBody>
+          <a:bodyPr/>
+          <a:lstStyle/>
+          <a:p>
+            <a:endParaRPr lang="ko-KR" altLang="en-US"/>
+          </a:p>
+        </p:txBody>
       </p:sp>
       <p:sp>
         <p:nvSpPr>
@@ -31679,11 +32305,11 @@
           </a:bodyPr>
           <a:lstStyle/>
           <a:p>
-            <a:pPr indent="0" marL="0">
+            <a:pPr marL="0" indent="0">
               <a:buNone/>
             </a:pPr>
             <a:r>
-              <a:rPr lang="en-US" sz="2800" b="1" spc="-30" kern="0" dirty="0">
+              <a:rPr lang="en-US" sz="2800" b="1" kern="0" spc="-30" dirty="0">
                 <a:solidFill>
                   <a:srgbClr val="1A1F36"/>
                 </a:solidFill>
@@ -31718,7 +32344,7 @@
           <a:bodyPr wrap="square" rtlCol="0" anchor="ctr"/>
           <a:lstStyle/>
           <a:p>
-            <a:pPr algn="r" indent="0" marL="0">
+            <a:pPr marL="0" indent="0" algn="r">
               <a:buNone/>
             </a:pPr>
             <a:r>
@@ -31752,15 +32378,27 @@
         </p:nvGraphicFramePr>
         <p:xfrm>
           <a:off x="548640" y="1645920"/>
-          <a:ext cx="11091672" cy="914400"/>
+          <a:ext cx="11091672" cy="1767840"/>
         </p:xfrm>
         <a:graphic>
           <a:graphicData uri="http://schemas.openxmlformats.org/drawingml/2006/table">
             <a:tbl>
               <a:tblPr/>
               <a:tblGrid>
-                <a:gridCol w="5545836"/>
-                <a:gridCol w="5545836"/>
+                <a:gridCol w="5545836">
+                  <a:extLst>
+                    <a:ext uri="{9D8B030D-6E8A-4147-A177-3AD203B41FA5}">
+                      <a16:colId xmlns:a16="http://schemas.microsoft.com/office/drawing/2014/main" val="20000"/>
+                    </a:ext>
+                  </a:extLst>
+                </a:gridCol>
+                <a:gridCol w="5545836">
+                  <a:extLst>
+                    <a:ext uri="{9D8B030D-6E8A-4147-A177-3AD203B41FA5}">
+                      <a16:colId xmlns:a16="http://schemas.microsoft.com/office/drawing/2014/main" val="20001"/>
+                    </a:ext>
+                  </a:extLst>
+                </a:gridCol>
               </a:tblGrid>
               <a:tr h="0">
                 <a:tc>
@@ -31768,7 +32406,7 @@
                     <a:bodyPr/>
                     <a:lstStyle/>
                     <a:p>
-                      <a:pPr algn="ctr" indent="0" marL="0">
+                      <a:pPr marL="0" indent="0" algn="ctr">
                         <a:buNone/>
                       </a:pPr>
                       <a:r>
@@ -31836,7 +32474,7 @@
                     <a:bodyPr/>
                     <a:lstStyle/>
                     <a:p>
-                      <a:pPr algn="ctr" indent="0" marL="0">
+                      <a:pPr marL="0" indent="0" algn="ctr">
                         <a:buNone/>
                       </a:pPr>
                       <a:r>
@@ -31899,6 +32537,11 @@
                     </a:solidFill>
                   </a:tcPr>
                 </a:tc>
+                <a:extLst>
+                  <a:ext uri="{0D108BD9-81ED-4DB2-BD59-A6C34878D82A}">
+                    <a16:rowId xmlns:a16="http://schemas.microsoft.com/office/drawing/2014/main" val="10000"/>
+                  </a:ext>
+                </a:extLst>
               </a:tr>
               <a:tr h="0">
                 <a:tc>
@@ -31906,7 +32549,7 @@
                     <a:bodyPr/>
                     <a:lstStyle/>
                     <a:p>
-                      <a:pPr indent="0" marL="0">
+                      <a:pPr marL="0" indent="0">
                         <a:buNone/>
                       </a:pPr>
                       <a:r>
@@ -31971,7 +32614,7 @@
                     <a:bodyPr/>
                     <a:lstStyle/>
                     <a:p>
-                      <a:pPr indent="0" marL="0">
+                      <a:pPr marL="0" indent="0">
                         <a:buNone/>
                       </a:pPr>
                       <a:r>
@@ -32031,6 +32674,11 @@
                     </a:lnB>
                   </a:tcPr>
                 </a:tc>
+                <a:extLst>
+                  <a:ext uri="{0D108BD9-81ED-4DB2-BD59-A6C34878D82A}">
+                    <a16:rowId xmlns:a16="http://schemas.microsoft.com/office/drawing/2014/main" val="10001"/>
+                  </a:ext>
+                </a:extLst>
               </a:tr>
               <a:tr h="0">
                 <a:tc>
@@ -32038,7 +32686,7 @@
                     <a:bodyPr/>
                     <a:lstStyle/>
                     <a:p>
-                      <a:pPr indent="0" marL="0">
+                      <a:pPr marL="0" indent="0">
                         <a:buNone/>
                       </a:pPr>
                       <a:r>
@@ -32106,7 +32754,7 @@
                     <a:bodyPr/>
                     <a:lstStyle/>
                     <a:p>
-                      <a:pPr indent="0" marL="0">
+                      <a:pPr marL="0" indent="0">
                         <a:buNone/>
                       </a:pPr>
                       <a:r>
@@ -32169,6 +32817,11 @@
                     </a:solidFill>
                   </a:tcPr>
                 </a:tc>
+                <a:extLst>
+                  <a:ext uri="{0D108BD9-81ED-4DB2-BD59-A6C34878D82A}">
+                    <a16:rowId xmlns:a16="http://schemas.microsoft.com/office/drawing/2014/main" val="10002"/>
+                  </a:ext>
+                </a:extLst>
               </a:tr>
               <a:tr h="0">
                 <a:tc>
@@ -32176,7 +32829,7 @@
                     <a:bodyPr/>
                     <a:lstStyle/>
                     <a:p>
-                      <a:pPr indent="0" marL="0">
+                      <a:pPr marL="0" indent="0">
                         <a:buNone/>
                       </a:pPr>
                       <a:r>
@@ -32241,7 +32894,7 @@
                     <a:bodyPr/>
                     <a:lstStyle/>
                     <a:p>
-                      <a:pPr indent="0" marL="0">
+                      <a:pPr marL="0" indent="0">
                         <a:buNone/>
                       </a:pPr>
                       <a:r>
@@ -32301,6 +32954,11 @@
                     </a:lnB>
                   </a:tcPr>
                 </a:tc>
+                <a:extLst>
+                  <a:ext uri="{0D108BD9-81ED-4DB2-BD59-A6C34878D82A}">
+                    <a16:rowId xmlns:a16="http://schemas.microsoft.com/office/drawing/2014/main" val="10003"/>
+                  </a:ext>
+                </a:extLst>
               </a:tr>
               <a:tr h="0">
                 <a:tc>
@@ -32308,7 +32966,7 @@
                     <a:bodyPr/>
                     <a:lstStyle/>
                     <a:p>
-                      <a:pPr indent="0" marL="0">
+                      <a:pPr marL="0" indent="0">
                         <a:buNone/>
                       </a:pPr>
                       <a:r>
@@ -32376,7 +33034,7 @@
                     <a:bodyPr/>
                     <a:lstStyle/>
                     <a:p>
-                      <a:pPr indent="0" marL="0">
+                      <a:pPr marL="0" indent="0">
                         <a:buNone/>
                       </a:pPr>
                       <a:r>
@@ -32439,6 +33097,11 @@
                     </a:solidFill>
                   </a:tcPr>
                 </a:tc>
+                <a:extLst>
+                  <a:ext uri="{0D108BD9-81ED-4DB2-BD59-A6C34878D82A}">
+                    <a16:rowId xmlns:a16="http://schemas.microsoft.com/office/drawing/2014/main" val="10004"/>
+                  </a:ext>
+                </a:extLst>
               </a:tr>
               <a:tr h="0">
                 <a:tc>
@@ -32446,7 +33109,7 @@
                     <a:bodyPr/>
                     <a:lstStyle/>
                     <a:p>
-                      <a:pPr indent="0" marL="0">
+                      <a:pPr marL="0" indent="0">
                         <a:buNone/>
                       </a:pPr>
                       <a:r>
@@ -32511,7 +33174,7 @@
                     <a:bodyPr/>
                     <a:lstStyle/>
                     <a:p>
-                      <a:pPr indent="0" marL="0">
+                      <a:pPr marL="0" indent="0">
                         <a:buNone/>
                       </a:pPr>
                       <a:r>
@@ -32571,6 +33234,11 @@
                     </a:lnB>
                   </a:tcPr>
                 </a:tc>
+                <a:extLst>
+                  <a:ext uri="{0D108BD9-81ED-4DB2-BD59-A6C34878D82A}">
+                    <a16:rowId xmlns:a16="http://schemas.microsoft.com/office/drawing/2014/main" val="10005"/>
+                  </a:ext>
+                </a:extLst>
               </a:tr>
             </a:tbl>
           </a:graphicData>
@@ -32597,7 +33265,7 @@
           <a:bodyPr wrap="square" rtlCol="0" anchor="ctr"/>
           <a:lstStyle/>
           <a:p>
-            <a:pPr indent="0" marL="0">
+            <a:pPr marL="0" indent="0">
               <a:lnSpc>
                 <a:spcPct val="140000"/>
               </a:lnSpc>
@@ -32662,6 +33330,13 @@
           </a:solidFill>
           <a:ln/>
         </p:spPr>
+        <p:txBody>
+          <a:bodyPr/>
+          <a:lstStyle/>
+          <a:p>
+            <a:endParaRPr lang="ko-KR" altLang="en-US"/>
+          </a:p>
+        </p:txBody>
       </p:sp>
       <p:sp>
         <p:nvSpPr>
@@ -32684,7 +33359,7 @@
           <a:bodyPr wrap="square" rtlCol="0" anchor="ctr"/>
           <a:lstStyle/>
           <a:p>
-            <a:pPr algn="ctr" indent="0" marL="0">
+            <a:pPr marL="0" indent="0" algn="ctr">
               <a:buNone/>
             </a:pPr>
             <a:r>
@@ -32723,7 +33398,7 @@
           <a:bodyPr wrap="square" rtlCol="0" anchor="ctr"/>
           <a:lstStyle/>
           <a:p>
-            <a:pPr indent="0" marL="0">
+            <a:pPr marL="0" indent="0">
               <a:lnSpc>
                 <a:spcPct val="115000"/>
               </a:lnSpc>
@@ -32743,7 +33418,7 @@
             <a:endParaRPr lang="en-US" sz="3400" dirty="0"/>
           </a:p>
           <a:p>
-            <a:pPr indent="0" marL="0">
+            <a:pPr marL="0" indent="0">
               <a:lnSpc>
                 <a:spcPct val="115000"/>
               </a:lnSpc>
@@ -32785,7 +33460,7 @@
           <a:bodyPr wrap="square" rtlCol="0" anchor="ctr"/>
           <a:lstStyle/>
           <a:p>
-            <a:pPr indent="0" marL="0">
+            <a:pPr marL="0" indent="0">
               <a:buNone/>
             </a:pPr>
             <a:r>
@@ -32847,6 +33522,13 @@
           </a:solidFill>
           <a:ln/>
         </p:spPr>
+        <p:txBody>
+          <a:bodyPr/>
+          <a:lstStyle/>
+          <a:p>
+            <a:endParaRPr lang="ko-KR" altLang="en-US"/>
+          </a:p>
+        </p:txBody>
       </p:sp>
       <p:sp>
         <p:nvSpPr>
@@ -32871,11 +33553,11 @@
           </a:bodyPr>
           <a:lstStyle/>
           <a:p>
-            <a:pPr indent="0" marL="0">
+            <a:pPr marL="0" indent="0">
               <a:buNone/>
             </a:pPr>
             <a:r>
-              <a:rPr lang="en-US" sz="2800" b="1" spc="-30" kern="0" dirty="0">
+              <a:rPr lang="en-US" sz="2800" b="1" kern="0" spc="-30" dirty="0">
                 <a:solidFill>
                   <a:srgbClr val="1A1F36"/>
                 </a:solidFill>
@@ -32910,7 +33592,7 @@
           <a:bodyPr wrap="square" rtlCol="0" anchor="ctr"/>
           <a:lstStyle/>
           <a:p>
-            <a:pPr algn="r" indent="0" marL="0">
+            <a:pPr marL="0" indent="0" algn="r">
               <a:buNone/>
             </a:pPr>
             <a:r>
@@ -32947,6 +33629,13 @@
           </a:solidFill>
           <a:ln/>
         </p:spPr>
+        <p:txBody>
+          <a:bodyPr/>
+          <a:lstStyle/>
+          <a:p>
+            <a:endParaRPr lang="ko-KR" altLang="en-US"/>
+          </a:p>
+        </p:txBody>
       </p:sp>
       <p:sp>
         <p:nvSpPr>
@@ -32967,6 +33656,13 @@
           </a:solidFill>
           <a:ln/>
         </p:spPr>
+        <p:txBody>
+          <a:bodyPr/>
+          <a:lstStyle/>
+          <a:p>
+            <a:endParaRPr lang="ko-KR" altLang="en-US"/>
+          </a:p>
+        </p:txBody>
       </p:sp>
       <p:sp>
         <p:nvSpPr>
@@ -32989,7 +33685,7 @@
           <a:bodyPr wrap="square" rtlCol="0" anchor="ctr"/>
           <a:lstStyle/>
           <a:p>
-            <a:pPr indent="0" marL="0">
+            <a:pPr marL="0" indent="0">
               <a:buNone/>
             </a:pPr>
             <a:r>
@@ -33028,7 +33724,7 @@
           <a:bodyPr wrap="square" rtlCol="0" anchor="ctr"/>
           <a:lstStyle/>
           <a:p>
-            <a:pPr indent="0" marL="0">
+            <a:pPr marL="0" indent="0">
               <a:buNone/>
             </a:pPr>
             <a:r>
@@ -33067,7 +33763,7 @@
           <a:bodyPr wrap="square" rtlCol="0" anchor="ctr"/>
           <a:lstStyle/>
           <a:p>
-            <a:pPr indent="0" marL="0">
+            <a:pPr marL="0" indent="0">
               <a:buNone/>
             </a:pPr>
             <a:r>
@@ -33107,6 +33803,13 @@
             <a:prstDash val="solid"/>
           </a:ln>
         </p:spPr>
+        <p:txBody>
+          <a:bodyPr/>
+          <a:lstStyle/>
+          <a:p>
+            <a:endParaRPr lang="ko-KR" altLang="en-US"/>
+          </a:p>
+        </p:txBody>
       </p:sp>
       <p:sp>
         <p:nvSpPr>
@@ -33127,6 +33830,13 @@
           </a:solidFill>
           <a:ln/>
         </p:spPr>
+        <p:txBody>
+          <a:bodyPr/>
+          <a:lstStyle/>
+          <a:p>
+            <a:endParaRPr lang="ko-KR" altLang="en-US"/>
+          </a:p>
+        </p:txBody>
       </p:sp>
       <p:sp>
         <p:nvSpPr>
@@ -33149,7 +33859,7 @@
           <a:bodyPr wrap="square" rtlCol="0" anchor="ctr"/>
           <a:lstStyle/>
           <a:p>
-            <a:pPr indent="0" marL="0">
+            <a:pPr marL="0" indent="0">
               <a:buNone/>
             </a:pPr>
             <a:r>
@@ -33188,7 +33898,7 @@
           <a:bodyPr wrap="square" rtlCol="0" anchor="ctr"/>
           <a:lstStyle/>
           <a:p>
-            <a:pPr indent="0" marL="0">
+            <a:pPr marL="0" indent="0">
               <a:buNone/>
             </a:pPr>
             <a:r>
@@ -33227,7 +33937,7 @@
           <a:bodyPr wrap="square" rtlCol="0" anchor="ctr"/>
           <a:lstStyle/>
           <a:p>
-            <a:pPr indent="0" marL="0">
+            <a:pPr marL="0" indent="0">
               <a:buNone/>
             </a:pPr>
             <a:r>
@@ -33267,6 +33977,13 @@
             <a:prstDash val="solid"/>
           </a:ln>
         </p:spPr>
+        <p:txBody>
+          <a:bodyPr/>
+          <a:lstStyle/>
+          <a:p>
+            <a:endParaRPr lang="ko-KR" altLang="en-US"/>
+          </a:p>
+        </p:txBody>
       </p:sp>
       <p:sp>
         <p:nvSpPr>
@@ -33287,6 +34004,13 @@
           </a:solidFill>
           <a:ln/>
         </p:spPr>
+        <p:txBody>
+          <a:bodyPr/>
+          <a:lstStyle/>
+          <a:p>
+            <a:endParaRPr lang="ko-KR" altLang="en-US"/>
+          </a:p>
+        </p:txBody>
       </p:sp>
       <p:sp>
         <p:nvSpPr>
@@ -33309,7 +34033,7 @@
           <a:bodyPr wrap="square" rtlCol="0" anchor="ctr"/>
           <a:lstStyle/>
           <a:p>
-            <a:pPr indent="0" marL="0">
+            <a:pPr marL="0" indent="0">
               <a:buNone/>
             </a:pPr>
             <a:r>
@@ -33348,7 +34072,7 @@
           <a:bodyPr wrap="square" rtlCol="0" anchor="ctr"/>
           <a:lstStyle/>
           <a:p>
-            <a:pPr indent="0" marL="0">
+            <a:pPr marL="0" indent="0">
               <a:buNone/>
             </a:pPr>
             <a:r>
@@ -33387,7 +34111,7 @@
           <a:bodyPr wrap="square" rtlCol="0" anchor="ctr"/>
           <a:lstStyle/>
           <a:p>
-            <a:pPr indent="0" marL="0">
+            <a:pPr marL="0" indent="0">
               <a:buNone/>
             </a:pPr>
             <a:r>
@@ -33427,6 +34151,13 @@
             <a:prstDash val="solid"/>
           </a:ln>
         </p:spPr>
+        <p:txBody>
+          <a:bodyPr/>
+          <a:lstStyle/>
+          <a:p>
+            <a:endParaRPr lang="ko-KR" altLang="en-US"/>
+          </a:p>
+        </p:txBody>
       </p:sp>
       <p:sp>
         <p:nvSpPr>
@@ -33447,6 +34178,13 @@
           </a:solidFill>
           <a:ln/>
         </p:spPr>
+        <p:txBody>
+          <a:bodyPr/>
+          <a:lstStyle/>
+          <a:p>
+            <a:endParaRPr lang="ko-KR" altLang="en-US"/>
+          </a:p>
+        </p:txBody>
       </p:sp>
       <p:sp>
         <p:nvSpPr>
@@ -33469,7 +34207,7 @@
           <a:bodyPr wrap="square" rtlCol="0" anchor="ctr"/>
           <a:lstStyle/>
           <a:p>
-            <a:pPr indent="0" marL="0">
+            <a:pPr marL="0" indent="0">
               <a:buNone/>
             </a:pPr>
             <a:r>
@@ -33508,7 +34246,7 @@
           <a:bodyPr wrap="square" rtlCol="0" anchor="ctr"/>
           <a:lstStyle/>
           <a:p>
-            <a:pPr indent="0" marL="0">
+            <a:pPr marL="0" indent="0">
               <a:buNone/>
             </a:pPr>
             <a:r>
@@ -33547,7 +34285,7 @@
           <a:bodyPr wrap="square" rtlCol="0" anchor="ctr"/>
           <a:lstStyle/>
           <a:p>
-            <a:pPr indent="0" marL="0">
+            <a:pPr marL="0" indent="0">
               <a:buNone/>
             </a:pPr>
             <a:r>
@@ -33609,6 +34347,13 @@
           </a:solidFill>
           <a:ln/>
         </p:spPr>
+        <p:txBody>
+          <a:bodyPr/>
+          <a:lstStyle/>
+          <a:p>
+            <a:endParaRPr lang="ko-KR" altLang="en-US"/>
+          </a:p>
+        </p:txBody>
       </p:sp>
       <p:sp>
         <p:nvSpPr>
@@ -33633,11 +34378,11 @@
           </a:bodyPr>
           <a:lstStyle/>
           <a:p>
-            <a:pPr indent="0" marL="0">
+            <a:pPr marL="0" indent="0">
               <a:buNone/>
             </a:pPr>
             <a:r>
-              <a:rPr lang="en-US" sz="2800" b="1" spc="-30" kern="0" dirty="0">
+              <a:rPr lang="en-US" sz="2800" b="1" kern="0" spc="-30" dirty="0">
                 <a:solidFill>
                   <a:srgbClr val="1A1F36"/>
                 </a:solidFill>
@@ -33672,7 +34417,7 @@
           <a:bodyPr wrap="square" rtlCol="0" anchor="ctr"/>
           <a:lstStyle/>
           <a:p>
-            <a:pPr algn="r" indent="0" marL="0">
+            <a:pPr marL="0" indent="0" algn="r">
               <a:buNone/>
             </a:pPr>
             <a:r>
@@ -33974,6 +34719,13 @@
           </a:solidFill>
           <a:ln/>
         </p:spPr>
+        <p:txBody>
+          <a:bodyPr/>
+          <a:lstStyle/>
+          <a:p>
+            <a:endParaRPr lang="ko-KR" altLang="en-US"/>
+          </a:p>
+        </p:txBody>
       </p:sp>
       <p:sp>
         <p:nvSpPr>
@@ -33998,11 +34750,11 @@
           </a:bodyPr>
           <a:lstStyle/>
           <a:p>
-            <a:pPr indent="0" marL="0">
+            <a:pPr marL="0" indent="0">
               <a:buNone/>
             </a:pPr>
             <a:r>
-              <a:rPr lang="en-US" sz="2800" b="1" spc="-30" kern="0" dirty="0">
+              <a:rPr lang="en-US" sz="2800" b="1" kern="0" spc="-30" dirty="0">
                 <a:solidFill>
                   <a:srgbClr val="1A1F36"/>
                 </a:solidFill>
@@ -34037,7 +34789,7 @@
           <a:bodyPr wrap="square" rtlCol="0" anchor="ctr"/>
           <a:lstStyle/>
           <a:p>
-            <a:pPr algn="r" indent="0" marL="0">
+            <a:pPr marL="0" indent="0" algn="r">
               <a:buNone/>
             </a:pPr>
             <a:r>
@@ -34076,6 +34828,13 @@
           </a:solidFill>
           <a:ln/>
         </p:spPr>
+        <p:txBody>
+          <a:bodyPr/>
+          <a:lstStyle/>
+          <a:p>
+            <a:endParaRPr lang="ko-KR" altLang="en-US"/>
+          </a:p>
+        </p:txBody>
       </p:sp>
       <p:sp>
         <p:nvSpPr>
@@ -34098,7 +34857,7 @@
           <a:bodyPr wrap="square" rtlCol="0" anchor="ctr"/>
           <a:lstStyle/>
           <a:p>
-            <a:pPr algn="ctr" indent="0" marL="0">
+            <a:pPr marL="0" indent="0" algn="ctr">
               <a:buNone/>
             </a:pPr>
             <a:r>
@@ -34137,7 +34896,7 @@
           <a:bodyPr wrap="square" rtlCol="0" anchor="ctr"/>
           <a:lstStyle/>
           <a:p>
-            <a:pPr algn="ctr" indent="0" marL="0">
+            <a:pPr marL="0" indent="0" algn="ctr">
               <a:buNone/>
             </a:pPr>
             <a:r>
@@ -34176,6 +34935,13 @@
           </a:solidFill>
           <a:ln/>
         </p:spPr>
+        <p:txBody>
+          <a:bodyPr/>
+          <a:lstStyle/>
+          <a:p>
+            <a:endParaRPr lang="ko-KR" altLang="en-US"/>
+          </a:p>
+        </p:txBody>
       </p:sp>
       <p:sp>
         <p:nvSpPr>
@@ -34198,7 +34964,7 @@
           <a:bodyPr wrap="square" rtlCol="0" anchor="ctr"/>
           <a:lstStyle/>
           <a:p>
-            <a:pPr algn="ctr" indent="0" marL="0">
+            <a:pPr marL="0" indent="0" algn="ctr">
               <a:buNone/>
             </a:pPr>
             <a:r>
@@ -34237,7 +35003,7 @@
           <a:bodyPr wrap="square" rtlCol="0" anchor="ctr"/>
           <a:lstStyle/>
           <a:p>
-            <a:pPr algn="ctr" indent="0" marL="0">
+            <a:pPr marL="0" indent="0" algn="ctr">
               <a:buNone/>
             </a:pPr>
             <a:r>
@@ -34276,6 +35042,13 @@
           </a:solidFill>
           <a:ln/>
         </p:spPr>
+        <p:txBody>
+          <a:bodyPr/>
+          <a:lstStyle/>
+          <a:p>
+            <a:endParaRPr lang="ko-KR" altLang="en-US"/>
+          </a:p>
+        </p:txBody>
       </p:sp>
       <p:sp>
         <p:nvSpPr>
@@ -34298,7 +35071,7 @@
           <a:bodyPr wrap="square" rtlCol="0" anchor="ctr"/>
           <a:lstStyle/>
           <a:p>
-            <a:pPr algn="ctr" indent="0" marL="0">
+            <a:pPr marL="0" indent="0" algn="ctr">
               <a:buNone/>
             </a:pPr>
             <a:r>
@@ -34337,7 +35110,7 @@
           <a:bodyPr wrap="square" rtlCol="0" anchor="ctr"/>
           <a:lstStyle/>
           <a:p>
-            <a:pPr algn="ctr" indent="0" marL="0">
+            <a:pPr marL="0" indent="0" algn="ctr">
               <a:buNone/>
             </a:pPr>
             <a:r>
@@ -34376,7 +35149,7 @@
           <a:bodyPr wrap="square" rtlCol="0" anchor="ctr"/>
           <a:lstStyle/>
           <a:p>
-            <a:pPr algn="ctr" indent="0" marL="0">
+            <a:pPr marL="0" indent="0" algn="ctr">
               <a:lnSpc>
                 <a:spcPct val="150000"/>
               </a:lnSpc>
@@ -34396,7 +35169,7 @@
             <a:endParaRPr lang="en-US" sz="1600" dirty="0"/>
           </a:p>
           <a:p>
-            <a:pPr algn="ctr" indent="0" marL="0">
+            <a:pPr marL="0" indent="0" algn="ctr">
               <a:lnSpc>
                 <a:spcPct val="150000"/>
               </a:lnSpc>
@@ -34461,6 +35234,13 @@
           </a:solidFill>
           <a:ln/>
         </p:spPr>
+        <p:txBody>
+          <a:bodyPr/>
+          <a:lstStyle/>
+          <a:p>
+            <a:endParaRPr lang="ko-KR" altLang="en-US"/>
+          </a:p>
+        </p:txBody>
       </p:sp>
       <p:sp>
         <p:nvSpPr>
@@ -34485,11 +35265,11 @@
           </a:bodyPr>
           <a:lstStyle/>
           <a:p>
-            <a:pPr indent="0" marL="0">
+            <a:pPr marL="0" indent="0">
               <a:buNone/>
             </a:pPr>
             <a:r>
-              <a:rPr lang="en-US" sz="2800" b="1" spc="-30" kern="0" dirty="0">
+              <a:rPr lang="en-US" sz="2800" b="1" kern="0" spc="-30" dirty="0">
                 <a:solidFill>
                   <a:srgbClr val="1A1F36"/>
                 </a:solidFill>
@@ -34524,7 +35304,7 @@
           <a:bodyPr wrap="square" rtlCol="0" anchor="ctr"/>
           <a:lstStyle/>
           <a:p>
-            <a:pPr algn="r" indent="0" marL="0">
+            <a:pPr marL="0" indent="0" algn="r">
               <a:buNone/>
             </a:pPr>
             <a:r>
@@ -34728,6 +35508,13 @@
           </a:solidFill>
           <a:ln/>
         </p:spPr>
+        <p:txBody>
+          <a:bodyPr/>
+          <a:lstStyle/>
+          <a:p>
+            <a:endParaRPr lang="ko-KR" altLang="en-US"/>
+          </a:p>
+        </p:txBody>
       </p:sp>
       <p:sp>
         <p:nvSpPr>
@@ -34752,11 +35539,11 @@
           </a:bodyPr>
           <a:lstStyle/>
           <a:p>
-            <a:pPr indent="0" marL="0">
+            <a:pPr marL="0" indent="0">
               <a:buNone/>
             </a:pPr>
             <a:r>
-              <a:rPr lang="en-US" sz="2800" b="1" spc="-30" kern="0" dirty="0">
+              <a:rPr lang="en-US" sz="2800" b="1" kern="0" spc="-30" dirty="0">
                 <a:solidFill>
                   <a:srgbClr val="1A1F36"/>
                 </a:solidFill>
@@ -34791,7 +35578,7 @@
           <a:bodyPr wrap="square" rtlCol="0" anchor="ctr"/>
           <a:lstStyle/>
           <a:p>
-            <a:pPr algn="r" indent="0" marL="0">
+            <a:pPr marL="0" indent="0" algn="r">
               <a:buNone/>
             </a:pPr>
             <a:r>
@@ -35117,6 +35904,13 @@
           </a:solidFill>
           <a:ln/>
         </p:spPr>
+        <p:txBody>
+          <a:bodyPr/>
+          <a:lstStyle/>
+          <a:p>
+            <a:endParaRPr lang="ko-KR" altLang="en-US"/>
+          </a:p>
+        </p:txBody>
       </p:sp>
       <p:sp>
         <p:nvSpPr>
@@ -35141,11 +35935,11 @@
           </a:bodyPr>
           <a:lstStyle/>
           <a:p>
-            <a:pPr indent="0" marL="0">
+            <a:pPr marL="0" indent="0">
               <a:buNone/>
             </a:pPr>
             <a:r>
-              <a:rPr lang="en-US" sz="2800" b="1" spc="-30" kern="0" dirty="0">
+              <a:rPr lang="en-US" sz="2800" b="1" kern="0" spc="-30" dirty="0">
                 <a:solidFill>
                   <a:srgbClr val="1A1F36"/>
                 </a:solidFill>
@@ -35180,7 +35974,7 @@
           <a:bodyPr wrap="square" rtlCol="0" anchor="ctr"/>
           <a:lstStyle/>
           <a:p>
-            <a:pPr algn="r" indent="0" marL="0">
+            <a:pPr marL="0" indent="0" algn="r">
               <a:buNone/>
             </a:pPr>
             <a:r>
@@ -35214,17 +36008,41 @@
         </p:nvGraphicFramePr>
         <p:xfrm>
           <a:off x="548640" y="1645920"/>
-          <a:ext cx="11091672" cy="914400"/>
+          <a:ext cx="11091672" cy="1386840"/>
         </p:xfrm>
         <a:graphic>
           <a:graphicData uri="http://schemas.openxmlformats.org/drawingml/2006/table">
             <a:tbl>
               <a:tblPr/>
               <a:tblGrid>
-                <a:gridCol w="2772918"/>
-                <a:gridCol w="2772918"/>
-                <a:gridCol w="2772918"/>
-                <a:gridCol w="2772918"/>
+                <a:gridCol w="2772918">
+                  <a:extLst>
+                    <a:ext uri="{9D8B030D-6E8A-4147-A177-3AD203B41FA5}">
+                      <a16:colId xmlns:a16="http://schemas.microsoft.com/office/drawing/2014/main" val="20000"/>
+                    </a:ext>
+                  </a:extLst>
+                </a:gridCol>
+                <a:gridCol w="2772918">
+                  <a:extLst>
+                    <a:ext uri="{9D8B030D-6E8A-4147-A177-3AD203B41FA5}">
+                      <a16:colId xmlns:a16="http://schemas.microsoft.com/office/drawing/2014/main" val="20001"/>
+                    </a:ext>
+                  </a:extLst>
+                </a:gridCol>
+                <a:gridCol w="2772918">
+                  <a:extLst>
+                    <a:ext uri="{9D8B030D-6E8A-4147-A177-3AD203B41FA5}">
+                      <a16:colId xmlns:a16="http://schemas.microsoft.com/office/drawing/2014/main" val="20002"/>
+                    </a:ext>
+                  </a:extLst>
+                </a:gridCol>
+                <a:gridCol w="2772918">
+                  <a:extLst>
+                    <a:ext uri="{9D8B030D-6E8A-4147-A177-3AD203B41FA5}">
+                      <a16:colId xmlns:a16="http://schemas.microsoft.com/office/drawing/2014/main" val="20003"/>
+                    </a:ext>
+                  </a:extLst>
+                </a:gridCol>
               </a:tblGrid>
               <a:tr h="0">
                 <a:tc>
@@ -35232,7 +36050,7 @@
                     <a:bodyPr/>
                     <a:lstStyle/>
                     <a:p>
-                      <a:pPr algn="ctr" indent="0" marL="0">
+                      <a:pPr marL="0" indent="0" algn="ctr">
                         <a:buNone/>
                       </a:pPr>
                       <a:r>
@@ -35300,7 +36118,7 @@
                     <a:bodyPr/>
                     <a:lstStyle/>
                     <a:p>
-                      <a:pPr algn="ctr" indent="0" marL="0">
+                      <a:pPr marL="0" indent="0" algn="ctr">
                         <a:buNone/>
                       </a:pPr>
                       <a:r>
@@ -35368,7 +36186,7 @@
                     <a:bodyPr/>
                     <a:lstStyle/>
                     <a:p>
-                      <a:pPr algn="ctr" indent="0" marL="0">
+                      <a:pPr marL="0" indent="0" algn="ctr">
                         <a:buNone/>
                       </a:pPr>
                       <a:r>
@@ -35436,7 +36254,7 @@
                     <a:bodyPr/>
                     <a:lstStyle/>
                     <a:p>
-                      <a:pPr algn="ctr" indent="0" marL="0">
+                      <a:pPr marL="0" indent="0" algn="ctr">
                         <a:buNone/>
                       </a:pPr>
                       <a:r>
@@ -35499,6 +36317,11 @@
                     </a:solidFill>
                   </a:tcPr>
                 </a:tc>
+                <a:extLst>
+                  <a:ext uri="{0D108BD9-81ED-4DB2-BD59-A6C34878D82A}">
+                    <a16:rowId xmlns:a16="http://schemas.microsoft.com/office/drawing/2014/main" val="10000"/>
+                  </a:ext>
+                </a:extLst>
               </a:tr>
               <a:tr h="0">
                 <a:tc>
@@ -35506,7 +36329,7 @@
                     <a:bodyPr/>
                     <a:lstStyle/>
                     <a:p>
-                      <a:pPr indent="0" marL="0">
+                      <a:pPr marL="0" indent="0">
                         <a:buNone/>
                       </a:pPr>
                       <a:r>
@@ -35571,7 +36394,7 @@
                     <a:bodyPr/>
                     <a:lstStyle/>
                     <a:p>
-                      <a:pPr indent="0" marL="0">
+                      <a:pPr marL="0" indent="0">
                         <a:buNone/>
                       </a:pPr>
                       <a:r>
@@ -35636,7 +36459,7 @@
                     <a:bodyPr/>
                     <a:lstStyle/>
                     <a:p>
-                      <a:pPr indent="0" marL="0">
+                      <a:pPr marL="0" indent="0">
                         <a:buNone/>
                       </a:pPr>
                       <a:r>
@@ -35657,7 +36480,7 @@
                       </a:endParaRPr>
                     </a:p>
                     <a:p>
-                      <a:pPr indent="0" marL="0">
+                      <a:pPr marL="0" indent="0">
                         <a:buNone/>
                       </a:pPr>
                       <a:r>
@@ -35722,7 +36545,7 @@
                     <a:bodyPr/>
                     <a:lstStyle/>
                     <a:p>
-                      <a:pPr indent="0" marL="0">
+                      <a:pPr marL="0" indent="0">
                         <a:buNone/>
                       </a:pPr>
                       <a:r>
@@ -35743,7 +36566,7 @@
                       </a:endParaRPr>
                     </a:p>
                     <a:p>
-                      <a:pPr indent="0" marL="0">
+                      <a:pPr marL="0" indent="0">
                         <a:buNone/>
                       </a:pPr>
                       <a:r>
@@ -35803,6 +36626,11 @@
                     </a:lnB>
                   </a:tcPr>
                 </a:tc>
+                <a:extLst>
+                  <a:ext uri="{0D108BD9-81ED-4DB2-BD59-A6C34878D82A}">
+                    <a16:rowId xmlns:a16="http://schemas.microsoft.com/office/drawing/2014/main" val="10001"/>
+                  </a:ext>
+                </a:extLst>
               </a:tr>
               <a:tr h="0">
                 <a:tc>
@@ -35810,7 +36638,7 @@
                     <a:bodyPr/>
                     <a:lstStyle/>
                     <a:p>
-                      <a:pPr indent="0" marL="0">
+                      <a:pPr marL="0" indent="0">
                         <a:buNone/>
                       </a:pPr>
                       <a:r>
@@ -35878,7 +36706,7 @@
                     <a:bodyPr/>
                     <a:lstStyle/>
                     <a:p>
-                      <a:pPr indent="0" marL="0">
+                      <a:pPr marL="0" indent="0">
                         <a:buNone/>
                       </a:pPr>
                       <a:r>
@@ -35946,7 +36774,7 @@
                     <a:bodyPr/>
                     <a:lstStyle/>
                     <a:p>
-                      <a:pPr indent="0" marL="0">
+                      <a:pPr marL="0" indent="0">
                         <a:buNone/>
                       </a:pPr>
                       <a:r>
@@ -35967,7 +36795,7 @@
                       </a:endParaRPr>
                     </a:p>
                     <a:p>
-                      <a:pPr indent="0" marL="0">
+                      <a:pPr marL="0" indent="0">
                         <a:buNone/>
                       </a:pPr>
                       <a:r>
@@ -35988,7 +36816,7 @@
                       </a:endParaRPr>
                     </a:p>
                     <a:p>
-                      <a:pPr indent="0" marL="0">
+                      <a:pPr marL="0" indent="0">
                         <a:buNone/>
                       </a:pPr>
                       <a:r>
@@ -36056,7 +36884,7 @@
                     <a:bodyPr/>
                     <a:lstStyle/>
                     <a:p>
-                      <a:pPr indent="0" marL="0">
+                      <a:pPr marL="0" indent="0">
                         <a:buNone/>
                       </a:pPr>
                       <a:r>
@@ -36077,7 +36905,7 @@
                       </a:endParaRPr>
                     </a:p>
                     <a:p>
-                      <a:pPr indent="0" marL="0">
+                      <a:pPr marL="0" indent="0">
                         <a:buNone/>
                       </a:pPr>
                       <a:r>
@@ -36098,7 +36926,7 @@
                       </a:endParaRPr>
                     </a:p>
                     <a:p>
-                      <a:pPr indent="0" marL="0">
+                      <a:pPr marL="0" indent="0">
                         <a:buNone/>
                       </a:pPr>
                       <a:r>
@@ -36161,6 +36989,11 @@
                     </a:solidFill>
                   </a:tcPr>
                 </a:tc>
+                <a:extLst>
+                  <a:ext uri="{0D108BD9-81ED-4DB2-BD59-A6C34878D82A}">
+                    <a16:rowId xmlns:a16="http://schemas.microsoft.com/office/drawing/2014/main" val="10002"/>
+                  </a:ext>
+                </a:extLst>
               </a:tr>
             </a:tbl>
           </a:graphicData>
@@ -36187,7 +37020,7 @@
           <a:bodyPr wrap="square" rtlCol="0" anchor="ctr"/>
           <a:lstStyle/>
           <a:p>
-            <a:pPr indent="0" marL="0">
+            <a:pPr marL="0" indent="0">
               <a:lnSpc>
                 <a:spcPct val="150000"/>
               </a:lnSpc>
@@ -36207,7 +37040,7 @@
             <a:endParaRPr lang="en-US" sz="1500" dirty="0"/>
           </a:p>
           <a:p>
-            <a:pPr indent="0" marL="0">
+            <a:pPr marL="0" indent="0">
               <a:lnSpc>
                 <a:spcPct val="150000"/>
               </a:lnSpc>
@@ -36272,6 +37105,13 @@
           </a:solidFill>
           <a:ln/>
         </p:spPr>
+        <p:txBody>
+          <a:bodyPr/>
+          <a:lstStyle/>
+          <a:p>
+            <a:endParaRPr lang="ko-KR" altLang="en-US"/>
+          </a:p>
+        </p:txBody>
       </p:sp>
       <p:sp>
         <p:nvSpPr>
@@ -36294,7 +37134,7 @@
           <a:bodyPr wrap="square" rtlCol="0" anchor="ctr"/>
           <a:lstStyle/>
           <a:p>
-            <a:pPr algn="ctr" indent="0" marL="0">
+            <a:pPr marL="0" indent="0" algn="ctr">
               <a:buNone/>
             </a:pPr>
             <a:r>
@@ -36333,7 +37173,7 @@
           <a:bodyPr wrap="square" rtlCol="0" anchor="ctr"/>
           <a:lstStyle/>
           <a:p>
-            <a:pPr indent="0" marL="0">
+            <a:pPr marL="0" indent="0">
               <a:buNone/>
             </a:pPr>
             <a:r>
@@ -36372,7 +37212,7 @@
           <a:bodyPr wrap="square" rtlCol="0" anchor="ctr"/>
           <a:lstStyle/>
           <a:p>
-            <a:pPr indent="0" marL="0">
+            <a:pPr marL="0" indent="0">
               <a:buNone/>
             </a:pPr>
             <a:r>
@@ -36434,6 +37274,13 @@
           </a:solidFill>
           <a:ln/>
         </p:spPr>
+        <p:txBody>
+          <a:bodyPr/>
+          <a:lstStyle/>
+          <a:p>
+            <a:endParaRPr lang="ko-KR" altLang="en-US"/>
+          </a:p>
+        </p:txBody>
       </p:sp>
       <p:sp>
         <p:nvSpPr>
@@ -36458,11 +37305,11 @@
           </a:bodyPr>
           <a:lstStyle/>
           <a:p>
-            <a:pPr indent="0" marL="0">
+            <a:pPr marL="0" indent="0">
               <a:buNone/>
             </a:pPr>
             <a:r>
-              <a:rPr lang="en-US" sz="2800" b="1" spc="-30" kern="0" dirty="0">
+              <a:rPr lang="en-US" sz="2800" b="1" kern="0" spc="-30" dirty="0">
                 <a:solidFill>
                   <a:srgbClr val="1A1F36"/>
                 </a:solidFill>
@@ -36497,7 +37344,7 @@
           <a:bodyPr wrap="square" rtlCol="0" anchor="ctr"/>
           <a:lstStyle/>
           <a:p>
-            <a:pPr algn="r" indent="0" marL="0">
+            <a:pPr marL="0" indent="0" algn="r">
               <a:buNone/>
             </a:pPr>
             <a:r>
@@ -36536,13 +37383,20 @@
           </a:solidFill>
           <a:ln/>
           <a:effectLst>
-            <a:outerShdw sx="100000" sy="100000" kx="0" ky="0" algn="bl" rotWithShape="0" blurRad="76200" dist="25400" dir="16200000">
+            <a:outerShdw blurRad="76200" dist="25400" dir="16200000" algn="bl" rotWithShape="0">
               <a:srgbClr val="000000">
                 <a:alpha val="8000"/>
               </a:srgbClr>
             </a:outerShdw>
           </a:effectLst>
         </p:spPr>
+        <p:txBody>
+          <a:bodyPr/>
+          <a:lstStyle/>
+          <a:p>
+            <a:endParaRPr lang="ko-KR" altLang="en-US"/>
+          </a:p>
+        </p:txBody>
       </p:sp>
       <p:sp>
         <p:nvSpPr>
@@ -36563,6 +37417,13 @@
           </a:solidFill>
           <a:ln/>
         </p:spPr>
+        <p:txBody>
+          <a:bodyPr/>
+          <a:lstStyle/>
+          <a:p>
+            <a:endParaRPr lang="ko-KR" altLang="en-US"/>
+          </a:p>
+        </p:txBody>
       </p:sp>
       <p:sp>
         <p:nvSpPr>
@@ -36587,7 +37448,7 @@
           </a:bodyPr>
           <a:lstStyle/>
           <a:p>
-            <a:pPr indent="0" marL="0">
+            <a:pPr marL="0" indent="0">
               <a:buNone/>
             </a:pPr>
             <a:r>
@@ -36628,7 +37489,7 @@
           </a:bodyPr>
           <a:lstStyle/>
           <a:p>
-            <a:pPr indent="0" marL="0">
+            <a:pPr marL="0" indent="0">
               <a:lnSpc>
                 <a:spcPct val="135000"/>
               </a:lnSpc>
@@ -36648,7 +37509,7 @@
             <a:endParaRPr lang="en-US" sz="1200" dirty="0"/>
           </a:p>
           <a:p>
-            <a:pPr indent="0" marL="0">
+            <a:pPr marL="0" indent="0">
               <a:lnSpc>
                 <a:spcPct val="135000"/>
               </a:lnSpc>
@@ -36668,7 +37529,7 @@
             <a:endParaRPr lang="en-US" sz="1200" dirty="0"/>
           </a:p>
           <a:p>
-            <a:pPr indent="0" marL="0">
+            <a:pPr marL="0" indent="0">
               <a:lnSpc>
                 <a:spcPct val="135000"/>
               </a:lnSpc>
@@ -36710,13 +37571,20 @@
           </a:solidFill>
           <a:ln/>
           <a:effectLst>
-            <a:outerShdw sx="100000" sy="100000" kx="0" ky="0" algn="bl" rotWithShape="0" blurRad="76200" dist="25400" dir="16200000">
+            <a:outerShdw blurRad="76200" dist="25400" dir="16200000" algn="bl" rotWithShape="0">
               <a:srgbClr val="000000">
                 <a:alpha val="8000"/>
               </a:srgbClr>
             </a:outerShdw>
           </a:effectLst>
         </p:spPr>
+        <p:txBody>
+          <a:bodyPr/>
+          <a:lstStyle/>
+          <a:p>
+            <a:endParaRPr lang="ko-KR" altLang="en-US"/>
+          </a:p>
+        </p:txBody>
       </p:sp>
       <p:sp>
         <p:nvSpPr>
@@ -36737,6 +37605,13 @@
           </a:solidFill>
           <a:ln/>
         </p:spPr>
+        <p:txBody>
+          <a:bodyPr/>
+          <a:lstStyle/>
+          <a:p>
+            <a:endParaRPr lang="ko-KR" altLang="en-US"/>
+          </a:p>
+        </p:txBody>
       </p:sp>
       <p:sp>
         <p:nvSpPr>
@@ -36761,7 +37636,7 @@
           </a:bodyPr>
           <a:lstStyle/>
           <a:p>
-            <a:pPr indent="0" marL="0">
+            <a:pPr marL="0" indent="0">
               <a:buNone/>
             </a:pPr>
             <a:r>
@@ -36802,7 +37677,7 @@
           </a:bodyPr>
           <a:lstStyle/>
           <a:p>
-            <a:pPr indent="0" marL="0">
+            <a:pPr marL="0" indent="0">
               <a:lnSpc>
                 <a:spcPct val="135000"/>
               </a:lnSpc>
@@ -36822,7 +37697,7 @@
             <a:endParaRPr lang="en-US" sz="1200" dirty="0"/>
           </a:p>
           <a:p>
-            <a:pPr indent="0" marL="0">
+            <a:pPr marL="0" indent="0">
               <a:lnSpc>
                 <a:spcPct val="135000"/>
               </a:lnSpc>
@@ -36842,7 +37717,7 @@
             <a:endParaRPr lang="en-US" sz="1200" dirty="0"/>
           </a:p>
           <a:p>
-            <a:pPr indent="0" marL="0">
+            <a:pPr marL="0" indent="0">
               <a:lnSpc>
                 <a:spcPct val="135000"/>
               </a:lnSpc>
@@ -36884,13 +37759,20 @@
           </a:solidFill>
           <a:ln/>
           <a:effectLst>
-            <a:outerShdw sx="100000" sy="100000" kx="0" ky="0" algn="bl" rotWithShape="0" blurRad="76200" dist="25400" dir="16200000">
+            <a:outerShdw blurRad="76200" dist="25400" dir="16200000" algn="bl" rotWithShape="0">
               <a:srgbClr val="000000">
                 <a:alpha val="8000"/>
               </a:srgbClr>
             </a:outerShdw>
           </a:effectLst>
         </p:spPr>
+        <p:txBody>
+          <a:bodyPr/>
+          <a:lstStyle/>
+          <a:p>
+            <a:endParaRPr lang="ko-KR" altLang="en-US"/>
+          </a:p>
+        </p:txBody>
       </p:sp>
       <p:sp>
         <p:nvSpPr>
@@ -36911,6 +37793,13 @@
           </a:solidFill>
           <a:ln/>
         </p:spPr>
+        <p:txBody>
+          <a:bodyPr/>
+          <a:lstStyle/>
+          <a:p>
+            <a:endParaRPr lang="ko-KR" altLang="en-US"/>
+          </a:p>
+        </p:txBody>
       </p:sp>
       <p:sp>
         <p:nvSpPr>
@@ -36935,7 +37824,7 @@
           </a:bodyPr>
           <a:lstStyle/>
           <a:p>
-            <a:pPr indent="0" marL="0">
+            <a:pPr marL="0" indent="0">
               <a:buNone/>
             </a:pPr>
             <a:r>
@@ -36976,7 +37865,7 @@
           </a:bodyPr>
           <a:lstStyle/>
           <a:p>
-            <a:pPr indent="0" marL="0">
+            <a:pPr marL="0" indent="0">
               <a:lnSpc>
                 <a:spcPct val="135000"/>
               </a:lnSpc>
@@ -36996,7 +37885,7 @@
             <a:endParaRPr lang="en-US" sz="1200" dirty="0"/>
           </a:p>
           <a:p>
-            <a:pPr indent="0" marL="0">
+            <a:pPr marL="0" indent="0">
               <a:lnSpc>
                 <a:spcPct val="135000"/>
               </a:lnSpc>
@@ -37016,7 +37905,7 @@
             <a:endParaRPr lang="en-US" sz="1200" dirty="0"/>
           </a:p>
           <a:p>
-            <a:pPr indent="0" marL="0">
+            <a:pPr marL="0" indent="0">
               <a:lnSpc>
                 <a:spcPct val="135000"/>
               </a:lnSpc>
@@ -37058,13 +37947,20 @@
           </a:solidFill>
           <a:ln/>
           <a:effectLst>
-            <a:outerShdw sx="100000" sy="100000" kx="0" ky="0" algn="bl" rotWithShape="0" blurRad="76200" dist="25400" dir="16200000">
+            <a:outerShdw blurRad="76200" dist="25400" dir="16200000" algn="bl" rotWithShape="0">
               <a:srgbClr val="000000">
                 <a:alpha val="8000"/>
               </a:srgbClr>
             </a:outerShdw>
           </a:effectLst>
         </p:spPr>
+        <p:txBody>
+          <a:bodyPr/>
+          <a:lstStyle/>
+          <a:p>
+            <a:endParaRPr lang="ko-KR" altLang="en-US"/>
+          </a:p>
+        </p:txBody>
       </p:sp>
       <p:sp>
         <p:nvSpPr>
@@ -37085,6 +37981,13 @@
           </a:solidFill>
           <a:ln/>
         </p:spPr>
+        <p:txBody>
+          <a:bodyPr/>
+          <a:lstStyle/>
+          <a:p>
+            <a:endParaRPr lang="ko-KR" altLang="en-US"/>
+          </a:p>
+        </p:txBody>
       </p:sp>
       <p:sp>
         <p:nvSpPr>
@@ -37109,7 +38012,7 @@
           </a:bodyPr>
           <a:lstStyle/>
           <a:p>
-            <a:pPr indent="0" marL="0">
+            <a:pPr marL="0" indent="0">
               <a:buNone/>
             </a:pPr>
             <a:r>
@@ -37150,7 +38053,7 @@
           </a:bodyPr>
           <a:lstStyle/>
           <a:p>
-            <a:pPr indent="0" marL="0">
+            <a:pPr marL="0" indent="0">
               <a:lnSpc>
                 <a:spcPct val="135000"/>
               </a:lnSpc>
@@ -37170,7 +38073,7 @@
             <a:endParaRPr lang="en-US" sz="1200" dirty="0"/>
           </a:p>
           <a:p>
-            <a:pPr indent="0" marL="0">
+            <a:pPr marL="0" indent="0">
               <a:lnSpc>
                 <a:spcPct val="135000"/>
               </a:lnSpc>
@@ -37190,7 +38093,7 @@
             <a:endParaRPr lang="en-US" sz="1200" dirty="0"/>
           </a:p>
           <a:p>
-            <a:pPr indent="0" marL="0">
+            <a:pPr marL="0" indent="0">
               <a:lnSpc>
                 <a:spcPct val="135000"/>
               </a:lnSpc>
@@ -37255,6 +38158,13 @@
           </a:solidFill>
           <a:ln/>
         </p:spPr>
+        <p:txBody>
+          <a:bodyPr/>
+          <a:lstStyle/>
+          <a:p>
+            <a:endParaRPr lang="ko-KR" altLang="en-US"/>
+          </a:p>
+        </p:txBody>
       </p:sp>
       <p:sp>
         <p:nvSpPr>
@@ -37279,11 +38189,11 @@
           </a:bodyPr>
           <a:lstStyle/>
           <a:p>
-            <a:pPr indent="0" marL="0">
+            <a:pPr marL="0" indent="0">
               <a:buNone/>
             </a:pPr>
             <a:r>
-              <a:rPr lang="en-US" sz="2800" b="1" spc="-30" kern="0" dirty="0">
+              <a:rPr lang="en-US" sz="2800" b="1" kern="0" spc="-30" dirty="0">
                 <a:solidFill>
                   <a:srgbClr val="1A1F36"/>
                 </a:solidFill>
@@ -37318,7 +38228,7 @@
           <a:bodyPr wrap="square" rtlCol="0" anchor="ctr"/>
           <a:lstStyle/>
           <a:p>
-            <a:pPr algn="r" indent="0" marL="0">
+            <a:pPr marL="0" indent="0" algn="r">
               <a:buNone/>
             </a:pPr>
             <a:r>
@@ -37352,15 +38262,27 @@
         </p:nvGraphicFramePr>
         <p:xfrm>
           <a:off x="548640" y="1645920"/>
-          <a:ext cx="11091672" cy="914400"/>
+          <a:ext cx="11091672" cy="2062480"/>
         </p:xfrm>
         <a:graphic>
           <a:graphicData uri="http://schemas.openxmlformats.org/drawingml/2006/table">
             <a:tbl>
               <a:tblPr/>
               <a:tblGrid>
-                <a:gridCol w="5545836"/>
-                <a:gridCol w="5545836"/>
+                <a:gridCol w="5545836">
+                  <a:extLst>
+                    <a:ext uri="{9D8B030D-6E8A-4147-A177-3AD203B41FA5}">
+                      <a16:colId xmlns:a16="http://schemas.microsoft.com/office/drawing/2014/main" val="20000"/>
+                    </a:ext>
+                  </a:extLst>
+                </a:gridCol>
+                <a:gridCol w="5545836">
+                  <a:extLst>
+                    <a:ext uri="{9D8B030D-6E8A-4147-A177-3AD203B41FA5}">
+                      <a16:colId xmlns:a16="http://schemas.microsoft.com/office/drawing/2014/main" val="20001"/>
+                    </a:ext>
+                  </a:extLst>
+                </a:gridCol>
               </a:tblGrid>
               <a:tr h="0">
                 <a:tc>
@@ -37368,7 +38290,7 @@
                     <a:bodyPr/>
                     <a:lstStyle/>
                     <a:p>
-                      <a:pPr algn="ctr" indent="0" marL="0">
+                      <a:pPr marL="0" indent="0" algn="ctr">
                         <a:buNone/>
                       </a:pPr>
                       <a:r>
@@ -37436,7 +38358,7 @@
                     <a:bodyPr/>
                     <a:lstStyle/>
                     <a:p>
-                      <a:pPr algn="ctr" indent="0" marL="0">
+                      <a:pPr marL="0" indent="0" algn="ctr">
                         <a:buNone/>
                       </a:pPr>
                       <a:r>
@@ -37499,6 +38421,11 @@
                     </a:solidFill>
                   </a:tcPr>
                 </a:tc>
+                <a:extLst>
+                  <a:ext uri="{0D108BD9-81ED-4DB2-BD59-A6C34878D82A}">
+                    <a16:rowId xmlns:a16="http://schemas.microsoft.com/office/drawing/2014/main" val="10000"/>
+                  </a:ext>
+                </a:extLst>
               </a:tr>
               <a:tr h="0">
                 <a:tc>
@@ -37506,7 +38433,7 @@
                     <a:bodyPr/>
                     <a:lstStyle/>
                     <a:p>
-                      <a:pPr indent="0" marL="0">
+                      <a:pPr marL="0" indent="0">
                         <a:buNone/>
                       </a:pPr>
                       <a:r>
@@ -37571,7 +38498,7 @@
                     <a:bodyPr/>
                     <a:lstStyle/>
                     <a:p>
-                      <a:pPr indent="0" marL="0">
+                      <a:pPr marL="0" indent="0">
                         <a:buNone/>
                       </a:pPr>
                       <a:r>
@@ -37631,6 +38558,11 @@
                     </a:lnB>
                   </a:tcPr>
                 </a:tc>
+                <a:extLst>
+                  <a:ext uri="{0D108BD9-81ED-4DB2-BD59-A6C34878D82A}">
+                    <a16:rowId xmlns:a16="http://schemas.microsoft.com/office/drawing/2014/main" val="10001"/>
+                  </a:ext>
+                </a:extLst>
               </a:tr>
               <a:tr h="0">
                 <a:tc>
@@ -37638,7 +38570,7 @@
                     <a:bodyPr/>
                     <a:lstStyle/>
                     <a:p>
-                      <a:pPr indent="0" marL="0">
+                      <a:pPr marL="0" indent="0">
                         <a:buNone/>
                       </a:pPr>
                       <a:r>
@@ -37706,7 +38638,7 @@
                     <a:bodyPr/>
                     <a:lstStyle/>
                     <a:p>
-                      <a:pPr indent="0" marL="0">
+                      <a:pPr marL="0" indent="0">
                         <a:buNone/>
                       </a:pPr>
                       <a:r>
@@ -37769,6 +38701,11 @@
                     </a:solidFill>
                   </a:tcPr>
                 </a:tc>
+                <a:extLst>
+                  <a:ext uri="{0D108BD9-81ED-4DB2-BD59-A6C34878D82A}">
+                    <a16:rowId xmlns:a16="http://schemas.microsoft.com/office/drawing/2014/main" val="10002"/>
+                  </a:ext>
+                </a:extLst>
               </a:tr>
               <a:tr h="0">
                 <a:tc>
@@ -37776,7 +38713,7 @@
                     <a:bodyPr/>
                     <a:lstStyle/>
                     <a:p>
-                      <a:pPr indent="0" marL="0">
+                      <a:pPr marL="0" indent="0">
                         <a:buNone/>
                       </a:pPr>
                       <a:r>
@@ -37841,7 +38778,7 @@
                     <a:bodyPr/>
                     <a:lstStyle/>
                     <a:p>
-                      <a:pPr indent="0" marL="0">
+                      <a:pPr marL="0" indent="0">
                         <a:buNone/>
                       </a:pPr>
                       <a:r>
@@ -37901,6 +38838,11 @@
                     </a:lnB>
                   </a:tcPr>
                 </a:tc>
+                <a:extLst>
+                  <a:ext uri="{0D108BD9-81ED-4DB2-BD59-A6C34878D82A}">
+                    <a16:rowId xmlns:a16="http://schemas.microsoft.com/office/drawing/2014/main" val="10003"/>
+                  </a:ext>
+                </a:extLst>
               </a:tr>
               <a:tr h="0">
                 <a:tc>
@@ -37908,7 +38850,7 @@
                     <a:bodyPr/>
                     <a:lstStyle/>
                     <a:p>
-                      <a:pPr indent="0" marL="0">
+                      <a:pPr marL="0" indent="0">
                         <a:buNone/>
                       </a:pPr>
                       <a:r>
@@ -37976,7 +38918,7 @@
                     <a:bodyPr/>
                     <a:lstStyle/>
                     <a:p>
-                      <a:pPr indent="0" marL="0">
+                      <a:pPr marL="0" indent="0">
                         <a:buNone/>
                       </a:pPr>
                       <a:r>
@@ -38039,6 +38981,11 @@
                     </a:solidFill>
                   </a:tcPr>
                 </a:tc>
+                <a:extLst>
+                  <a:ext uri="{0D108BD9-81ED-4DB2-BD59-A6C34878D82A}">
+                    <a16:rowId xmlns:a16="http://schemas.microsoft.com/office/drawing/2014/main" val="10004"/>
+                  </a:ext>
+                </a:extLst>
               </a:tr>
               <a:tr h="0">
                 <a:tc>
@@ -38046,7 +38993,7 @@
                     <a:bodyPr/>
                     <a:lstStyle/>
                     <a:p>
-                      <a:pPr indent="0" marL="0">
+                      <a:pPr marL="0" indent="0">
                         <a:buNone/>
                       </a:pPr>
                       <a:r>
@@ -38111,7 +39058,7 @@
                     <a:bodyPr/>
                     <a:lstStyle/>
                     <a:p>
-                      <a:pPr indent="0" marL="0">
+                      <a:pPr marL="0" indent="0">
                         <a:buNone/>
                       </a:pPr>
                       <a:r>
@@ -38171,6 +39118,11 @@
                     </a:lnB>
                   </a:tcPr>
                 </a:tc>
+                <a:extLst>
+                  <a:ext uri="{0D108BD9-81ED-4DB2-BD59-A6C34878D82A}">
+                    <a16:rowId xmlns:a16="http://schemas.microsoft.com/office/drawing/2014/main" val="10005"/>
+                  </a:ext>
+                </a:extLst>
               </a:tr>
               <a:tr h="0">
                 <a:tc>
@@ -38178,7 +39130,7 @@
                     <a:bodyPr/>
                     <a:lstStyle/>
                     <a:p>
-                      <a:pPr indent="0" marL="0">
+                      <a:pPr marL="0" indent="0">
                         <a:buNone/>
                       </a:pPr>
                       <a:r>
@@ -38246,7 +39198,7 @@
                     <a:bodyPr/>
                     <a:lstStyle/>
                     <a:p>
-                      <a:pPr indent="0" marL="0">
+                      <a:pPr marL="0" indent="0">
                         <a:buNone/>
                       </a:pPr>
                       <a:r>
@@ -38309,6 +39261,11 @@
                     </a:solidFill>
                   </a:tcPr>
                 </a:tc>
+                <a:extLst>
+                  <a:ext uri="{0D108BD9-81ED-4DB2-BD59-A6C34878D82A}">
+                    <a16:rowId xmlns:a16="http://schemas.microsoft.com/office/drawing/2014/main" val="10006"/>
+                  </a:ext>
+                </a:extLst>
               </a:tr>
             </a:tbl>
           </a:graphicData>
@@ -38358,6 +39315,13 @@
           </a:solidFill>
           <a:ln/>
         </p:spPr>
+        <p:txBody>
+          <a:bodyPr/>
+          <a:lstStyle/>
+          <a:p>
+            <a:endParaRPr lang="ko-KR" altLang="en-US"/>
+          </a:p>
+        </p:txBody>
       </p:sp>
       <p:sp>
         <p:nvSpPr>
@@ -38382,11 +39346,11 @@
           </a:bodyPr>
           <a:lstStyle/>
           <a:p>
-            <a:pPr indent="0" marL="0">
+            <a:pPr marL="0" indent="0">
               <a:buNone/>
             </a:pPr>
             <a:r>
-              <a:rPr lang="en-US" sz="2800" b="1" spc="-30" kern="0" dirty="0">
+              <a:rPr lang="en-US" sz="2800" b="1" kern="0" spc="-30" dirty="0">
                 <a:solidFill>
                   <a:srgbClr val="1A1F36"/>
                 </a:solidFill>
@@ -38421,7 +39385,7 @@
           <a:bodyPr wrap="square" rtlCol="0" anchor="ctr"/>
           <a:lstStyle/>
           <a:p>
-            <a:pPr algn="r" indent="0" marL="0">
+            <a:pPr marL="0" indent="0" algn="r">
               <a:buNone/>
             </a:pPr>
             <a:r>
@@ -38458,6 +39422,13 @@
           </a:solidFill>
           <a:ln/>
         </p:spPr>
+        <p:txBody>
+          <a:bodyPr/>
+          <a:lstStyle/>
+          <a:p>
+            <a:endParaRPr lang="ko-KR" altLang="en-US"/>
+          </a:p>
+        </p:txBody>
       </p:sp>
       <p:sp>
         <p:nvSpPr>
@@ -38480,7 +39451,7 @@
           <a:bodyPr wrap="square" rtlCol="0" anchor="ctr"/>
           <a:lstStyle/>
           <a:p>
-            <a:pPr algn="ctr" indent="0" marL="0">
+            <a:pPr marL="0" indent="0" algn="ctr">
               <a:buNone/>
             </a:pPr>
             <a:r>
@@ -38519,7 +39490,7 @@
           <a:bodyPr wrap="square" rtlCol="0" anchor="ctr"/>
           <a:lstStyle/>
           <a:p>
-            <a:pPr indent="0" marL="0">
+            <a:pPr marL="0" indent="0">
               <a:buNone/>
             </a:pPr>
             <a:r>
@@ -38556,6 +39527,13 @@
           </a:solidFill>
           <a:ln/>
         </p:spPr>
+        <p:txBody>
+          <a:bodyPr/>
+          <a:lstStyle/>
+          <a:p>
+            <a:endParaRPr lang="ko-KR" altLang="en-US"/>
+          </a:p>
+        </p:txBody>
       </p:sp>
       <p:sp>
         <p:nvSpPr>
@@ -38578,7 +39556,7 @@
           <a:bodyPr wrap="square" rtlCol="0" anchor="ctr"/>
           <a:lstStyle/>
           <a:p>
-            <a:pPr algn="ctr" indent="0" marL="0">
+            <a:pPr marL="0" indent="0" algn="ctr">
               <a:buNone/>
             </a:pPr>
             <a:r>
@@ -38617,7 +39595,7 @@
           <a:bodyPr wrap="square" rtlCol="0" anchor="ctr"/>
           <a:lstStyle/>
           <a:p>
-            <a:pPr indent="0" marL="0">
+            <a:pPr marL="0" indent="0">
               <a:buNone/>
             </a:pPr>
             <a:r>
@@ -38654,6 +39632,13 @@
           </a:solidFill>
           <a:ln/>
         </p:spPr>
+        <p:txBody>
+          <a:bodyPr/>
+          <a:lstStyle/>
+          <a:p>
+            <a:endParaRPr lang="ko-KR" altLang="en-US"/>
+          </a:p>
+        </p:txBody>
       </p:sp>
       <p:sp>
         <p:nvSpPr>
@@ -38676,7 +39661,7 @@
           <a:bodyPr wrap="square" rtlCol="0" anchor="ctr"/>
           <a:lstStyle/>
           <a:p>
-            <a:pPr algn="ctr" indent="0" marL="0">
+            <a:pPr marL="0" indent="0" algn="ctr">
               <a:buNone/>
             </a:pPr>
             <a:r>
@@ -38715,7 +39700,7 @@
           <a:bodyPr wrap="square" rtlCol="0" anchor="ctr"/>
           <a:lstStyle/>
           <a:p>
-            <a:pPr indent="0" marL="0">
+            <a:pPr marL="0" indent="0">
               <a:buNone/>
             </a:pPr>
             <a:r>
@@ -38755,6 +39740,13 @@
             <a:prstDash val="solid"/>
           </a:ln>
         </p:spPr>
+        <p:txBody>
+          <a:bodyPr/>
+          <a:lstStyle/>
+          <a:p>
+            <a:endParaRPr lang="ko-KR" altLang="en-US"/>
+          </a:p>
+        </p:txBody>
       </p:sp>
       <p:sp>
         <p:nvSpPr>
@@ -38777,7 +39769,7 @@
           <a:bodyPr wrap="square" rtlCol="0" anchor="ctr"/>
           <a:lstStyle/>
           <a:p>
-            <a:pPr algn="ctr" indent="0" marL="0">
+            <a:pPr marL="0" indent="0" algn="ctr">
               <a:lnSpc>
                 <a:spcPct val="140000"/>
               </a:lnSpc>
@@ -38797,7 +39789,7 @@
             <a:endParaRPr lang="en-US" sz="1800" dirty="0"/>
           </a:p>
           <a:p>
-            <a:pPr algn="ctr" indent="0" marL="0">
+            <a:pPr marL="0" indent="0" algn="ctr">
               <a:lnSpc>
                 <a:spcPct val="140000"/>
               </a:lnSpc>
@@ -38862,6 +39854,13 @@
           </a:solidFill>
           <a:ln/>
         </p:spPr>
+        <p:txBody>
+          <a:bodyPr/>
+          <a:lstStyle/>
+          <a:p>
+            <a:endParaRPr lang="ko-KR" altLang="en-US"/>
+          </a:p>
+        </p:txBody>
       </p:sp>
       <p:sp>
         <p:nvSpPr>
@@ -38886,11 +39885,11 @@
           </a:bodyPr>
           <a:lstStyle/>
           <a:p>
-            <a:pPr indent="0" marL="0">
+            <a:pPr marL="0" indent="0">
               <a:buNone/>
             </a:pPr>
             <a:r>
-              <a:rPr lang="en-US" sz="2800" b="1" spc="-30" kern="0" dirty="0">
+              <a:rPr lang="en-US" sz="2800" b="1" kern="0" spc="-30" dirty="0">
                 <a:solidFill>
                   <a:srgbClr val="1A1F36"/>
                 </a:solidFill>
@@ -38925,7 +39924,7 @@
           <a:bodyPr wrap="square" rtlCol="0" anchor="ctr"/>
           <a:lstStyle/>
           <a:p>
-            <a:pPr algn="r" indent="0" marL="0">
+            <a:pPr marL="0" indent="0" algn="r">
               <a:buNone/>
             </a:pPr>
             <a:r>
@@ -38959,16 +39958,34 @@
         </p:nvGraphicFramePr>
         <p:xfrm>
           <a:off x="548640" y="1645920"/>
-          <a:ext cx="11091672" cy="914400"/>
+          <a:ext cx="11091672" cy="2062480"/>
         </p:xfrm>
         <a:graphic>
           <a:graphicData uri="http://schemas.openxmlformats.org/drawingml/2006/table">
             <a:tbl>
               <a:tblPr/>
               <a:tblGrid>
-                <a:gridCol w="3697224"/>
-                <a:gridCol w="3697224"/>
-                <a:gridCol w="3697224"/>
+                <a:gridCol w="3697224">
+                  <a:extLst>
+                    <a:ext uri="{9D8B030D-6E8A-4147-A177-3AD203B41FA5}">
+                      <a16:colId xmlns:a16="http://schemas.microsoft.com/office/drawing/2014/main" val="20000"/>
+                    </a:ext>
+                  </a:extLst>
+                </a:gridCol>
+                <a:gridCol w="3697224">
+                  <a:extLst>
+                    <a:ext uri="{9D8B030D-6E8A-4147-A177-3AD203B41FA5}">
+                      <a16:colId xmlns:a16="http://schemas.microsoft.com/office/drawing/2014/main" val="20001"/>
+                    </a:ext>
+                  </a:extLst>
+                </a:gridCol>
+                <a:gridCol w="3697224">
+                  <a:extLst>
+                    <a:ext uri="{9D8B030D-6E8A-4147-A177-3AD203B41FA5}">
+                      <a16:colId xmlns:a16="http://schemas.microsoft.com/office/drawing/2014/main" val="20002"/>
+                    </a:ext>
+                  </a:extLst>
+                </a:gridCol>
               </a:tblGrid>
               <a:tr h="0">
                 <a:tc>
@@ -38976,7 +39993,7 @@
                     <a:bodyPr/>
                     <a:lstStyle/>
                     <a:p>
-                      <a:pPr algn="ctr" indent="0" marL="0">
+                      <a:pPr marL="0" indent="0" algn="ctr">
                         <a:buNone/>
                       </a:pPr>
                       <a:r>
@@ -39044,7 +40061,7 @@
                     <a:bodyPr/>
                     <a:lstStyle/>
                     <a:p>
-                      <a:pPr algn="ctr" indent="0" marL="0">
+                      <a:pPr marL="0" indent="0" algn="ctr">
                         <a:buNone/>
                       </a:pPr>
                       <a:r>
@@ -39112,7 +40129,7 @@
                     <a:bodyPr/>
                     <a:lstStyle/>
                     <a:p>
-                      <a:pPr algn="ctr" indent="0" marL="0">
+                      <a:pPr marL="0" indent="0" algn="ctr">
                         <a:buNone/>
                       </a:pPr>
                       <a:r>
@@ -39175,6 +40192,11 @@
                     </a:solidFill>
                   </a:tcPr>
                 </a:tc>
+                <a:extLst>
+                  <a:ext uri="{0D108BD9-81ED-4DB2-BD59-A6C34878D82A}">
+                    <a16:rowId xmlns:a16="http://schemas.microsoft.com/office/drawing/2014/main" val="10000"/>
+                  </a:ext>
+                </a:extLst>
               </a:tr>
               <a:tr h="0">
                 <a:tc>
@@ -39182,7 +40204,7 @@
                     <a:bodyPr/>
                     <a:lstStyle/>
                     <a:p>
-                      <a:pPr indent="0" marL="0">
+                      <a:pPr marL="0" indent="0">
                         <a:buNone/>
                       </a:pPr>
                       <a:r>
@@ -39247,7 +40269,7 @@
                     <a:bodyPr/>
                     <a:lstStyle/>
                     <a:p>
-                      <a:pPr indent="0" marL="0">
+                      <a:pPr marL="0" indent="0">
                         <a:buNone/>
                       </a:pPr>
                       <a:r>
@@ -39312,7 +40334,7 @@
                     <a:bodyPr/>
                     <a:lstStyle/>
                     <a:p>
-                      <a:pPr indent="0" marL="0">
+                      <a:pPr marL="0" indent="0">
                         <a:buNone/>
                       </a:pPr>
                       <a:r>
@@ -39372,6 +40394,11 @@
                     </a:lnB>
                   </a:tcPr>
                 </a:tc>
+                <a:extLst>
+                  <a:ext uri="{0D108BD9-81ED-4DB2-BD59-A6C34878D82A}">
+                    <a16:rowId xmlns:a16="http://schemas.microsoft.com/office/drawing/2014/main" val="10001"/>
+                  </a:ext>
+                </a:extLst>
               </a:tr>
               <a:tr h="0">
                 <a:tc>
@@ -39379,7 +40406,7 @@
                     <a:bodyPr/>
                     <a:lstStyle/>
                     <a:p>
-                      <a:pPr indent="0" marL="0">
+                      <a:pPr marL="0" indent="0">
                         <a:buNone/>
                       </a:pPr>
                       <a:r>
@@ -39447,7 +40474,7 @@
                     <a:bodyPr/>
                     <a:lstStyle/>
                     <a:p>
-                      <a:pPr indent="0" marL="0">
+                      <a:pPr marL="0" indent="0">
                         <a:buNone/>
                       </a:pPr>
                       <a:r>
@@ -39515,7 +40542,7 @@
                     <a:bodyPr/>
                     <a:lstStyle/>
                     <a:p>
-                      <a:pPr indent="0" marL="0">
+                      <a:pPr marL="0" indent="0">
                         <a:buNone/>
                       </a:pPr>
                       <a:r>
@@ -39578,6 +40605,11 @@
                     </a:solidFill>
                   </a:tcPr>
                 </a:tc>
+                <a:extLst>
+                  <a:ext uri="{0D108BD9-81ED-4DB2-BD59-A6C34878D82A}">
+                    <a16:rowId xmlns:a16="http://schemas.microsoft.com/office/drawing/2014/main" val="10002"/>
+                  </a:ext>
+                </a:extLst>
               </a:tr>
               <a:tr h="0">
                 <a:tc>
@@ -39585,7 +40617,7 @@
                     <a:bodyPr/>
                     <a:lstStyle/>
                     <a:p>
-                      <a:pPr indent="0" marL="0">
+                      <a:pPr marL="0" indent="0">
                         <a:buNone/>
                       </a:pPr>
                       <a:r>
@@ -39650,7 +40682,7 @@
                     <a:bodyPr/>
                     <a:lstStyle/>
                     <a:p>
-                      <a:pPr indent="0" marL="0">
+                      <a:pPr marL="0" indent="0">
                         <a:buNone/>
                       </a:pPr>
                       <a:r>
@@ -39715,7 +40747,7 @@
                     <a:bodyPr/>
                     <a:lstStyle/>
                     <a:p>
-                      <a:pPr indent="0" marL="0">
+                      <a:pPr marL="0" indent="0">
                         <a:buNone/>
                       </a:pPr>
                       <a:r>
@@ -39775,6 +40807,11 @@
                     </a:lnB>
                   </a:tcPr>
                 </a:tc>
+                <a:extLst>
+                  <a:ext uri="{0D108BD9-81ED-4DB2-BD59-A6C34878D82A}">
+                    <a16:rowId xmlns:a16="http://schemas.microsoft.com/office/drawing/2014/main" val="10003"/>
+                  </a:ext>
+                </a:extLst>
               </a:tr>
               <a:tr h="0">
                 <a:tc>
@@ -39782,7 +40819,7 @@
                     <a:bodyPr/>
                     <a:lstStyle/>
                     <a:p>
-                      <a:pPr indent="0" marL="0">
+                      <a:pPr marL="0" indent="0">
                         <a:buNone/>
                       </a:pPr>
                       <a:r>
@@ -39850,7 +40887,7 @@
                     <a:bodyPr/>
                     <a:lstStyle/>
                     <a:p>
-                      <a:pPr indent="0" marL="0">
+                      <a:pPr marL="0" indent="0">
                         <a:buNone/>
                       </a:pPr>
                       <a:r>
@@ -39918,7 +40955,7 @@
                     <a:bodyPr/>
                     <a:lstStyle/>
                     <a:p>
-                      <a:pPr indent="0" marL="0">
+                      <a:pPr marL="0" indent="0">
                         <a:buNone/>
                       </a:pPr>
                       <a:r>
@@ -39981,6 +41018,11 @@
                     </a:solidFill>
                   </a:tcPr>
                 </a:tc>
+                <a:extLst>
+                  <a:ext uri="{0D108BD9-81ED-4DB2-BD59-A6C34878D82A}">
+                    <a16:rowId xmlns:a16="http://schemas.microsoft.com/office/drawing/2014/main" val="10004"/>
+                  </a:ext>
+                </a:extLst>
               </a:tr>
               <a:tr h="0">
                 <a:tc>
@@ -39988,7 +41030,7 @@
                     <a:bodyPr/>
                     <a:lstStyle/>
                     <a:p>
-                      <a:pPr indent="0" marL="0">
+                      <a:pPr marL="0" indent="0">
                         <a:buNone/>
                       </a:pPr>
                       <a:r>
@@ -40053,7 +41095,7 @@
                     <a:bodyPr/>
                     <a:lstStyle/>
                     <a:p>
-                      <a:pPr indent="0" marL="0">
+                      <a:pPr marL="0" indent="0">
                         <a:buNone/>
                       </a:pPr>
                       <a:r>
@@ -40118,7 +41160,7 @@
                     <a:bodyPr/>
                     <a:lstStyle/>
                     <a:p>
-                      <a:pPr indent="0" marL="0">
+                      <a:pPr marL="0" indent="0">
                         <a:buNone/>
                       </a:pPr>
                       <a:r>
@@ -40178,6 +41220,11 @@
                     </a:lnB>
                   </a:tcPr>
                 </a:tc>
+                <a:extLst>
+                  <a:ext uri="{0D108BD9-81ED-4DB2-BD59-A6C34878D82A}">
+                    <a16:rowId xmlns:a16="http://schemas.microsoft.com/office/drawing/2014/main" val="10005"/>
+                  </a:ext>
+                </a:extLst>
               </a:tr>
               <a:tr h="0">
                 <a:tc>
@@ -40185,7 +41232,7 @@
                     <a:bodyPr/>
                     <a:lstStyle/>
                     <a:p>
-                      <a:pPr indent="0" marL="0">
+                      <a:pPr marL="0" indent="0">
                         <a:buNone/>
                       </a:pPr>
                       <a:r>
@@ -40253,7 +41300,7 @@
                     <a:bodyPr/>
                     <a:lstStyle/>
                     <a:p>
-                      <a:pPr indent="0" marL="0">
+                      <a:pPr marL="0" indent="0">
                         <a:buNone/>
                       </a:pPr>
                       <a:r>
@@ -40321,7 +41368,7 @@
                     <a:bodyPr/>
                     <a:lstStyle/>
                     <a:p>
-                      <a:pPr indent="0" marL="0">
+                      <a:pPr marL="0" indent="0">
                         <a:buNone/>
                       </a:pPr>
                       <a:r>
@@ -40384,6 +41431,11 @@
                     </a:solidFill>
                   </a:tcPr>
                 </a:tc>
+                <a:extLst>
+                  <a:ext uri="{0D108BD9-81ED-4DB2-BD59-A6C34878D82A}">
+                    <a16:rowId xmlns:a16="http://schemas.microsoft.com/office/drawing/2014/main" val="10006"/>
+                  </a:ext>
+                </a:extLst>
               </a:tr>
             </a:tbl>
           </a:graphicData>
@@ -40410,10 +41462,17 @@
           </a:solidFill>
           <a:ln/>
         </p:spPr>
-      </p:sp>
-      <p:sp>
-        <p:nvSpPr>
-          <p:cNvPr id="7" name="Text 4"/>
+        <p:txBody>
+          <a:bodyPr/>
+          <a:lstStyle/>
+          <a:p>
+            <a:endParaRPr lang="ko-KR" altLang="en-US"/>
+          </a:p>
+        </p:txBody>
+      </p:sp>
+      <p:sp>
+        <p:nvSpPr>
+          <p:cNvPr id="5" name="Text 4"/>
           <p:cNvSpPr/>
           <p:nvPr/>
         </p:nvSpPr>
@@ -40432,7 +41491,7 @@
           <a:bodyPr wrap="square" rtlCol="0" anchor="ctr"/>
           <a:lstStyle/>
           <a:p>
-            <a:pPr indent="0" marL="0">
+            <a:pPr marL="0" indent="0">
               <a:buNone/>
             </a:pPr>
             <a:r>
@@ -40494,6 +41553,13 @@
           </a:solidFill>
           <a:ln/>
         </p:spPr>
+        <p:txBody>
+          <a:bodyPr/>
+          <a:lstStyle/>
+          <a:p>
+            <a:endParaRPr lang="ko-KR" altLang="en-US"/>
+          </a:p>
+        </p:txBody>
       </p:sp>
       <p:sp>
         <p:nvSpPr>
@@ -40518,11 +41584,11 @@
           </a:bodyPr>
           <a:lstStyle/>
           <a:p>
-            <a:pPr indent="0" marL="0">
+            <a:pPr marL="0" indent="0">
               <a:buNone/>
             </a:pPr>
             <a:r>
-              <a:rPr lang="en-US" sz="2800" b="1" spc="-30" kern="0" dirty="0">
+              <a:rPr lang="en-US" sz="2800" b="1" kern="0" spc="-30" dirty="0">
                 <a:solidFill>
                   <a:srgbClr val="1A1F36"/>
                 </a:solidFill>
@@ -40557,7 +41623,7 @@
           <a:bodyPr wrap="square" rtlCol="0" anchor="ctr"/>
           <a:lstStyle/>
           <a:p>
-            <a:pPr algn="r" indent="0" marL="0">
+            <a:pPr marL="0" indent="0" algn="r">
               <a:buNone/>
             </a:pPr>
             <a:r>
@@ -40822,6 +41888,13 @@
           </a:solidFill>
           <a:ln/>
         </p:spPr>
+        <p:txBody>
+          <a:bodyPr/>
+          <a:lstStyle/>
+          <a:p>
+            <a:endParaRPr lang="ko-KR" altLang="en-US"/>
+          </a:p>
+        </p:txBody>
       </p:sp>
       <p:sp>
         <p:nvSpPr>
@@ -40842,6 +41915,13 @@
           </a:solidFill>
           <a:ln/>
         </p:spPr>
+        <p:txBody>
+          <a:bodyPr/>
+          <a:lstStyle/>
+          <a:p>
+            <a:endParaRPr lang="ko-KR" altLang="en-US"/>
+          </a:p>
+        </p:txBody>
       </p:sp>
       <p:sp>
         <p:nvSpPr>
@@ -40864,7 +41944,7 @@
           <a:bodyPr wrap="square" rtlCol="0" anchor="ctr"/>
           <a:lstStyle/>
           <a:p>
-            <a:pPr algn="ctr" indent="0" marL="0">
+            <a:pPr marL="0" indent="0" algn="ctr">
               <a:lnSpc>
                 <a:spcPct val="150000"/>
               </a:lnSpc>
@@ -40884,7 +41964,7 @@
             <a:endParaRPr lang="en-US" sz="2400" dirty="0"/>
           </a:p>
           <a:p>
-            <a:pPr algn="ctr" indent="0" marL="0">
+            <a:pPr marL="0" indent="0" algn="ctr">
               <a:lnSpc>
                 <a:spcPct val="150000"/>
               </a:lnSpc>
@@ -40926,7 +42006,7 @@
           <a:bodyPr wrap="square" rtlCol="0" anchor="ctr"/>
           <a:lstStyle/>
           <a:p>
-            <a:pPr algn="ctr" indent="0" marL="0">
+            <a:pPr marL="0" indent="0" algn="ctr">
               <a:buNone/>
             </a:pPr>
             <a:r>
@@ -40965,7 +42045,7 @@
           <a:bodyPr wrap="square" rtlCol="0" anchor="ctr"/>
           <a:lstStyle/>
           <a:p>
-            <a:pPr algn="r" indent="0" marL="0">
+            <a:pPr marL="0" indent="0" algn="r">
               <a:buNone/>
             </a:pPr>
             <a:r>
@@ -41027,6 +42107,13 @@
           </a:solidFill>
           <a:ln/>
         </p:spPr>
+        <p:txBody>
+          <a:bodyPr/>
+          <a:lstStyle/>
+          <a:p>
+            <a:endParaRPr lang="ko-KR" altLang="en-US"/>
+          </a:p>
+        </p:txBody>
       </p:sp>
       <p:sp>
         <p:nvSpPr>
@@ -41049,7 +42136,7 @@
           <a:bodyPr wrap="square" rtlCol="0" anchor="ctr"/>
           <a:lstStyle/>
           <a:p>
-            <a:pPr algn="ctr" indent="0" marL="0">
+            <a:pPr marL="0" indent="0" algn="ctr">
               <a:buNone/>
             </a:pPr>
             <a:r>
@@ -41088,7 +42175,7 @@
           <a:bodyPr wrap="square" rtlCol="0" anchor="ctr"/>
           <a:lstStyle/>
           <a:p>
-            <a:pPr indent="0" marL="0">
+            <a:pPr marL="0" indent="0">
               <a:buNone/>
             </a:pPr>
             <a:r>
@@ -41127,7 +42214,7 @@
           <a:bodyPr wrap="square" rtlCol="0" anchor="ctr"/>
           <a:lstStyle/>
           <a:p>
-            <a:pPr indent="0" marL="0">
+            <a:pPr marL="0" indent="0">
               <a:lnSpc>
                 <a:spcPct val="140000"/>
               </a:lnSpc>
@@ -41449,4 +42536,319 @@
     </a:ext>
   </a:extLst>
 </a:theme>
+</file>
+
+<file path=ppt/theme/theme2.xml><?xml version="1.0" encoding="utf-8"?>
+<a:theme xmlns:a="http://schemas.openxmlformats.org/drawingml/2006/main" name="Office 테마">
+  <a:themeElements>
+    <a:clrScheme name="Office">
+      <a:dk1>
+        <a:sysClr val="windowText" lastClr="000000"/>
+      </a:dk1>
+      <a:lt1>
+        <a:sysClr val="window" lastClr="FFFFFF"/>
+      </a:lt1>
+      <a:dk2>
+        <a:srgbClr val="0E2841"/>
+      </a:dk2>
+      <a:lt2>
+        <a:srgbClr val="E8E8E8"/>
+      </a:lt2>
+      <a:accent1>
+        <a:srgbClr val="156082"/>
+      </a:accent1>
+      <a:accent2>
+        <a:srgbClr val="E97132"/>
+      </a:accent2>
+      <a:accent3>
+        <a:srgbClr val="196B24"/>
+      </a:accent3>
+      <a:accent4>
+        <a:srgbClr val="0F9ED5"/>
+      </a:accent4>
+      <a:accent5>
+        <a:srgbClr val="A02B93"/>
+      </a:accent5>
+      <a:accent6>
+        <a:srgbClr val="4EA72E"/>
+      </a:accent6>
+      <a:hlink>
+        <a:srgbClr val="467886"/>
+      </a:hlink>
+      <a:folHlink>
+        <a:srgbClr val="96607D"/>
+      </a:folHlink>
+    </a:clrScheme>
+    <a:fontScheme name="Office">
+      <a:majorFont>
+        <a:latin typeface="맑은 고딕" panose="02110004020202020204"/>
+        <a:ea typeface=""/>
+        <a:cs typeface=""/>
+        <a:font script="Jpan" typeface="游ゴシック Light"/>
+        <a:font script="Hang" typeface="맑은 고딕"/>
+        <a:font script="Hans" typeface="等线 Light"/>
+        <a:font script="Hant" typeface="新細明體"/>
+        <a:font script="Arab" typeface="Times New Roman"/>
+        <a:font script="Hebr" typeface="Times New Roman"/>
+        <a:font script="Thai" typeface="Angsana New"/>
+        <a:font script="Ethi" typeface="Nyala"/>
+        <a:font script="Beng" typeface="Vrinda"/>
+        <a:font script="Gujr" typeface="Shruti"/>
+        <a:font script="Khmr" typeface="MoolBoran"/>
+        <a:font script="Knda" typeface="Tunga"/>
+        <a:font script="Guru" typeface="Raavi"/>
+        <a:font script="Cans" typeface="Euphemia"/>
+        <a:font script="Cher" typeface="Plantagenet Cherokee"/>
+        <a:font script="Yiii" typeface="Microsoft Yi Baiti"/>
+        <a:font script="Tibt" typeface="Microsoft Himalaya"/>
+        <a:font script="Thaa" typeface="MV Boli"/>
+        <a:font script="Deva" typeface="Mangal"/>
+        <a:font script="Telu" typeface="Gautami"/>
+        <a:font script="Taml" typeface="Latha"/>
+        <a:font script="Syrc" typeface="Estrangelo Edessa"/>
+        <a:font script="Orya" typeface="Kalinga"/>
+        <a:font script="Mlym" typeface="Kartika"/>
+        <a:font script="Laoo" typeface="DokChampa"/>
+        <a:font script="Sinh" typeface="Iskoola Pota"/>
+        <a:font script="Mong" typeface="Mongolian Baiti"/>
+        <a:font script="Viet" typeface="Times New Roman"/>
+        <a:font script="Uigh" typeface="Microsoft Uighur"/>
+        <a:font script="Geor" typeface="Sylfaen"/>
+        <a:font script="Armn" typeface="Arial"/>
+        <a:font script="Bugi" typeface="Leelawadee UI"/>
+        <a:font script="Bopo" typeface="Microsoft JhengHei"/>
+        <a:font script="Java" typeface="Javanese Text"/>
+        <a:font script="Lisu" typeface="Segoe UI"/>
+        <a:font script="Mymr" typeface="Myanmar Text"/>
+        <a:font script="Nkoo" typeface="Ebrima"/>
+        <a:font script="Olck" typeface="Nirmala UI"/>
+        <a:font script="Osma" typeface="Ebrima"/>
+        <a:font script="Phag" typeface="Phagspa"/>
+        <a:font script="Syrn" typeface="Estrangelo Edessa"/>
+        <a:font script="Syrj" typeface="Estrangelo Edessa"/>
+        <a:font script="Syre" typeface="Estrangelo Edessa"/>
+        <a:font script="Sora" typeface="Nirmala UI"/>
+        <a:font script="Tale" typeface="Microsoft Tai Le"/>
+        <a:font script="Talu" typeface="Microsoft New Tai Lue"/>
+        <a:font script="Tfng" typeface="Ebrima"/>
+      </a:majorFont>
+      <a:minorFont>
+        <a:latin typeface="맑은 고딕" panose="02110004020202020204"/>
+        <a:ea typeface=""/>
+        <a:cs typeface=""/>
+        <a:font script="Jpan" typeface="游ゴシック"/>
+        <a:font script="Hang" typeface="맑은 고딕"/>
+        <a:font script="Hans" typeface="等线"/>
+        <a:font script="Hant" typeface="新細明體"/>
+        <a:font script="Arab" typeface="Arial"/>
+        <a:font script="Hebr" typeface="Arial"/>
+        <a:font script="Thai" typeface="Cordia New"/>
+        <a:font script="Ethi" typeface="Nyala"/>
+        <a:font script="Beng" typeface="Vrinda"/>
+        <a:font script="Gujr" typeface="Shruti"/>
+        <a:font script="Khmr" typeface="DaunPenh"/>
+        <a:font script="Knda" typeface="Tunga"/>
+        <a:font script="Guru" typeface="Raavi"/>
+        <a:font script="Cans" typeface="Euphemia"/>
+        <a:font script="Cher" typeface="Plantagenet Cherokee"/>
+        <a:font script="Yiii" typeface="Microsoft Yi Baiti"/>
+        <a:font script="Tibt" typeface="Microsoft Himalaya"/>
+        <a:font script="Thaa" typeface="MV Boli"/>
+        <a:font script="Deva" typeface="Mangal"/>
+        <a:font script="Telu" typeface="Gautami"/>
+        <a:font script="Taml" typeface="Latha"/>
+        <a:font script="Syrc" typeface="Estrangelo Edessa"/>
+        <a:font script="Orya" typeface="Kalinga"/>
+        <a:font script="Mlym" typeface="Kartika"/>
+        <a:font script="Laoo" typeface="DokChampa"/>
+        <a:font script="Sinh" typeface="Iskoola Pota"/>
+        <a:font script="Mong" typeface="Mongolian Baiti"/>
+        <a:font script="Viet" typeface="Arial"/>
+        <a:font script="Uigh" typeface="Microsoft Uighur"/>
+        <a:font script="Geor" typeface="Sylfaen"/>
+        <a:font script="Armn" typeface="Arial"/>
+        <a:font script="Bugi" typeface="Leelawadee UI"/>
+        <a:font script="Bopo" typeface="Microsoft JhengHei"/>
+        <a:font script="Java" typeface="Javanese Text"/>
+        <a:font script="Lisu" typeface="Segoe UI"/>
+        <a:font script="Mymr" typeface="Myanmar Text"/>
+        <a:font script="Nkoo" typeface="Ebrima"/>
+        <a:font script="Olck" typeface="Nirmala UI"/>
+        <a:font script="Osma" typeface="Ebrima"/>
+        <a:font script="Phag" typeface="Phagspa"/>
+        <a:font script="Syrn" typeface="Estrangelo Edessa"/>
+        <a:font script="Syrj" typeface="Estrangelo Edessa"/>
+        <a:font script="Syre" typeface="Estrangelo Edessa"/>
+        <a:font script="Sora" typeface="Nirmala UI"/>
+        <a:font script="Tale" typeface="Microsoft Tai Le"/>
+        <a:font script="Talu" typeface="Microsoft New Tai Lue"/>
+        <a:font script="Tfng" typeface="Ebrima"/>
+      </a:minorFont>
+    </a:fontScheme>
+    <a:fmtScheme name="Office">
+      <a:fillStyleLst>
+        <a:solidFill>
+          <a:schemeClr val="phClr"/>
+        </a:solidFill>
+        <a:gradFill rotWithShape="1">
+          <a:gsLst>
+            <a:gs pos="0">
+              <a:schemeClr val="phClr">
+                <a:lumMod val="110000"/>
+                <a:satMod val="105000"/>
+                <a:tint val="67000"/>
+              </a:schemeClr>
+            </a:gs>
+            <a:gs pos="50000">
+              <a:schemeClr val="phClr">
+                <a:lumMod val="105000"/>
+                <a:satMod val="103000"/>
+                <a:tint val="73000"/>
+              </a:schemeClr>
+            </a:gs>
+            <a:gs pos="100000">
+              <a:schemeClr val="phClr">
+                <a:lumMod val="105000"/>
+                <a:satMod val="109000"/>
+                <a:tint val="81000"/>
+              </a:schemeClr>
+            </a:gs>
+          </a:gsLst>
+          <a:lin ang="5400000" scaled="0"/>
+        </a:gradFill>
+        <a:gradFill rotWithShape="1">
+          <a:gsLst>
+            <a:gs pos="0">
+              <a:schemeClr val="phClr">
+                <a:satMod val="103000"/>
+                <a:lumMod val="102000"/>
+                <a:tint val="94000"/>
+              </a:schemeClr>
+            </a:gs>
+            <a:gs pos="50000">
+              <a:schemeClr val="phClr">
+                <a:satMod val="110000"/>
+                <a:lumMod val="100000"/>
+                <a:shade val="100000"/>
+              </a:schemeClr>
+            </a:gs>
+            <a:gs pos="100000">
+              <a:schemeClr val="phClr">
+                <a:lumMod val="99000"/>
+                <a:satMod val="120000"/>
+                <a:shade val="78000"/>
+              </a:schemeClr>
+            </a:gs>
+          </a:gsLst>
+          <a:lin ang="5400000" scaled="0"/>
+        </a:gradFill>
+      </a:fillStyleLst>
+      <a:lnStyleLst>
+        <a:ln w="12700" cap="flat" cmpd="sng" algn="ctr">
+          <a:solidFill>
+            <a:schemeClr val="phClr"/>
+          </a:solidFill>
+          <a:prstDash val="solid"/>
+          <a:miter lim="800000"/>
+        </a:ln>
+        <a:ln w="19050" cap="flat" cmpd="sng" algn="ctr">
+          <a:solidFill>
+            <a:schemeClr val="phClr"/>
+          </a:solidFill>
+          <a:prstDash val="solid"/>
+          <a:miter lim="800000"/>
+        </a:ln>
+        <a:ln w="25400" cap="flat" cmpd="sng" algn="ctr">
+          <a:solidFill>
+            <a:schemeClr val="phClr"/>
+          </a:solidFill>
+          <a:prstDash val="solid"/>
+          <a:miter lim="800000"/>
+        </a:ln>
+      </a:lnStyleLst>
+      <a:effectStyleLst>
+        <a:effectStyle>
+          <a:effectLst/>
+        </a:effectStyle>
+        <a:effectStyle>
+          <a:effectLst/>
+        </a:effectStyle>
+        <a:effectStyle>
+          <a:effectLst>
+            <a:outerShdw blurRad="57150" dist="19050" dir="5400000" algn="ctr" rotWithShape="0">
+              <a:srgbClr val="000000">
+                <a:alpha val="63000"/>
+              </a:srgbClr>
+            </a:outerShdw>
+          </a:effectLst>
+        </a:effectStyle>
+      </a:effectStyleLst>
+      <a:bgFillStyleLst>
+        <a:solidFill>
+          <a:schemeClr val="phClr"/>
+        </a:solidFill>
+        <a:solidFill>
+          <a:schemeClr val="phClr">
+            <a:tint val="95000"/>
+            <a:satMod val="170000"/>
+          </a:schemeClr>
+        </a:solidFill>
+        <a:gradFill rotWithShape="1">
+          <a:gsLst>
+            <a:gs pos="0">
+              <a:schemeClr val="phClr">
+                <a:tint val="93000"/>
+                <a:satMod val="150000"/>
+                <a:shade val="98000"/>
+                <a:lumMod val="102000"/>
+              </a:schemeClr>
+            </a:gs>
+            <a:gs pos="50000">
+              <a:schemeClr val="phClr">
+                <a:tint val="98000"/>
+                <a:satMod val="130000"/>
+                <a:shade val="90000"/>
+                <a:lumMod val="103000"/>
+              </a:schemeClr>
+            </a:gs>
+            <a:gs pos="100000">
+              <a:schemeClr val="phClr">
+                <a:shade val="63000"/>
+                <a:satMod val="120000"/>
+              </a:schemeClr>
+            </a:gs>
+          </a:gsLst>
+          <a:lin ang="5400000" scaled="0"/>
+        </a:gradFill>
+      </a:bgFillStyleLst>
+    </a:fmtScheme>
+  </a:themeElements>
+  <a:objectDefaults>
+    <a:lnDef>
+      <a:spPr/>
+      <a:bodyPr/>
+      <a:lstStyle/>
+      <a:style>
+        <a:lnRef idx="2">
+          <a:schemeClr val="accent1"/>
+        </a:lnRef>
+        <a:fillRef idx="0">
+          <a:schemeClr val="accent1"/>
+        </a:fillRef>
+        <a:effectRef idx="1">
+          <a:schemeClr val="accent1"/>
+        </a:effectRef>
+        <a:fontRef idx="minor">
+          <a:schemeClr val="tx1"/>
+        </a:fontRef>
+      </a:style>
+    </a:lnDef>
+  </a:objectDefaults>
+  <a:extraClrSchemeLst/>
+  <a:extLst>
+    <a:ext uri="{05A4C25C-085E-4340-85A3-A5531E510DB2}">
+      <thm15:themeFamily xmlns:thm15="http://schemas.microsoft.com/office/thememl/2012/main" name="Office Theme" id="{2E142A2C-CD16-42D6-873A-C26D2A0506FA}" vid="{1BDDFF52-6CD6-40A5-AB3C-68EB2F1E4D0A}"/>
+    </a:ext>
+  </a:extLst>
+</a:theme>
 </file>